--- a/docs/SkillPath-Presentation.pptx
+++ b/docs/SkillPath-Presentation.pptx
@@ -17,6 +17,7 @@
     <p:sldId id="265" r:id="rId17"/>
     <p:sldId id="266" r:id="rId18"/>
     <p:sldId id="267" r:id="rId19"/>
+    <p:sldId id="272" r:id="rId24"/>
     <p:sldId id="268" r:id="rId20"/>
     <p:sldId id="269" r:id="rId21"/>
     <p:sldId id="270" r:id="rId22"/>
@@ -517,7 +518,7 @@
           <a:lstStyle/>
           <a:p>
             <a:r>
-              <a:t>Opening: SkillPath is an AI learning coach. Most training starts by guessing what you know. This starts by measuring it, then teaches only the gaps. It runs entirely in a browser tab, with no backend to host, and works with whichever AI provider you already pay for - or a free one.</a:t>
+              <a:t>Opening: SkillPath is an AI learning coach. Most training starts by guessing what you know. This starts by measuring it, then teaches only the gaps. There is no backend to host: it runs in the browser and installs on a phone or laptop like an app. It works with whichever AI provider you already pay for - or Google Gemini's free tier, which is the default.</a:t>
             </a:r>
           </a:p>
         </p:txBody>
@@ -587,7 +588,7 @@
           <a:lstStyle/>
           <a:p>
             <a:r>
-              <a:t>No lock-in was a deliberate design goal. A team can use its existing paid provider, or a learner can start free on Gemini or Groq. Adding a provider later is one catalog entry, not a refactor.</a:t>
+              <a:t>No lock-in was a deliberate design goal. Google Gemini is the default because a learner can get a free key in a minute, with no credit card. A team can still use its existing paid provider. Whatever key is used, it is encrypted on the learner's device and sent only to that provider. Adding a provider later is one catalog entry, not a refactor.</a:t>
             </a:r>
           </a:p>
         </p:txBody>
@@ -657,7 +658,7 @@
           <a:lstStyle/>
           <a:p>
             <a:r>
-              <a:t>This is the engineering that is invisible when it works. Without it, a free model returns almost-JSON and the screen breaks. With it, the same model produces a usable lesson. 54 automated checks cover exactly these paths.</a:t>
+              <a:t>This is the engineering that is invisible when it works. Without it, a free model returns almost-JSON and the screen breaks. With it, the same model produces a usable lesson.</a:t>
             </a:r>
           </a:p>
         </p:txBody>
@@ -727,7 +728,7 @@
           <a:lstStyle/>
           <a:p>
             <a:r>
-              <a:t>Deliberately boring architecture: a static site plus the provider's API. It deploys anywhere, costs nothing to host, and has two clearly marked seams for the next stage - storage and the key proxy.</a:t>
+              <a:t>Deliberately boring architecture: a static site, a service worker for offline use, and the provider's API. It deploys anywhere, costs nothing to host, and has two clearly marked seams for the next stage - storage, and an optional key proxy.</a:t>
             </a:r>
           </a:p>
         </p:txBody>
@@ -797,7 +798,7 @@
           <a:lstStyle/>
           <a:p>
             <a:r>
-              <a:t>Keep this slide short. The point is that it is small enough for one developer to own, strictly typed end to end, and the risky AI paths are covered by automated checks that run without spending a penny on tokens.</a:t>
+              <a:t>Keep this slide short. The point is that it is small enough for one developer to own, strictly typed end to end, and the key never sits in plain text anywhere - not in the code, not in the build, not in browser storage.</a:t>
             </a:r>
           </a:p>
         </p:txBody>
@@ -867,7 +868,7 @@
           <a:lstStyle/>
           <a:p>
             <a:r>
-              <a:t>Say the caveat before anyone asks - it builds trust. Today it is a personal tool. The fix is understood and scoped: one serverless function holding the key, and the app points at it instead of the provider.</a:t>
+              <a:t>Say the caveat before anyone asks - it builds trust. Every learner needs their own API key. Gemini's is free and takes a minute, and the app stores it encrypted. If we want people to use SkillPath with no key at all, the fix is understood and scoped: one serverless function holding our key, with a usage limit per person.</a:t>
             </a:r>
           </a:p>
         </p:txBody>
@@ -937,7 +938,7 @@
           <a:lstStyle/>
           <a:p>
             <a:r>
-              <a:t>Close the technical story with direction. The first item is what turns this from a personal tool into something the team can use, and it is small.</a:t>
+              <a:t>Close the technical story with direction. The installable, encrypted version is done. Publishing is next and small: static hosting on Vercel, and PWABuilder turns the same site into an Android package. The key proxy only matters if we want people to learn without a key of their own.</a:t>
             </a:r>
           </a:p>
         </p:txBody>
@@ -1032,6 +1033,76 @@
 </p:notes>
 </file>
 
+<file path=ppt/notesSlides/notesSlide17.xml><?xml version="1.0" encoding="utf-8"?>
+<p:notes xmlns:a="http://schemas.openxmlformats.org/drawingml/2006/main" xmlns:p="http://schemas.openxmlformats.org/presentationml/2006/main" xmlns:r="http://schemas.openxmlformats.org/officeDocument/2006/relationships">
+  <p:cSld>
+    <p:spTree>
+      <p:nvGrpSpPr>
+        <p:cNvPr id="1" name=""/>
+        <p:cNvGrpSpPr/>
+        <p:nvPr/>
+      </p:nvGrpSpPr>
+      <p:grpSpPr>
+        <a:xfrm>
+          <a:off x="0" y="0"/>
+          <a:ext cx="0" cy="0"/>
+          <a:chOff x="0" y="0"/>
+          <a:chExt cx="0" cy="0"/>
+        </a:xfrm>
+      </p:grpSpPr>
+      <p:sp>
+        <p:nvSpPr>
+          <p:cNvPr id="2" name="Slide Image Placeholder 1"/>
+          <p:cNvSpPr>
+            <a:spLocks noGrp="1"/>
+          </p:cNvSpPr>
+          <p:nvPr>
+            <p:ph type="sldImg" idx="2"/>
+          </p:nvPr>
+        </p:nvSpPr>
+        <p:spPr/>
+      </p:sp>
+      <p:sp>
+        <p:nvSpPr>
+          <p:cNvPr id="3" name="Notes Placeholder 2"/>
+          <p:cNvSpPr>
+            <a:spLocks noGrp="1"/>
+          </p:cNvSpPr>
+          <p:nvPr>
+            <p:ph type="body" idx="3" sz="quarter"/>
+          </p:nvPr>
+        </p:nvSpPr>
+        <p:spPr/>
+        <p:txBody>
+          <a:bodyPr/>
+          <a:lstStyle/>
+          <a:p>
+            <a:r>
+              <a:t>This is what turned a personal tool into something we can hand out. SkillPath is now a Progressive Web App: people install it from the browser, it opens offline, and it updates itself. Each learner uses their own key - Gemini's is free - and it is encrypted on their device with a key the app can use but never read out. Backups are a single file, so nothing is lost when someone changes phone.</a:t>
+            </a:r>
+          </a:p>
+        </p:txBody>
+      </p:sp>
+      <p:sp>
+        <p:nvSpPr>
+          <p:cNvPr id="4" name="Slide Number Placeholder 3"/>
+          <p:cNvSpPr>
+            <a:spLocks noGrp="1"/>
+          </p:cNvSpPr>
+          <p:nvPr>
+            <p:ph type="sldNum" idx="5" sz="quarter"/>
+          </p:nvPr>
+        </p:nvSpPr>
+        <p:spPr/>
+      </p:sp>
+    </p:spTree>
+  </p:cSld>
+  <p:clrMapOvr>
+    <a:masterClrMapping/>
+  </p:clrMapOvr>
+</p:notes>
+</file>
+
 <file path=ppt/notesSlides/notesSlide2.xml><?xml version="1.0" encoding="utf-8"?>
 <p:notes xmlns:a="http://schemas.openxmlformats.org/drawingml/2006/main" xmlns:p="http://schemas.openxmlformats.org/presentationml/2006/main" xmlns:r="http://schemas.openxmlformats.org/officeDocument/2006/relationships">
   <p:cSld>
@@ -1497,7 +1568,7 @@
           <a:lstStyle/>
           <a:p>
             <a:r>
-              <a:t>Claude is the default because of this list, especially structured outputs and caching. Every other provider is mapped onto the same ideas, and where a model cannot do one of them the app degrades gracefully instead of failing.</a:t>
+              <a:t>Gemini is now the default because it is free to start with. Claude is still the deepest integration: it has its own adapter built on the official SDK, and this list is why - especially structured outputs and caching. Every other provider is mapped onto the same ideas, and where a model cannot do one of them the app degrades gracefully instead of failing.</a:t>
             </a:r>
           </a:p>
         </p:txBody>
@@ -4619,59 +4690,6 @@
       </p:sp>
       <p:sp>
         <p:nvSpPr>
-          <p:cNvPr id="3" name="Oval 2"/>
-          <p:cNvSpPr/>
-          <p:nvPr/>
-        </p:nvSpPr>
-        <p:spPr>
-          <a:xfrm>
-            <a:off x="731520" y="822960"/>
-            <a:ext cx="822960" cy="822960"/>
-          </a:xfrm>
-          <a:prstGeom prst="ellipse">
-            <a:avLst/>
-          </a:prstGeom>
-          <a:solidFill>
-            <a:srgbClr val="4F46E5"/>
-          </a:solidFill>
-          <a:ln>
-            <a:noFill/>
-          </a:ln>
-          <a:effectLst/>
-        </p:spPr>
-        <p:style>
-          <a:lnRef idx="1">
-            <a:schemeClr val="accent1"/>
-          </a:lnRef>
-          <a:fillRef idx="3">
-            <a:schemeClr val="accent1"/>
-          </a:fillRef>
-          <a:effectRef idx="2">
-            <a:schemeClr val="accent1"/>
-          </a:effectRef>
-          <a:fontRef idx="minor">
-            <a:schemeClr val="lt1"/>
-          </a:fontRef>
-        </p:style>
-        <p:txBody>
-          <a:bodyPr rtlCol="0" anchor="ctr" lIns="0" rIns="0" tIns="0" bIns="0"/>
-          <a:lstStyle/>
-          <a:p>
-            <a:pPr algn="ctr"/>
-            <a:r>
-              <a:rPr sz="3000" b="1">
-                <a:solidFill>
-                  <a:srgbClr val="FFFFFF"/>
-                </a:solidFill>
-                <a:latin typeface="Calibri"/>
-              </a:rPr>
-              <a:t>S</a:t>
-            </a:r>
-          </a:p>
-        </p:txBody>
-      </p:sp>
-      <p:sp>
-        <p:nvSpPr>
           <p:cNvPr id="4" name="TextBox 3"/>
           <p:cNvSpPr txBox="1"/>
           <p:nvPr/>
@@ -5049,7 +5067,73 @@
                 </a:solidFill>
                 <a:latin typeface="Calibri"/>
               </a:rPr>
-              <a:t>Runs in a browser tab</a:t>
+              <a:t>Installs as an app</a:t>
+            </a:r>
+          </a:p>
+        </p:txBody>
+      </p:sp>
+      <p:pic>
+        <p:nvPicPr>
+          <p:cNvPr id="13" name="SkillPath logo" descr="pwa-512x512.png"/>
+          <p:cNvPicPr>
+            <a:picLocks noChangeAspect="1"/>
+          </p:cNvPicPr>
+          <p:nvPr/>
+        </p:nvPicPr>
+        <p:blipFill>
+          <a:blip r:embed="rId3"/>
+          <a:stretch>
+            <a:fillRect/>
+          </a:stretch>
+        </p:blipFill>
+        <p:spPr>
+          <a:xfrm>
+            <a:off x="731520" y="822960"/>
+            <a:ext cx="822960" cy="822960"/>
+          </a:xfrm>
+          <a:prstGeom prst="rect">
+            <a:avLst/>
+          </a:prstGeom>
+        </p:spPr>
+      </p:pic>
+      <p:sp>
+        <p:nvSpPr>
+          <p:cNvPr id="14" name="Credit"/>
+          <p:cNvSpPr txBox="1"/>
+          <p:nvPr/>
+        </p:nvSpPr>
+        <p:spPr>
+          <a:xfrm>
+            <a:off x="731520" y="5989320"/>
+            <a:ext cx="10058400" cy="457200"/>
+          </a:xfrm>
+          <a:prstGeom prst="rect">
+            <a:avLst/>
+          </a:prstGeom>
+          <a:noFill/>
+        </p:spPr>
+        <p:txBody>
+          <a:bodyPr wrap="square" lIns="0" rIns="0" tIns="0" bIns="0" anchor="t">
+            <a:spAutoFit/>
+          </a:bodyPr>
+          <a:lstStyle/>
+          <a:p>
+            <a:pPr algn="l">
+              <a:lnSpc>
+                <a:spcPct val="115000"/>
+              </a:lnSpc>
+              <a:spcAft>
+                <a:spcPts val="600"/>
+              </a:spcAft>
+            </a:pPr>
+            <a:r>
+              <a:rPr sz="1500" b="0">
+                <a:solidFill>
+                  <a:srgbClr val="C7D2FE"/>
+                </a:solidFill>
+                <a:latin typeface="Calibri"/>
+              </a:rPr>
+              <a:t>Designed &amp; developed by Sohel Pathan  ·  © 2026 Sohel Pathan. All rights reserved.</a:t>
             </a:r>
           </a:p>
         </p:txBody>
@@ -5195,7 +5279,7 @@
                 </a:solidFill>
                 <a:latin typeface="Calibri"/>
               </a:rPr>
-              <a:t>Pick one in the app, switch any time - keys stay in your browser</a:t>
+              <a:t>Pick one in the app, switch any time - your key stays encrypted on your device</a:t>
             </a:r>
           </a:p>
         </p:txBody>
@@ -5369,7 +5453,7 @@
                 </a:solidFill>
                 <a:latin typeface="Calibri"/>
               </a:rPr>
-              <a:t>Google Gemini</a:t>
+              <a:t>Google Gemini (default)</a:t>
             </a:r>
           </a:p>
           <a:p>
@@ -5657,7 +5741,7 @@
                 </a:solidFill>
                 <a:latin typeface="Calibri"/>
               </a:rPr>
-              <a:t>Anthropic Claude (default)</a:t>
+              <a:t>Anthropic Claude</a:t>
             </a:r>
           </a:p>
           <a:p>
@@ -7047,7 +7131,7 @@
                 </a:solidFill>
                 <a:latin typeface="Calibri"/>
               </a:rPr>
-              <a:t>No backend, no database, no account</a:t>
+              <a:t>No backend, no database, no account - and it installs as an app</a:t>
             </a:r>
           </a:p>
         </p:txBody>
@@ -7697,7 +7781,7 @@
                 </a:solidFill>
                 <a:latin typeface="Calibri"/>
               </a:rPr>
-              <a:t>Claude, Gemini, Groq, OpenAI, ...</a:t>
+              <a:t>Gemini (default), Claude, Groq, OpenAI, ...</a:t>
             </a:r>
           </a:p>
         </p:txBody>
@@ -7827,7 +7911,7 @@
                 </a:solidFill>
                 <a:latin typeface="Calibri"/>
               </a:rPr>
-              <a:t>Tracks, profiles, plans, chats and quiz history - in this browser</a:t>
+              <a:t>Tracks, profiles, plans, chats, quiz history and the encrypted API key - on this device</a:t>
             </a:r>
           </a:p>
         </p:txBody>
@@ -7888,7 +7972,7 @@
                 </a:solidFill>
                 <a:latin typeface="Calibri"/>
               </a:rPr>
-              <a:t>Putting a small serverless function in front of lib/ai is the only change needed to hide the API key.</a:t>
+              <a:t>A small serverless proxy in front of lib/ai would let people learn without their own key.</a:t>
             </a:r>
           </a:p>
         </p:txBody>
@@ -7926,7 +8010,7 @@
             <a:avLst/>
           </a:prstGeom>
           <a:solidFill>
-            <a:srgbClr val="FFFFFF"/>
+            <a:srgbClr val="1E1B4B"/>
           </a:solidFill>
           <a:ln>
             <a:noFill/>
@@ -7988,11 +8072,11 @@
             <a:r>
               <a:rPr sz="3400" b="1">
                 <a:solidFill>
-                  <a:srgbClr val="0F172A"/>
+                  <a:srgbClr val="FFFFFF"/>
                 </a:solidFill>
                 <a:latin typeface="Cambria"/>
               </a:rPr>
-              <a:t>Build and quality</a:t>
+              <a:t>Private, installable, offline</a:t>
             </a:r>
           </a:p>
         </p:txBody>
@@ -8030,11 +8114,11 @@
             <a:r>
               <a:rPr sz="1500" b="0">
                 <a:solidFill>
-                  <a:srgbClr val="475569"/>
+                  <a:srgbClr val="C7D2FE"/>
                 </a:solidFill>
                 <a:latin typeface="Calibri"/>
               </a:rPr>
-              <a:t>Small, typed, and checked</a:t>
+              <a:t>One codebase for the web, Android and iPhone - no app store needed</a:t>
             </a:r>
           </a:p>
         </p:txBody>
@@ -8047,8 +8131,8 @@
         </p:nvSpPr>
         <p:spPr>
           <a:xfrm>
-            <a:off x="731520" y="2194560"/>
-            <a:ext cx="2011680" cy="1371600"/>
+            <a:off x="731520" y="2286000"/>
+            <a:ext cx="3383280" cy="1600200"/>
           </a:xfrm>
           <a:prstGeom prst="roundRect">
             <a:avLst>
@@ -8056,7 +8140,7 @@
             </a:avLst>
           </a:prstGeom>
           <a:solidFill>
-            <a:srgbClr val="EEF2FF"/>
+            <a:srgbClr val="2E2A6B"/>
           </a:solidFill>
           <a:ln>
             <a:noFill/>
@@ -8091,36 +8175,36 @@
         </p:nvSpPr>
         <p:spPr>
           <a:xfrm>
-            <a:off x="731520" y="2377440"/>
-            <a:ext cx="2011680" cy="640080"/>
-          </a:xfrm>
-          <a:prstGeom prst="rect">
-            <a:avLst/>
-          </a:prstGeom>
-          <a:noFill/>
-        </p:spPr>
-        <p:txBody>
-          <a:bodyPr wrap="square" lIns="0" rIns="0" tIns="0" bIns="0" anchor="t">
-            <a:spAutoFit/>
-          </a:bodyPr>
-          <a:lstStyle/>
-          <a:p>
-            <a:pPr algn="ctr">
-              <a:lnSpc>
-                <a:spcPct val="115000"/>
-              </a:lnSpc>
-              <a:spcAft>
-                <a:spcPts val="600"/>
-              </a:spcAft>
-            </a:pPr>
-            <a:r>
-              <a:rPr sz="3000" b="1">
-                <a:solidFill>
-                  <a:srgbClr val="4F46E5"/>
+            <a:off x="1005840" y="2542032"/>
+            <a:ext cx="2834640" cy="365760"/>
+          </a:xfrm>
+          <a:prstGeom prst="rect">
+            <a:avLst/>
+          </a:prstGeom>
+          <a:noFill/>
+        </p:spPr>
+        <p:txBody>
+          <a:bodyPr wrap="square" lIns="0" rIns="0" tIns="0" bIns="0" anchor="t">
+            <a:spAutoFit/>
+          </a:bodyPr>
+          <a:lstStyle/>
+          <a:p>
+            <a:pPr algn="l">
+              <a:lnSpc>
+                <a:spcPct val="115000"/>
+              </a:lnSpc>
+              <a:spcAft>
+                <a:spcPts val="600"/>
+              </a:spcAft>
+            </a:pPr>
+            <a:r>
+              <a:rPr sz="1450" b="1">
+                <a:solidFill>
+                  <a:srgbClr val="FFFFFF"/>
                 </a:solidFill>
                 <a:latin typeface="Cambria"/>
               </a:rPr>
-              <a:t>~4,400</a:t>
+              <a:t>Installs like an app</a:t>
             </a:r>
           </a:p>
         </p:txBody>
@@ -8133,36 +8217,36 @@
         </p:nvSpPr>
         <p:spPr>
           <a:xfrm>
-            <a:off x="731520" y="3063240"/>
-            <a:ext cx="2011680" cy="365760"/>
-          </a:xfrm>
-          <a:prstGeom prst="rect">
-            <a:avLst/>
-          </a:prstGeom>
-          <a:noFill/>
-        </p:spPr>
-        <p:txBody>
-          <a:bodyPr wrap="square" lIns="0" rIns="0" tIns="0" bIns="0" anchor="t">
-            <a:spAutoFit/>
-          </a:bodyPr>
-          <a:lstStyle/>
-          <a:p>
-            <a:pPr algn="ctr">
-              <a:lnSpc>
-                <a:spcPct val="115000"/>
-              </a:lnSpc>
-              <a:spcAft>
-                <a:spcPts val="600"/>
-              </a:spcAft>
-            </a:pPr>
-            <a:r>
-              <a:rPr sz="1100" b="0">
-                <a:solidFill>
-                  <a:srgbClr val="1E1B4B"/>
+            <a:off x="1005840" y="2999232"/>
+            <a:ext cx="2834640" cy="777240"/>
+          </a:xfrm>
+          <a:prstGeom prst="rect">
+            <a:avLst/>
+          </a:prstGeom>
+          <a:noFill/>
+        </p:spPr>
+        <p:txBody>
+          <a:bodyPr wrap="square" lIns="0" rIns="0" tIns="0" bIns="0" anchor="t">
+            <a:spAutoFit/>
+          </a:bodyPr>
+          <a:lstStyle/>
+          <a:p>
+            <a:pPr algn="l">
+              <a:lnSpc>
+                <a:spcPct val="115000"/>
+              </a:lnSpc>
+              <a:spcAft>
+                <a:spcPts val="600"/>
+              </a:spcAft>
+            </a:pPr>
+            <a:r>
+              <a:rPr sz="1150" b="0">
+                <a:solidFill>
+                  <a:srgbClr val="C7D2FE"/>
                 </a:solidFill>
                 <a:latin typeface="Calibri"/>
               </a:rPr>
-              <a:t>lines of TypeScript</a:t>
+              <a:t>Install app in Chrome or Edge, Add to Home Screen on iPhone - own icon and window.</a:t>
             </a:r>
           </a:p>
         </p:txBody>
@@ -8175,8 +8259,8 @@
         </p:nvSpPr>
         <p:spPr>
           <a:xfrm>
-            <a:off x="2907791" y="2194560"/>
-            <a:ext cx="2011680" cy="1371600"/>
+            <a:off x="4434840" y="2286000"/>
+            <a:ext cx="3383280" cy="1600200"/>
           </a:xfrm>
           <a:prstGeom prst="roundRect">
             <a:avLst>
@@ -8184,7 +8268,7 @@
             </a:avLst>
           </a:prstGeom>
           <a:solidFill>
-            <a:srgbClr val="EEF2FF"/>
+            <a:srgbClr val="2E2A6B"/>
           </a:solidFill>
           <a:ln>
             <a:noFill/>
@@ -8219,36 +8303,36 @@
         </p:nvSpPr>
         <p:spPr>
           <a:xfrm>
-            <a:off x="2907791" y="2377440"/>
-            <a:ext cx="2011680" cy="640080"/>
-          </a:xfrm>
-          <a:prstGeom prst="rect">
-            <a:avLst/>
-          </a:prstGeom>
-          <a:noFill/>
-        </p:spPr>
-        <p:txBody>
-          <a:bodyPr wrap="square" lIns="0" rIns="0" tIns="0" bIns="0" anchor="t">
-            <a:spAutoFit/>
-          </a:bodyPr>
-          <a:lstStyle/>
-          <a:p>
-            <a:pPr algn="ctr">
-              <a:lnSpc>
-                <a:spcPct val="115000"/>
-              </a:lnSpc>
-              <a:spcAft>
-                <a:spcPts val="600"/>
-              </a:spcAft>
-            </a:pPr>
-            <a:r>
-              <a:rPr sz="3000" b="1">
-                <a:solidFill>
-                  <a:srgbClr val="4F46E5"/>
+            <a:off x="4709159" y="2542032"/>
+            <a:ext cx="2834640" cy="365760"/>
+          </a:xfrm>
+          <a:prstGeom prst="rect">
+            <a:avLst/>
+          </a:prstGeom>
+          <a:noFill/>
+        </p:spPr>
+        <p:txBody>
+          <a:bodyPr wrap="square" lIns="0" rIns="0" tIns="0" bIns="0" anchor="t">
+            <a:spAutoFit/>
+          </a:bodyPr>
+          <a:lstStyle/>
+          <a:p>
+            <a:pPr algn="l">
+              <a:lnSpc>
+                <a:spcPct val="115000"/>
+              </a:lnSpc>
+              <a:spcAft>
+                <a:spcPts val="600"/>
+              </a:spcAft>
+            </a:pPr>
+            <a:r>
+              <a:rPr sz="1450" b="1">
+                <a:solidFill>
+                  <a:srgbClr val="FFFFFF"/>
                 </a:solidFill>
                 <a:latin typeface="Cambria"/>
               </a:rPr>
-              <a:t>~40</a:t>
+              <a:t>Works offline</a:t>
             </a:r>
           </a:p>
         </p:txBody>
@@ -8261,36 +8345,36 @@
         </p:nvSpPr>
         <p:spPr>
           <a:xfrm>
-            <a:off x="2907791" y="3063240"/>
-            <a:ext cx="2011680" cy="365760"/>
-          </a:xfrm>
-          <a:prstGeom prst="rect">
-            <a:avLst/>
-          </a:prstGeom>
-          <a:noFill/>
-        </p:spPr>
-        <p:txBody>
-          <a:bodyPr wrap="square" lIns="0" rIns="0" tIns="0" bIns="0" anchor="t">
-            <a:spAutoFit/>
-          </a:bodyPr>
-          <a:lstStyle/>
-          <a:p>
-            <a:pPr algn="ctr">
-              <a:lnSpc>
-                <a:spcPct val="115000"/>
-              </a:lnSpc>
-              <a:spcAft>
-                <a:spcPts val="600"/>
-              </a:spcAft>
-            </a:pPr>
-            <a:r>
-              <a:rPr sz="1100" b="0">
-                <a:solidFill>
-                  <a:srgbClr val="1E1B4B"/>
+            <a:off x="4709159" y="2999232"/>
+            <a:ext cx="2834640" cy="777240"/>
+          </a:xfrm>
+          <a:prstGeom prst="rect">
+            <a:avLst/>
+          </a:prstGeom>
+          <a:noFill/>
+        </p:spPr>
+        <p:txBody>
+          <a:bodyPr wrap="square" lIns="0" rIns="0" tIns="0" bIns="0" anchor="t">
+            <a:spAutoFit/>
+          </a:bodyPr>
+          <a:lstStyle/>
+          <a:p>
+            <a:pPr algn="l">
+              <a:lnSpc>
+                <a:spcPct val="115000"/>
+              </a:lnSpc>
+              <a:spcAft>
+                <a:spcPts val="600"/>
+              </a:spcAft>
+            </a:pPr>
+            <a:r>
+              <a:rPr sz="1150" b="0">
+                <a:solidFill>
+                  <a:srgbClr val="C7D2FE"/>
                 </a:solidFill>
                 <a:latin typeface="Calibri"/>
               </a:rPr>
-              <a:t>source files</a:t>
+              <a:t>A service worker caches the app, so saved tracks open with no connection.</a:t>
             </a:r>
           </a:p>
         </p:txBody>
@@ -8303,8 +8387,8 @@
         </p:nvSpPr>
         <p:spPr>
           <a:xfrm>
-            <a:off x="5084064" y="2194560"/>
-            <a:ext cx="2011680" cy="1371600"/>
+            <a:off x="8138160" y="2286000"/>
+            <a:ext cx="3383280" cy="1600200"/>
           </a:xfrm>
           <a:prstGeom prst="roundRect">
             <a:avLst>
@@ -8312,7 +8396,7 @@
             </a:avLst>
           </a:prstGeom>
           <a:solidFill>
-            <a:srgbClr val="EEF2FF"/>
+            <a:srgbClr val="2E2A6B"/>
           </a:solidFill>
           <a:ln>
             <a:noFill/>
@@ -8347,36 +8431,36 @@
         </p:nvSpPr>
         <p:spPr>
           <a:xfrm>
-            <a:off x="5084064" y="2377440"/>
-            <a:ext cx="2011680" cy="640080"/>
-          </a:xfrm>
-          <a:prstGeom prst="rect">
-            <a:avLst/>
-          </a:prstGeom>
-          <a:noFill/>
-        </p:spPr>
-        <p:txBody>
-          <a:bodyPr wrap="square" lIns="0" rIns="0" tIns="0" bIns="0" anchor="t">
-            <a:spAutoFit/>
-          </a:bodyPr>
-          <a:lstStyle/>
-          <a:p>
-            <a:pPr algn="ctr">
-              <a:lnSpc>
-                <a:spcPct val="115000"/>
-              </a:lnSpc>
-              <a:spcAft>
-                <a:spcPts val="600"/>
-              </a:spcAft>
-            </a:pPr>
-            <a:r>
-              <a:rPr sz="3000" b="1">
-                <a:solidFill>
-                  <a:srgbClr val="4F46E5"/>
+            <a:off x="8412480" y="2542032"/>
+            <a:ext cx="2834640" cy="365760"/>
+          </a:xfrm>
+          <a:prstGeom prst="rect">
+            <a:avLst/>
+          </a:prstGeom>
+          <a:noFill/>
+        </p:spPr>
+        <p:txBody>
+          <a:bodyPr wrap="square" lIns="0" rIns="0" tIns="0" bIns="0" anchor="t">
+            <a:spAutoFit/>
+          </a:bodyPr>
+          <a:lstStyle/>
+          <a:p>
+            <a:pPr algn="l">
+              <a:lnSpc>
+                <a:spcPct val="115000"/>
+              </a:lnSpc>
+              <a:spcAft>
+                <a:spcPts val="600"/>
+              </a:spcAft>
+            </a:pPr>
+            <a:r>
+              <a:rPr sz="1450" b="1">
+                <a:solidFill>
+                  <a:srgbClr val="FFFFFF"/>
                 </a:solidFill>
                 <a:latin typeface="Cambria"/>
               </a:rPr>
-              <a:t>12</a:t>
+              <a:t>Your key, encrypted</a:t>
             </a:r>
           </a:p>
         </p:txBody>
@@ -8389,36 +8473,36 @@
         </p:nvSpPr>
         <p:spPr>
           <a:xfrm>
-            <a:off x="5084064" y="3063240"/>
-            <a:ext cx="2011680" cy="365760"/>
-          </a:xfrm>
-          <a:prstGeom prst="rect">
-            <a:avLst/>
-          </a:prstGeom>
-          <a:noFill/>
-        </p:spPr>
-        <p:txBody>
-          <a:bodyPr wrap="square" lIns="0" rIns="0" tIns="0" bIns="0" anchor="t">
-            <a:spAutoFit/>
-          </a:bodyPr>
-          <a:lstStyle/>
-          <a:p>
-            <a:pPr algn="ctr">
-              <a:lnSpc>
-                <a:spcPct val="115000"/>
-              </a:lnSpc>
-              <a:spcAft>
-                <a:spcPts val="600"/>
-              </a:spcAft>
-            </a:pPr>
-            <a:r>
-              <a:rPr sz="1100" b="0">
-                <a:solidFill>
-                  <a:srgbClr val="1E1B4B"/>
+            <a:off x="8412480" y="2999232"/>
+            <a:ext cx="2834640" cy="777240"/>
+          </a:xfrm>
+          <a:prstGeom prst="rect">
+            <a:avLst/>
+          </a:prstGeom>
+          <a:noFill/>
+        </p:spPr>
+        <p:txBody>
+          <a:bodyPr wrap="square" lIns="0" rIns="0" tIns="0" bIns="0" anchor="t">
+            <a:spAutoFit/>
+          </a:bodyPr>
+          <a:lstStyle/>
+          <a:p>
+            <a:pPr algn="l">
+              <a:lnSpc>
+                <a:spcPct val="115000"/>
+              </a:lnSpc>
+              <a:spcAft>
+                <a:spcPts val="600"/>
+              </a:spcAft>
+            </a:pPr>
+            <a:r>
+              <a:rPr sz="1150" b="0">
+                <a:solidFill>
+                  <a:srgbClr val="C7D2FE"/>
                 </a:solidFill>
                 <a:latin typeface="Calibri"/>
               </a:rPr>
-              <a:t>AI providers</a:t>
+              <a:t>AES-GCM with a non-extractable device key; decrypted only in memory.</a:t>
             </a:r>
           </a:p>
         </p:txBody>
@@ -8431,8 +8515,8 @@
         </p:nvSpPr>
         <p:spPr>
           <a:xfrm>
-            <a:off x="7260336" y="2194560"/>
-            <a:ext cx="2011680" cy="1371600"/>
+            <a:off x="731520" y="4160520"/>
+            <a:ext cx="3383280" cy="1600200"/>
           </a:xfrm>
           <a:prstGeom prst="roundRect">
             <a:avLst>
@@ -8440,7 +8524,7 @@
             </a:avLst>
           </a:prstGeom>
           <a:solidFill>
-            <a:srgbClr val="EEF2FF"/>
+            <a:srgbClr val="2E2A6B"/>
           </a:solidFill>
           <a:ln>
             <a:noFill/>
@@ -8475,36 +8559,36 @@
         </p:nvSpPr>
         <p:spPr>
           <a:xfrm>
-            <a:off x="7260336" y="2377440"/>
-            <a:ext cx="2011680" cy="640080"/>
-          </a:xfrm>
-          <a:prstGeom prst="rect">
-            <a:avLst/>
-          </a:prstGeom>
-          <a:noFill/>
-        </p:spPr>
-        <p:txBody>
-          <a:bodyPr wrap="square" lIns="0" rIns="0" tIns="0" bIns="0" anchor="t">
-            <a:spAutoFit/>
-          </a:bodyPr>
-          <a:lstStyle/>
-          <a:p>
-            <a:pPr algn="ctr">
-              <a:lnSpc>
-                <a:spcPct val="115000"/>
-              </a:lnSpc>
-              <a:spcAft>
-                <a:spcPts val="600"/>
-              </a:spcAft>
-            </a:pPr>
-            <a:r>
-              <a:rPr sz="3000" b="1">
-                <a:solidFill>
-                  <a:srgbClr val="4F46E5"/>
+            <a:off x="1005840" y="4416552"/>
+            <a:ext cx="2834640" cy="365760"/>
+          </a:xfrm>
+          <a:prstGeom prst="rect">
+            <a:avLst/>
+          </a:prstGeom>
+          <a:noFill/>
+        </p:spPr>
+        <p:txBody>
+          <a:bodyPr wrap="square" lIns="0" rIns="0" tIns="0" bIns="0" anchor="t">
+            <a:spAutoFit/>
+          </a:bodyPr>
+          <a:lstStyle/>
+          <a:p>
+            <a:pPr algn="l">
+              <a:lnSpc>
+                <a:spcPct val="115000"/>
+              </a:lnSpc>
+              <a:spcAft>
+                <a:spcPts val="600"/>
+              </a:spcAft>
+            </a:pPr>
+            <a:r>
+              <a:rPr sz="1450" b="1">
+                <a:solidFill>
+                  <a:srgbClr val="FFFFFF"/>
                 </a:solidFill>
                 <a:latin typeface="Cambria"/>
               </a:rPr>
-              <a:t>54</a:t>
+              <a:t>No keys in the build</a:t>
             </a:r>
           </a:p>
         </p:txBody>
@@ -8517,36 +8601,36 @@
         </p:nvSpPr>
         <p:spPr>
           <a:xfrm>
-            <a:off x="7260336" y="3063240"/>
-            <a:ext cx="2011680" cy="365760"/>
-          </a:xfrm>
-          <a:prstGeom prst="rect">
-            <a:avLst/>
-          </a:prstGeom>
-          <a:noFill/>
-        </p:spPr>
-        <p:txBody>
-          <a:bodyPr wrap="square" lIns="0" rIns="0" tIns="0" bIns="0" anchor="t">
-            <a:spAutoFit/>
-          </a:bodyPr>
-          <a:lstStyle/>
-          <a:p>
-            <a:pPr algn="ctr">
-              <a:lnSpc>
-                <a:spcPct val="115000"/>
-              </a:lnSpc>
-              <a:spcAft>
-                <a:spcPts val="600"/>
-              </a:spcAft>
-            </a:pPr>
-            <a:r>
-              <a:rPr sz="1100" b="0">
-                <a:solidFill>
-                  <a:srgbClr val="1E1B4B"/>
+            <a:off x="1005840" y="4873752"/>
+            <a:ext cx="2834640" cy="777240"/>
+          </a:xfrm>
+          <a:prstGeom prst="rect">
+            <a:avLst/>
+          </a:prstGeom>
+          <a:noFill/>
+        </p:spPr>
+        <p:txBody>
+          <a:bodyPr wrap="square" lIns="0" rIns="0" tIns="0" bIns="0" anchor="t">
+            <a:spAutoFit/>
+          </a:bodyPr>
+          <a:lstStyle/>
+          <a:p>
+            <a:pPr algn="l">
+              <a:lnSpc>
+                <a:spcPct val="115000"/>
+              </a:lnSpc>
+              <a:spcAft>
+                <a:spcPts val="600"/>
+              </a:spcAft>
+            </a:pPr>
+            <a:r>
+              <a:rPr sz="1150" b="0">
+                <a:solidFill>
+                  <a:srgbClr val="C7D2FE"/>
                 </a:solidFill>
                 <a:latin typeface="Calibri"/>
               </a:rPr>
-              <a:t>automated checks passing</a:t>
+              <a:t>.env keys are for local development only - a deployed app never contains one.</a:t>
             </a:r>
           </a:p>
         </p:txBody>
@@ -8559,8 +8643,8 @@
         </p:nvSpPr>
         <p:spPr>
           <a:xfrm>
-            <a:off x="9436608" y="2194560"/>
-            <a:ext cx="2011680" cy="1371600"/>
+            <a:off x="4434840" y="4160520"/>
+            <a:ext cx="3383280" cy="1600200"/>
           </a:xfrm>
           <a:prstGeom prst="roundRect">
             <a:avLst>
@@ -8568,7 +8652,7 @@
             </a:avLst>
           </a:prstGeom>
           <a:solidFill>
-            <a:srgbClr val="EEF2FF"/>
+            <a:srgbClr val="2E2A6B"/>
           </a:solidFill>
           <a:ln>
             <a:noFill/>
@@ -8603,36 +8687,36 @@
         </p:nvSpPr>
         <p:spPr>
           <a:xfrm>
-            <a:off x="9436608" y="2377440"/>
-            <a:ext cx="2011680" cy="640080"/>
-          </a:xfrm>
-          <a:prstGeom prst="rect">
-            <a:avLst/>
-          </a:prstGeom>
-          <a:noFill/>
-        </p:spPr>
-        <p:txBody>
-          <a:bodyPr wrap="square" lIns="0" rIns="0" tIns="0" bIns="0" anchor="t">
-            <a:spAutoFit/>
-          </a:bodyPr>
-          <a:lstStyle/>
-          <a:p>
-            <a:pPr algn="ctr">
-              <a:lnSpc>
-                <a:spcPct val="115000"/>
-              </a:lnSpc>
-              <a:spcAft>
-                <a:spcPts val="600"/>
-              </a:spcAft>
-            </a:pPr>
-            <a:r>
-              <a:rPr sz="3000" b="1">
-                <a:solidFill>
-                  <a:srgbClr val="4F46E5"/>
+            <a:off x="4709159" y="4416552"/>
+            <a:ext cx="2834640" cy="365760"/>
+          </a:xfrm>
+          <a:prstGeom prst="rect">
+            <a:avLst/>
+          </a:prstGeom>
+          <a:noFill/>
+        </p:spPr>
+        <p:txBody>
+          <a:bodyPr wrap="square" lIns="0" rIns="0" tIns="0" bIns="0" anchor="t">
+            <a:spAutoFit/>
+          </a:bodyPr>
+          <a:lstStyle/>
+          <a:p>
+            <a:pPr algn="l">
+              <a:lnSpc>
+                <a:spcPct val="115000"/>
+              </a:lnSpc>
+              <a:spcAft>
+                <a:spcPts val="600"/>
+              </a:spcAft>
+            </a:pPr>
+            <a:r>
+              <a:rPr sz="1450" b="1">
+                <a:solidFill>
+                  <a:srgbClr val="FFFFFF"/>
                 </a:solidFill>
                 <a:latin typeface="Cambria"/>
               </a:rPr>
-              <a:t>0</a:t>
+              <a:t>Back up and restore</a:t>
             </a:r>
           </a:p>
         </p:txBody>
@@ -8645,36 +8729,36 @@
         </p:nvSpPr>
         <p:spPr>
           <a:xfrm>
-            <a:off x="9436608" y="3063240"/>
-            <a:ext cx="2011680" cy="365760"/>
-          </a:xfrm>
-          <a:prstGeom prst="rect">
-            <a:avLst/>
-          </a:prstGeom>
-          <a:noFill/>
-        </p:spPr>
-        <p:txBody>
-          <a:bodyPr wrap="square" lIns="0" rIns="0" tIns="0" bIns="0" anchor="t">
-            <a:spAutoFit/>
-          </a:bodyPr>
-          <a:lstStyle/>
-          <a:p>
-            <a:pPr algn="ctr">
-              <a:lnSpc>
-                <a:spcPct val="115000"/>
-              </a:lnSpc>
-              <a:spcAft>
-                <a:spcPts val="600"/>
-              </a:spcAft>
-            </a:pPr>
-            <a:r>
-              <a:rPr sz="1100" b="0">
-                <a:solidFill>
-                  <a:srgbClr val="1E1B4B"/>
+            <a:off x="4709159" y="4873752"/>
+            <a:ext cx="2834640" cy="777240"/>
+          </a:xfrm>
+          <a:prstGeom prst="rect">
+            <a:avLst/>
+          </a:prstGeom>
+          <a:noFill/>
+        </p:spPr>
+        <p:txBody>
+          <a:bodyPr wrap="square" lIns="0" rIns="0" tIns="0" bIns="0" anchor="t">
+            <a:spAutoFit/>
+          </a:bodyPr>
+          <a:lstStyle/>
+          <a:p>
+            <a:pPr algn="l">
+              <a:lnSpc>
+                <a:spcPct val="115000"/>
+              </a:lnSpc>
+              <a:spcAft>
+                <a:spcPts val="600"/>
+              </a:spcAft>
+            </a:pPr>
+            <a:r>
+              <a:rPr sz="1150" b="0">
+                <a:solidFill>
+                  <a:srgbClr val="C7D2FE"/>
                 </a:solidFill>
                 <a:latin typeface="Calibri"/>
               </a:rPr>
-              <a:t>backend services</a:t>
+              <a:t>Every track in one JSON file, checked on restore. API keys are never included.</a:t>
             </a:r>
           </a:p>
         </p:txBody>
@@ -8687,8 +8771,8 @@
         </p:nvSpPr>
         <p:spPr>
           <a:xfrm>
-            <a:off x="731520" y="3840480"/>
-            <a:ext cx="5257800" cy="2103120"/>
+            <a:off x="8138160" y="4160520"/>
+            <a:ext cx="3383280" cy="1600200"/>
           </a:xfrm>
           <a:prstGeom prst="roundRect">
             <a:avLst>
@@ -8696,12 +8780,10 @@
             </a:avLst>
           </a:prstGeom>
           <a:solidFill>
-            <a:srgbClr val="FFFFFF"/>
+            <a:srgbClr val="2E2A6B"/>
           </a:solidFill>
-          <a:ln w="12700">
-            <a:solidFill>
-              <a:srgbClr val="E2E8F0"/>
-            </a:solidFill>
+          <a:ln>
+            <a:noFill/>
           </a:ln>
           <a:effectLst/>
         </p:spPr>
@@ -8733,36 +8815,36 @@
         </p:nvSpPr>
         <p:spPr>
           <a:xfrm>
-            <a:off x="1051560" y="4114800"/>
-            <a:ext cx="4572000" cy="365760"/>
-          </a:xfrm>
-          <a:prstGeom prst="rect">
-            <a:avLst/>
-          </a:prstGeom>
-          <a:noFill/>
-        </p:spPr>
-        <p:txBody>
-          <a:bodyPr wrap="square" lIns="0" rIns="0" tIns="0" bIns="0" anchor="t">
-            <a:spAutoFit/>
-          </a:bodyPr>
-          <a:lstStyle/>
-          <a:p>
-            <a:pPr algn="l">
-              <a:lnSpc>
-                <a:spcPct val="115000"/>
-              </a:lnSpc>
-              <a:spcAft>
-                <a:spcPts val="600"/>
-              </a:spcAft>
-            </a:pPr>
-            <a:r>
-              <a:rPr sz="1600" b="1">
-                <a:solidFill>
-                  <a:srgbClr val="0F172A"/>
+            <a:off x="8412480" y="4416552"/>
+            <a:ext cx="2834640" cy="365760"/>
+          </a:xfrm>
+          <a:prstGeom prst="rect">
+            <a:avLst/>
+          </a:prstGeom>
+          <a:noFill/>
+        </p:spPr>
+        <p:txBody>
+          <a:bodyPr wrap="square" lIns="0" rIns="0" tIns="0" bIns="0" anchor="t">
+            <a:spAutoFit/>
+          </a:bodyPr>
+          <a:lstStyle/>
+          <a:p>
+            <a:pPr algn="l">
+              <a:lnSpc>
+                <a:spcPct val="115000"/>
+              </a:lnSpc>
+              <a:spcAft>
+                <a:spcPts val="600"/>
+              </a:spcAft>
+            </a:pPr>
+            <a:r>
+              <a:rPr sz="1450" b="1">
+                <a:solidFill>
+                  <a:srgbClr val="FFFFFF"/>
                 </a:solidFill>
                 <a:latin typeface="Cambria"/>
               </a:rPr>
-              <a:t>Stack</a:t>
+              <a:t>Updates itself</a:t>
             </a:r>
           </a:p>
         </p:txBody>
@@ -8775,242 +8857,36 @@
         </p:nvSpPr>
         <p:spPr>
           <a:xfrm>
-            <a:off x="1051560" y="4572000"/>
-            <a:ext cx="4663440" cy="1280160"/>
-          </a:xfrm>
-          <a:prstGeom prst="rect">
-            <a:avLst/>
-          </a:prstGeom>
-          <a:noFill/>
-        </p:spPr>
-        <p:txBody>
-          <a:bodyPr wrap="square" lIns="0" rIns="0" tIns="0" bIns="0" anchor="t">
-            <a:spAutoFit/>
-          </a:bodyPr>
-          <a:lstStyle/>
-          <a:p>
-            <a:pPr algn="l">
-              <a:lnSpc>
-                <a:spcPct val="115000"/>
-              </a:lnSpc>
-              <a:spcAft>
-                <a:spcPts val="600"/>
-              </a:spcAft>
-            </a:pPr>
-            <a:r>
-              <a:rPr sz="1250" b="0">
-                <a:solidFill>
-                  <a:srgbClr val="475569"/>
+            <a:off x="8412480" y="4873752"/>
+            <a:ext cx="2834640" cy="777240"/>
+          </a:xfrm>
+          <a:prstGeom prst="rect">
+            <a:avLst/>
+          </a:prstGeom>
+          <a:noFill/>
+        </p:spPr>
+        <p:txBody>
+          <a:bodyPr wrap="square" lIns="0" rIns="0" tIns="0" bIns="0" anchor="t">
+            <a:spAutoFit/>
+          </a:bodyPr>
+          <a:lstStyle/>
+          <a:p>
+            <a:pPr algn="l">
+              <a:lnSpc>
+                <a:spcPct val="115000"/>
+              </a:lnSpc>
+              <a:spcAft>
+                <a:spcPts val="600"/>
+              </a:spcAft>
+            </a:pPr>
+            <a:r>
+              <a:rPr sz="1150" b="0">
+                <a:solidFill>
+                  <a:srgbClr val="C7D2FE"/>
                 </a:solidFill>
                 <a:latin typeface="Calibri"/>
               </a:rPr>
-              <a:t>React 19 + TypeScript (strict), Vite 8, Tailwind CSS 4</a:t>
-            </a:r>
-          </a:p>
-          <a:p>
-            <a:pPr algn="l">
-              <a:lnSpc>
-                <a:spcPct val="115000"/>
-              </a:lnSpc>
-              <a:spcAft>
-                <a:spcPts val="600"/>
-              </a:spcAft>
-            </a:pPr>
-            <a:r>
-              <a:rPr sz="1250" b="0">
-                <a:solidFill>
-                  <a:srgbClr val="475569"/>
-                </a:solidFill>
-                <a:latin typeface="Calibri"/>
-              </a:rPr>
-              <a:t>Zod for every AI reply - types flow from one schema</a:t>
-            </a:r>
-          </a:p>
-          <a:p>
-            <a:pPr algn="l">
-              <a:lnSpc>
-                <a:spcPct val="115000"/>
-              </a:lnSpc>
-              <a:spcAft>
-                <a:spcPts val="600"/>
-              </a:spcAft>
-            </a:pPr>
-            <a:r>
-              <a:rPr sz="1250" b="0">
-                <a:solidFill>
-                  <a:srgbClr val="475569"/>
-                </a:solidFill>
-                <a:latin typeface="Calibri"/>
-              </a:rPr>
-              <a:t>IndexedDB via idb; no server, no database</a:t>
-            </a:r>
-          </a:p>
-        </p:txBody>
-      </p:sp>
-      <p:sp>
-        <p:nvSpPr>
-          <p:cNvPr id="23" name="Rounded Rectangle 22"/>
-          <p:cNvSpPr/>
-          <p:nvPr/>
-        </p:nvSpPr>
-        <p:spPr>
-          <a:xfrm>
-            <a:off x="6172200" y="3840480"/>
-            <a:ext cx="5257800" cy="2103120"/>
-          </a:xfrm>
-          <a:prstGeom prst="roundRect">
-            <a:avLst>
-              <a:gd name="adj" fmla="val 8000"/>
-            </a:avLst>
-          </a:prstGeom>
-          <a:solidFill>
-            <a:srgbClr val="F8FAFC"/>
-          </a:solidFill>
-          <a:ln w="12700">
-            <a:solidFill>
-              <a:srgbClr val="E2E8F0"/>
-            </a:solidFill>
-          </a:ln>
-          <a:effectLst/>
-        </p:spPr>
-        <p:style>
-          <a:lnRef idx="1">
-            <a:schemeClr val="accent1"/>
-          </a:lnRef>
-          <a:fillRef idx="3">
-            <a:schemeClr val="accent1"/>
-          </a:fillRef>
-          <a:effectRef idx="2">
-            <a:schemeClr val="accent1"/>
-          </a:effectRef>
-          <a:fontRef idx="minor">
-            <a:schemeClr val="lt1"/>
-          </a:fontRef>
-        </p:style>
-        <p:txBody>
-          <a:bodyPr rtlCol="0" anchor="ctr"/>
-          <a:lstStyle/>
-          <a:p/>
-        </p:txBody>
-      </p:sp>
-      <p:sp>
-        <p:nvSpPr>
-          <p:cNvPr id="24" name="TextBox 23"/>
-          <p:cNvSpPr txBox="1"/>
-          <p:nvPr/>
-        </p:nvSpPr>
-        <p:spPr>
-          <a:xfrm>
-            <a:off x="6492240" y="4114800"/>
-            <a:ext cx="4572000" cy="365760"/>
-          </a:xfrm>
-          <a:prstGeom prst="rect">
-            <a:avLst/>
-          </a:prstGeom>
-          <a:noFill/>
-        </p:spPr>
-        <p:txBody>
-          <a:bodyPr wrap="square" lIns="0" rIns="0" tIns="0" bIns="0" anchor="t">
-            <a:spAutoFit/>
-          </a:bodyPr>
-          <a:lstStyle/>
-          <a:p>
-            <a:pPr algn="l">
-              <a:lnSpc>
-                <a:spcPct val="115000"/>
-              </a:lnSpc>
-              <a:spcAft>
-                <a:spcPts val="600"/>
-              </a:spcAft>
-            </a:pPr>
-            <a:r>
-              <a:rPr sz="1600" b="1">
-                <a:solidFill>
-                  <a:srgbClr val="0F172A"/>
-                </a:solidFill>
-                <a:latin typeface="Cambria"/>
-              </a:rPr>
-              <a:t>How it is verified</a:t>
-            </a:r>
-          </a:p>
-        </p:txBody>
-      </p:sp>
-      <p:sp>
-        <p:nvSpPr>
-          <p:cNvPr id="25" name="TextBox 24"/>
-          <p:cNvSpPr txBox="1"/>
-          <p:nvPr/>
-        </p:nvSpPr>
-        <p:spPr>
-          <a:xfrm>
-            <a:off x="6492240" y="4572000"/>
-            <a:ext cx="4663440" cy="1280160"/>
-          </a:xfrm>
-          <a:prstGeom prst="rect">
-            <a:avLst/>
-          </a:prstGeom>
-          <a:noFill/>
-        </p:spPr>
-        <p:txBody>
-          <a:bodyPr wrap="square" lIns="0" rIns="0" tIns="0" bIns="0" anchor="t">
-            <a:spAutoFit/>
-          </a:bodyPr>
-          <a:lstStyle/>
-          <a:p>
-            <a:pPr algn="l">
-              <a:lnSpc>
-                <a:spcPct val="115000"/>
-              </a:lnSpc>
-              <a:spcAft>
-                <a:spcPts val="600"/>
-              </a:spcAft>
-            </a:pPr>
-            <a:r>
-              <a:rPr sz="1250" b="0">
-                <a:solidFill>
-                  <a:srgbClr val="475569"/>
-                </a:solidFill>
-                <a:latin typeface="Calibri"/>
-              </a:rPr>
-              <a:t>npm run build type-checks the whole app</a:t>
-            </a:r>
-          </a:p>
-          <a:p>
-            <a:pPr algn="l">
-              <a:lnSpc>
-                <a:spcPct val="115000"/>
-              </a:lnSpc>
-              <a:spcAft>
-                <a:spcPts val="600"/>
-              </a:spcAft>
-            </a:pPr>
-            <a:r>
-              <a:rPr sz="1250" b="0">
-                <a:solidFill>
-                  <a:srgbClr val="475569"/>
-                </a:solidFill>
-                <a:latin typeface="Calibri"/>
-              </a:rPr>
-              <a:t>Adapter suite runs against a fake AI server: fallbacks, errors, streaming, abort</a:t>
-            </a:r>
-          </a:p>
-          <a:p>
-            <a:pPr algn="l">
-              <a:lnSpc>
-                <a:spcPct val="115000"/>
-              </a:lnSpc>
-              <a:spcAft>
-                <a:spcPts val="600"/>
-              </a:spcAft>
-            </a:pPr>
-            <a:r>
-              <a:rPr sz="1250" b="0">
-                <a:solidFill>
-                  <a:srgbClr val="475569"/>
-                </a:solidFill>
-                <a:latin typeface="Calibri"/>
-              </a:rPr>
-              <a:t>Manual smoke test for the six learner steps</a:t>
+              <a:t>A new deploy shows "New version ready - Reload" - nobody is stuck on an old copy.</a:t>
             </a:r>
           </a:p>
         </p:txBody>
@@ -9114,7 +8990,7 @@
                 </a:solidFill>
                 <a:latin typeface="Cambria"/>
               </a:rPr>
-              <a:t>Cost, privacy and the honest caveat</a:t>
+              <a:t>Build and quality</a:t>
             </a:r>
           </a:p>
         </p:txBody>
@@ -9156,7 +9032,7 @@
                 </a:solidFill>
                 <a:latin typeface="Calibri"/>
               </a:rPr>
-              <a:t>What it costs to run, and what to fix before sharing it</a:t>
+              <a:t>Small, typed, and checked</a:t>
             </a:r>
           </a:p>
         </p:txBody>
@@ -9170,7 +9046,834 @@
         <p:spPr>
           <a:xfrm>
             <a:off x="731520" y="2194560"/>
-            <a:ext cx="3474720" cy="3566160"/>
+            <a:ext cx="2011680" cy="1371600"/>
+          </a:xfrm>
+          <a:prstGeom prst="roundRect">
+            <a:avLst>
+              <a:gd name="adj" fmla="val 8000"/>
+            </a:avLst>
+          </a:prstGeom>
+          <a:solidFill>
+            <a:srgbClr val="EEF2FF"/>
+          </a:solidFill>
+          <a:ln>
+            <a:noFill/>
+          </a:ln>
+          <a:effectLst/>
+        </p:spPr>
+        <p:style>
+          <a:lnRef idx="1">
+            <a:schemeClr val="accent1"/>
+          </a:lnRef>
+          <a:fillRef idx="3">
+            <a:schemeClr val="accent1"/>
+          </a:fillRef>
+          <a:effectRef idx="2">
+            <a:schemeClr val="accent1"/>
+          </a:effectRef>
+          <a:fontRef idx="minor">
+            <a:schemeClr val="lt1"/>
+          </a:fontRef>
+        </p:style>
+        <p:txBody>
+          <a:bodyPr rtlCol="0" anchor="ctr"/>
+          <a:lstStyle/>
+          <a:p/>
+        </p:txBody>
+      </p:sp>
+      <p:sp>
+        <p:nvSpPr>
+          <p:cNvPr id="6" name="TextBox 5"/>
+          <p:cNvSpPr txBox="1"/>
+          <p:nvPr/>
+        </p:nvSpPr>
+        <p:spPr>
+          <a:xfrm>
+            <a:off x="731520" y="2377440"/>
+            <a:ext cx="2011680" cy="640080"/>
+          </a:xfrm>
+          <a:prstGeom prst="rect">
+            <a:avLst/>
+          </a:prstGeom>
+          <a:noFill/>
+        </p:spPr>
+        <p:txBody>
+          <a:bodyPr wrap="square" lIns="0" rIns="0" tIns="0" bIns="0" anchor="t">
+            <a:spAutoFit/>
+          </a:bodyPr>
+          <a:lstStyle/>
+          <a:p>
+            <a:pPr algn="ctr">
+              <a:lnSpc>
+                <a:spcPct val="115000"/>
+              </a:lnSpc>
+              <a:spcAft>
+                <a:spcPts val="600"/>
+              </a:spcAft>
+            </a:pPr>
+            <a:r>
+              <a:rPr sz="3000" b="1">
+                <a:solidFill>
+                  <a:srgbClr val="4F46E5"/>
+                </a:solidFill>
+                <a:latin typeface="Cambria"/>
+              </a:rPr>
+              <a:t>~5,400</a:t>
+            </a:r>
+          </a:p>
+        </p:txBody>
+      </p:sp>
+      <p:sp>
+        <p:nvSpPr>
+          <p:cNvPr id="7" name="TextBox 6"/>
+          <p:cNvSpPr txBox="1"/>
+          <p:nvPr/>
+        </p:nvSpPr>
+        <p:spPr>
+          <a:xfrm>
+            <a:off x="731520" y="3063240"/>
+            <a:ext cx="2011680" cy="365760"/>
+          </a:xfrm>
+          <a:prstGeom prst="rect">
+            <a:avLst/>
+          </a:prstGeom>
+          <a:noFill/>
+        </p:spPr>
+        <p:txBody>
+          <a:bodyPr wrap="square" lIns="0" rIns="0" tIns="0" bIns="0" anchor="t">
+            <a:spAutoFit/>
+          </a:bodyPr>
+          <a:lstStyle/>
+          <a:p>
+            <a:pPr algn="ctr">
+              <a:lnSpc>
+                <a:spcPct val="115000"/>
+              </a:lnSpc>
+              <a:spcAft>
+                <a:spcPts val="600"/>
+              </a:spcAft>
+            </a:pPr>
+            <a:r>
+              <a:rPr sz="1100" b="0">
+                <a:solidFill>
+                  <a:srgbClr val="1E1B4B"/>
+                </a:solidFill>
+                <a:latin typeface="Calibri"/>
+              </a:rPr>
+              <a:t>lines of TypeScript</a:t>
+            </a:r>
+          </a:p>
+        </p:txBody>
+      </p:sp>
+      <p:sp>
+        <p:nvSpPr>
+          <p:cNvPr id="8" name="Rounded Rectangle 7"/>
+          <p:cNvSpPr/>
+          <p:nvPr/>
+        </p:nvSpPr>
+        <p:spPr>
+          <a:xfrm>
+            <a:off x="2907791" y="2194560"/>
+            <a:ext cx="2011680" cy="1371600"/>
+          </a:xfrm>
+          <a:prstGeom prst="roundRect">
+            <a:avLst>
+              <a:gd name="adj" fmla="val 8000"/>
+            </a:avLst>
+          </a:prstGeom>
+          <a:solidFill>
+            <a:srgbClr val="EEF2FF"/>
+          </a:solidFill>
+          <a:ln>
+            <a:noFill/>
+          </a:ln>
+          <a:effectLst/>
+        </p:spPr>
+        <p:style>
+          <a:lnRef idx="1">
+            <a:schemeClr val="accent1"/>
+          </a:lnRef>
+          <a:fillRef idx="3">
+            <a:schemeClr val="accent1"/>
+          </a:fillRef>
+          <a:effectRef idx="2">
+            <a:schemeClr val="accent1"/>
+          </a:effectRef>
+          <a:fontRef idx="minor">
+            <a:schemeClr val="lt1"/>
+          </a:fontRef>
+        </p:style>
+        <p:txBody>
+          <a:bodyPr rtlCol="0" anchor="ctr"/>
+          <a:lstStyle/>
+          <a:p/>
+        </p:txBody>
+      </p:sp>
+      <p:sp>
+        <p:nvSpPr>
+          <p:cNvPr id="9" name="TextBox 8"/>
+          <p:cNvSpPr txBox="1"/>
+          <p:nvPr/>
+        </p:nvSpPr>
+        <p:spPr>
+          <a:xfrm>
+            <a:off x="2907791" y="2377440"/>
+            <a:ext cx="2011680" cy="640080"/>
+          </a:xfrm>
+          <a:prstGeom prst="rect">
+            <a:avLst/>
+          </a:prstGeom>
+          <a:noFill/>
+        </p:spPr>
+        <p:txBody>
+          <a:bodyPr wrap="square" lIns="0" rIns="0" tIns="0" bIns="0" anchor="t">
+            <a:spAutoFit/>
+          </a:bodyPr>
+          <a:lstStyle/>
+          <a:p>
+            <a:pPr algn="ctr">
+              <a:lnSpc>
+                <a:spcPct val="115000"/>
+              </a:lnSpc>
+              <a:spcAft>
+                <a:spcPts val="600"/>
+              </a:spcAft>
+            </a:pPr>
+            <a:r>
+              <a:rPr sz="3000" b="1">
+                <a:solidFill>
+                  <a:srgbClr val="4F46E5"/>
+                </a:solidFill>
+                <a:latin typeface="Cambria"/>
+              </a:rPr>
+              <a:t>48</a:t>
+            </a:r>
+          </a:p>
+        </p:txBody>
+      </p:sp>
+      <p:sp>
+        <p:nvSpPr>
+          <p:cNvPr id="10" name="TextBox 9"/>
+          <p:cNvSpPr txBox="1"/>
+          <p:nvPr/>
+        </p:nvSpPr>
+        <p:spPr>
+          <a:xfrm>
+            <a:off x="2907791" y="3063240"/>
+            <a:ext cx="2011680" cy="365760"/>
+          </a:xfrm>
+          <a:prstGeom prst="rect">
+            <a:avLst/>
+          </a:prstGeom>
+          <a:noFill/>
+        </p:spPr>
+        <p:txBody>
+          <a:bodyPr wrap="square" lIns="0" rIns="0" tIns="0" bIns="0" anchor="t">
+            <a:spAutoFit/>
+          </a:bodyPr>
+          <a:lstStyle/>
+          <a:p>
+            <a:pPr algn="ctr">
+              <a:lnSpc>
+                <a:spcPct val="115000"/>
+              </a:lnSpc>
+              <a:spcAft>
+                <a:spcPts val="600"/>
+              </a:spcAft>
+            </a:pPr>
+            <a:r>
+              <a:rPr sz="1100" b="0">
+                <a:solidFill>
+                  <a:srgbClr val="1E1B4B"/>
+                </a:solidFill>
+                <a:latin typeface="Calibri"/>
+              </a:rPr>
+              <a:t>source files</a:t>
+            </a:r>
+          </a:p>
+        </p:txBody>
+      </p:sp>
+      <p:sp>
+        <p:nvSpPr>
+          <p:cNvPr id="11" name="Rounded Rectangle 10"/>
+          <p:cNvSpPr/>
+          <p:nvPr/>
+        </p:nvSpPr>
+        <p:spPr>
+          <a:xfrm>
+            <a:off x="5084064" y="2194560"/>
+            <a:ext cx="2011680" cy="1371600"/>
+          </a:xfrm>
+          <a:prstGeom prst="roundRect">
+            <a:avLst>
+              <a:gd name="adj" fmla="val 8000"/>
+            </a:avLst>
+          </a:prstGeom>
+          <a:solidFill>
+            <a:srgbClr val="EEF2FF"/>
+          </a:solidFill>
+          <a:ln>
+            <a:noFill/>
+          </a:ln>
+          <a:effectLst/>
+        </p:spPr>
+        <p:style>
+          <a:lnRef idx="1">
+            <a:schemeClr val="accent1"/>
+          </a:lnRef>
+          <a:fillRef idx="3">
+            <a:schemeClr val="accent1"/>
+          </a:fillRef>
+          <a:effectRef idx="2">
+            <a:schemeClr val="accent1"/>
+          </a:effectRef>
+          <a:fontRef idx="minor">
+            <a:schemeClr val="lt1"/>
+          </a:fontRef>
+        </p:style>
+        <p:txBody>
+          <a:bodyPr rtlCol="0" anchor="ctr"/>
+          <a:lstStyle/>
+          <a:p/>
+        </p:txBody>
+      </p:sp>
+      <p:sp>
+        <p:nvSpPr>
+          <p:cNvPr id="12" name="TextBox 11"/>
+          <p:cNvSpPr txBox="1"/>
+          <p:nvPr/>
+        </p:nvSpPr>
+        <p:spPr>
+          <a:xfrm>
+            <a:off x="5084064" y="2377440"/>
+            <a:ext cx="2011680" cy="640080"/>
+          </a:xfrm>
+          <a:prstGeom prst="rect">
+            <a:avLst/>
+          </a:prstGeom>
+          <a:noFill/>
+        </p:spPr>
+        <p:txBody>
+          <a:bodyPr wrap="square" lIns="0" rIns="0" tIns="0" bIns="0" anchor="t">
+            <a:spAutoFit/>
+          </a:bodyPr>
+          <a:lstStyle/>
+          <a:p>
+            <a:pPr algn="ctr">
+              <a:lnSpc>
+                <a:spcPct val="115000"/>
+              </a:lnSpc>
+              <a:spcAft>
+                <a:spcPts val="600"/>
+              </a:spcAft>
+            </a:pPr>
+            <a:r>
+              <a:rPr sz="3000" b="1">
+                <a:solidFill>
+                  <a:srgbClr val="4F46E5"/>
+                </a:solidFill>
+                <a:latin typeface="Cambria"/>
+              </a:rPr>
+              <a:t>12</a:t>
+            </a:r>
+          </a:p>
+        </p:txBody>
+      </p:sp>
+      <p:sp>
+        <p:nvSpPr>
+          <p:cNvPr id="13" name="TextBox 12"/>
+          <p:cNvSpPr txBox="1"/>
+          <p:nvPr/>
+        </p:nvSpPr>
+        <p:spPr>
+          <a:xfrm>
+            <a:off x="5084064" y="3063240"/>
+            <a:ext cx="2011680" cy="365760"/>
+          </a:xfrm>
+          <a:prstGeom prst="rect">
+            <a:avLst/>
+          </a:prstGeom>
+          <a:noFill/>
+        </p:spPr>
+        <p:txBody>
+          <a:bodyPr wrap="square" lIns="0" rIns="0" tIns="0" bIns="0" anchor="t">
+            <a:spAutoFit/>
+          </a:bodyPr>
+          <a:lstStyle/>
+          <a:p>
+            <a:pPr algn="ctr">
+              <a:lnSpc>
+                <a:spcPct val="115000"/>
+              </a:lnSpc>
+              <a:spcAft>
+                <a:spcPts val="600"/>
+              </a:spcAft>
+            </a:pPr>
+            <a:r>
+              <a:rPr sz="1100" b="0">
+                <a:solidFill>
+                  <a:srgbClr val="1E1B4B"/>
+                </a:solidFill>
+                <a:latin typeface="Calibri"/>
+              </a:rPr>
+              <a:t>AI providers</a:t>
+            </a:r>
+          </a:p>
+        </p:txBody>
+      </p:sp>
+      <p:sp>
+        <p:nvSpPr>
+          <p:cNvPr id="14" name="Rounded Rectangle 13"/>
+          <p:cNvSpPr/>
+          <p:nvPr/>
+        </p:nvSpPr>
+        <p:spPr>
+          <a:xfrm>
+            <a:off x="7260336" y="2194560"/>
+            <a:ext cx="2011680" cy="1371600"/>
+          </a:xfrm>
+          <a:prstGeom prst="roundRect">
+            <a:avLst>
+              <a:gd name="adj" fmla="val 8000"/>
+            </a:avLst>
+          </a:prstGeom>
+          <a:solidFill>
+            <a:srgbClr val="EEF2FF"/>
+          </a:solidFill>
+          <a:ln>
+            <a:noFill/>
+          </a:ln>
+          <a:effectLst/>
+        </p:spPr>
+        <p:style>
+          <a:lnRef idx="1">
+            <a:schemeClr val="accent1"/>
+          </a:lnRef>
+          <a:fillRef idx="3">
+            <a:schemeClr val="accent1"/>
+          </a:fillRef>
+          <a:effectRef idx="2">
+            <a:schemeClr val="accent1"/>
+          </a:effectRef>
+          <a:fontRef idx="minor">
+            <a:schemeClr val="lt1"/>
+          </a:fontRef>
+        </p:style>
+        <p:txBody>
+          <a:bodyPr rtlCol="0" anchor="ctr"/>
+          <a:lstStyle/>
+          <a:p/>
+        </p:txBody>
+      </p:sp>
+      <p:sp>
+        <p:nvSpPr>
+          <p:cNvPr id="15" name="TextBox 14"/>
+          <p:cNvSpPr txBox="1"/>
+          <p:nvPr/>
+        </p:nvSpPr>
+        <p:spPr>
+          <a:xfrm>
+            <a:off x="7260336" y="2377440"/>
+            <a:ext cx="2011680" cy="640080"/>
+          </a:xfrm>
+          <a:prstGeom prst="rect">
+            <a:avLst/>
+          </a:prstGeom>
+          <a:noFill/>
+        </p:spPr>
+        <p:txBody>
+          <a:bodyPr wrap="square" lIns="0" rIns="0" tIns="0" bIns="0" anchor="t">
+            <a:spAutoFit/>
+          </a:bodyPr>
+          <a:lstStyle/>
+          <a:p>
+            <a:pPr algn="ctr">
+              <a:lnSpc>
+                <a:spcPct val="115000"/>
+              </a:lnSpc>
+              <a:spcAft>
+                <a:spcPts val="600"/>
+              </a:spcAft>
+            </a:pPr>
+            <a:r>
+              <a:rPr sz="3000" b="1">
+                <a:solidFill>
+                  <a:srgbClr val="4F46E5"/>
+                </a:solidFill>
+                <a:latin typeface="Cambria"/>
+              </a:rPr>
+              <a:t>AES-256</a:t>
+            </a:r>
+          </a:p>
+        </p:txBody>
+      </p:sp>
+      <p:sp>
+        <p:nvSpPr>
+          <p:cNvPr id="16" name="TextBox 15"/>
+          <p:cNvSpPr txBox="1"/>
+          <p:nvPr/>
+        </p:nvSpPr>
+        <p:spPr>
+          <a:xfrm>
+            <a:off x="7260336" y="3063240"/>
+            <a:ext cx="2011680" cy="365760"/>
+          </a:xfrm>
+          <a:prstGeom prst="rect">
+            <a:avLst/>
+          </a:prstGeom>
+          <a:noFill/>
+        </p:spPr>
+        <p:txBody>
+          <a:bodyPr wrap="square" lIns="0" rIns="0" tIns="0" bIns="0" anchor="t">
+            <a:spAutoFit/>
+          </a:bodyPr>
+          <a:lstStyle/>
+          <a:p>
+            <a:pPr algn="ctr">
+              <a:lnSpc>
+                <a:spcPct val="115000"/>
+              </a:lnSpc>
+              <a:spcAft>
+                <a:spcPts val="600"/>
+              </a:spcAft>
+            </a:pPr>
+            <a:r>
+              <a:rPr sz="1100" b="0">
+                <a:solidFill>
+                  <a:srgbClr val="1E1B4B"/>
+                </a:solidFill>
+                <a:latin typeface="Calibri"/>
+              </a:rPr>
+              <a:t>encrypted API keys</a:t>
+            </a:r>
+          </a:p>
+        </p:txBody>
+      </p:sp>
+      <p:sp>
+        <p:nvSpPr>
+          <p:cNvPr id="17" name="Rounded Rectangle 16"/>
+          <p:cNvSpPr/>
+          <p:nvPr/>
+        </p:nvSpPr>
+        <p:spPr>
+          <a:xfrm>
+            <a:off x="9436608" y="2194560"/>
+            <a:ext cx="2011680" cy="1371600"/>
+          </a:xfrm>
+          <a:prstGeom prst="roundRect">
+            <a:avLst>
+              <a:gd name="adj" fmla="val 8000"/>
+            </a:avLst>
+          </a:prstGeom>
+          <a:solidFill>
+            <a:srgbClr val="EEF2FF"/>
+          </a:solidFill>
+          <a:ln>
+            <a:noFill/>
+          </a:ln>
+          <a:effectLst/>
+        </p:spPr>
+        <p:style>
+          <a:lnRef idx="1">
+            <a:schemeClr val="accent1"/>
+          </a:lnRef>
+          <a:fillRef idx="3">
+            <a:schemeClr val="accent1"/>
+          </a:fillRef>
+          <a:effectRef idx="2">
+            <a:schemeClr val="accent1"/>
+          </a:effectRef>
+          <a:fontRef idx="minor">
+            <a:schemeClr val="lt1"/>
+          </a:fontRef>
+        </p:style>
+        <p:txBody>
+          <a:bodyPr rtlCol="0" anchor="ctr"/>
+          <a:lstStyle/>
+          <a:p/>
+        </p:txBody>
+      </p:sp>
+      <p:sp>
+        <p:nvSpPr>
+          <p:cNvPr id="18" name="TextBox 17"/>
+          <p:cNvSpPr txBox="1"/>
+          <p:nvPr/>
+        </p:nvSpPr>
+        <p:spPr>
+          <a:xfrm>
+            <a:off x="9436608" y="2377440"/>
+            <a:ext cx="2011680" cy="640080"/>
+          </a:xfrm>
+          <a:prstGeom prst="rect">
+            <a:avLst/>
+          </a:prstGeom>
+          <a:noFill/>
+        </p:spPr>
+        <p:txBody>
+          <a:bodyPr wrap="square" lIns="0" rIns="0" tIns="0" bIns="0" anchor="t">
+            <a:spAutoFit/>
+          </a:bodyPr>
+          <a:lstStyle/>
+          <a:p>
+            <a:pPr algn="ctr">
+              <a:lnSpc>
+                <a:spcPct val="115000"/>
+              </a:lnSpc>
+              <a:spcAft>
+                <a:spcPts val="600"/>
+              </a:spcAft>
+            </a:pPr>
+            <a:r>
+              <a:rPr sz="3000" b="1">
+                <a:solidFill>
+                  <a:srgbClr val="4F46E5"/>
+                </a:solidFill>
+                <a:latin typeface="Cambria"/>
+              </a:rPr>
+              <a:t>0</a:t>
+            </a:r>
+          </a:p>
+        </p:txBody>
+      </p:sp>
+      <p:sp>
+        <p:nvSpPr>
+          <p:cNvPr id="19" name="TextBox 18"/>
+          <p:cNvSpPr txBox="1"/>
+          <p:nvPr/>
+        </p:nvSpPr>
+        <p:spPr>
+          <a:xfrm>
+            <a:off x="9436608" y="3063240"/>
+            <a:ext cx="2011680" cy="365760"/>
+          </a:xfrm>
+          <a:prstGeom prst="rect">
+            <a:avLst/>
+          </a:prstGeom>
+          <a:noFill/>
+        </p:spPr>
+        <p:txBody>
+          <a:bodyPr wrap="square" lIns="0" rIns="0" tIns="0" bIns="0" anchor="t">
+            <a:spAutoFit/>
+          </a:bodyPr>
+          <a:lstStyle/>
+          <a:p>
+            <a:pPr algn="ctr">
+              <a:lnSpc>
+                <a:spcPct val="115000"/>
+              </a:lnSpc>
+              <a:spcAft>
+                <a:spcPts val="600"/>
+              </a:spcAft>
+            </a:pPr>
+            <a:r>
+              <a:rPr sz="1100" b="0">
+                <a:solidFill>
+                  <a:srgbClr val="1E1B4B"/>
+                </a:solidFill>
+                <a:latin typeface="Calibri"/>
+              </a:rPr>
+              <a:t>backend services</a:t>
+            </a:r>
+          </a:p>
+        </p:txBody>
+      </p:sp>
+      <p:sp>
+        <p:nvSpPr>
+          <p:cNvPr id="20" name="Rounded Rectangle 19"/>
+          <p:cNvSpPr/>
+          <p:nvPr/>
+        </p:nvSpPr>
+        <p:spPr>
+          <a:xfrm>
+            <a:off x="731520" y="3840480"/>
+            <a:ext cx="5257800" cy="2103120"/>
+          </a:xfrm>
+          <a:prstGeom prst="roundRect">
+            <a:avLst>
+              <a:gd name="adj" fmla="val 8000"/>
+            </a:avLst>
+          </a:prstGeom>
+          <a:solidFill>
+            <a:srgbClr val="FFFFFF"/>
+          </a:solidFill>
+          <a:ln w="12700">
+            <a:solidFill>
+              <a:srgbClr val="E2E8F0"/>
+            </a:solidFill>
+          </a:ln>
+          <a:effectLst/>
+        </p:spPr>
+        <p:style>
+          <a:lnRef idx="1">
+            <a:schemeClr val="accent1"/>
+          </a:lnRef>
+          <a:fillRef idx="3">
+            <a:schemeClr val="accent1"/>
+          </a:fillRef>
+          <a:effectRef idx="2">
+            <a:schemeClr val="accent1"/>
+          </a:effectRef>
+          <a:fontRef idx="minor">
+            <a:schemeClr val="lt1"/>
+          </a:fontRef>
+        </p:style>
+        <p:txBody>
+          <a:bodyPr rtlCol="0" anchor="ctr"/>
+          <a:lstStyle/>
+          <a:p/>
+        </p:txBody>
+      </p:sp>
+      <p:sp>
+        <p:nvSpPr>
+          <p:cNvPr id="21" name="TextBox 20"/>
+          <p:cNvSpPr txBox="1"/>
+          <p:nvPr/>
+        </p:nvSpPr>
+        <p:spPr>
+          <a:xfrm>
+            <a:off x="1051560" y="4114800"/>
+            <a:ext cx="4572000" cy="365760"/>
+          </a:xfrm>
+          <a:prstGeom prst="rect">
+            <a:avLst/>
+          </a:prstGeom>
+          <a:noFill/>
+        </p:spPr>
+        <p:txBody>
+          <a:bodyPr wrap="square" lIns="0" rIns="0" tIns="0" bIns="0" anchor="t">
+            <a:spAutoFit/>
+          </a:bodyPr>
+          <a:lstStyle/>
+          <a:p>
+            <a:pPr algn="l">
+              <a:lnSpc>
+                <a:spcPct val="115000"/>
+              </a:lnSpc>
+              <a:spcAft>
+                <a:spcPts val="600"/>
+              </a:spcAft>
+            </a:pPr>
+            <a:r>
+              <a:rPr sz="1600" b="1">
+                <a:solidFill>
+                  <a:srgbClr val="0F172A"/>
+                </a:solidFill>
+                <a:latin typeface="Cambria"/>
+              </a:rPr>
+              <a:t>Stack</a:t>
+            </a:r>
+          </a:p>
+        </p:txBody>
+      </p:sp>
+      <p:sp>
+        <p:nvSpPr>
+          <p:cNvPr id="22" name="TextBox 21"/>
+          <p:cNvSpPr txBox="1"/>
+          <p:nvPr/>
+        </p:nvSpPr>
+        <p:spPr>
+          <a:xfrm>
+            <a:off x="1051560" y="4572000"/>
+            <a:ext cx="4663440" cy="1280160"/>
+          </a:xfrm>
+          <a:prstGeom prst="rect">
+            <a:avLst/>
+          </a:prstGeom>
+          <a:noFill/>
+        </p:spPr>
+        <p:txBody>
+          <a:bodyPr wrap="square" lIns="0" rIns="0" tIns="0" bIns="0" anchor="t">
+            <a:spAutoFit/>
+          </a:bodyPr>
+          <a:lstStyle/>
+          <a:p>
+            <a:pPr algn="l">
+              <a:lnSpc>
+                <a:spcPct val="115000"/>
+              </a:lnSpc>
+              <a:spcAft>
+                <a:spcPts val="600"/>
+              </a:spcAft>
+            </a:pPr>
+            <a:r>
+              <a:rPr sz="1250" b="0">
+                <a:solidFill>
+                  <a:srgbClr val="475569"/>
+                </a:solidFill>
+                <a:latin typeface="Calibri"/>
+              </a:rPr>
+              <a:t>React 19 + TypeScript (strict), Vite 8, Tailwind CSS 4</a:t>
+            </a:r>
+          </a:p>
+          <a:p>
+            <a:pPr algn="l">
+              <a:lnSpc>
+                <a:spcPct val="115000"/>
+              </a:lnSpc>
+              <a:spcAft>
+                <a:spcPts val="600"/>
+              </a:spcAft>
+            </a:pPr>
+            <a:r>
+              <a:rPr sz="1250" b="0">
+                <a:solidFill>
+                  <a:srgbClr val="475569"/>
+                </a:solidFill>
+                <a:latin typeface="Calibri"/>
+              </a:rPr>
+              <a:t>Zod for every AI reply - types flow from one schema</a:t>
+            </a:r>
+          </a:p>
+          <a:p>
+            <a:pPr algn="l">
+              <a:lnSpc>
+                <a:spcPct val="115000"/>
+              </a:lnSpc>
+              <a:spcAft>
+                <a:spcPts val="600"/>
+              </a:spcAft>
+            </a:pPr>
+            <a:r>
+              <a:rPr sz="1250" b="0">
+                <a:solidFill>
+                  <a:srgbClr val="475569"/>
+                </a:solidFill>
+                <a:latin typeface="Calibri"/>
+              </a:rPr>
+              <a:t>IndexedDB via idb; Web Crypto for the API key</a:t>
+            </a:r>
+          </a:p>
+          <a:p>
+            <a:pPr algn="l">
+              <a:lnSpc>
+                <a:spcPct val="115000"/>
+              </a:lnSpc>
+              <a:spcAft>
+                <a:spcPts val="600"/>
+              </a:spcAft>
+            </a:pPr>
+            <a:r>
+              <a:rPr sz="1250" b="0">
+                <a:solidFill>
+                  <a:srgbClr val="475569"/>
+                </a:solidFill>
+                <a:latin typeface="Calibri"/>
+              </a:rPr>
+              <a:t>vite-plugin-pwa (Workbox): install, offline, updates</a:t>
+            </a:r>
+          </a:p>
+        </p:txBody>
+      </p:sp>
+      <p:sp>
+        <p:nvSpPr>
+          <p:cNvPr id="23" name="Rounded Rectangle 22"/>
+          <p:cNvSpPr/>
+          <p:nvPr/>
+        </p:nvSpPr>
+        <p:spPr>
+          <a:xfrm>
+            <a:off x="6172200" y="3840480"/>
+            <a:ext cx="5257800" cy="2103120"/>
           </a:xfrm>
           <a:prstGeom prst="roundRect">
             <a:avLst>
@@ -9209,14 +9912,14 @@
       </p:sp>
       <p:sp>
         <p:nvSpPr>
-          <p:cNvPr id="6" name="TextBox 5"/>
-          <p:cNvSpPr txBox="1"/>
-          <p:nvPr/>
-        </p:nvSpPr>
-        <p:spPr>
-          <a:xfrm>
-            <a:off x="1005840" y="2468880"/>
-            <a:ext cx="2926080" cy="365760"/>
+          <p:cNvPr id="24" name="TextBox 23"/>
+          <p:cNvSpPr txBox="1"/>
+          <p:nvPr/>
+        </p:nvSpPr>
+        <p:spPr>
+          <a:xfrm>
+            <a:off x="6492240" y="4114800"/>
+            <a:ext cx="4572000" cy="365760"/>
           </a:xfrm>
           <a:prstGeom prst="rect">
             <a:avLst/>
@@ -9244,39 +9947,39 @@
                 </a:solidFill>
                 <a:latin typeface="Cambria"/>
               </a:rPr>
-              <a:t>Cost</a:t>
-            </a:r>
-          </a:p>
-        </p:txBody>
-      </p:sp>
-      <p:sp>
-        <p:nvSpPr>
-          <p:cNvPr id="7" name="TextBox 6"/>
-          <p:cNvSpPr txBox="1"/>
-          <p:nvPr/>
-        </p:nvSpPr>
-        <p:spPr>
-          <a:xfrm>
-            <a:off x="1005840" y="2926080"/>
-            <a:ext cx="3017520" cy="2560320"/>
-          </a:xfrm>
-          <a:prstGeom prst="rect">
-            <a:avLst/>
-          </a:prstGeom>
-          <a:noFill/>
-        </p:spPr>
-        <p:txBody>
-          <a:bodyPr wrap="square" lIns="0" rIns="0" tIns="0" bIns="0" anchor="t">
-            <a:spAutoFit/>
-          </a:bodyPr>
-          <a:lstStyle/>
-          <a:p>
-            <a:pPr algn="l">
-              <a:lnSpc>
-                <a:spcPct val="115000"/>
-              </a:lnSpc>
-              <a:spcAft>
-                <a:spcPts val="900"/>
+              <a:t>How it is verified</a:t>
+            </a:r>
+          </a:p>
+        </p:txBody>
+      </p:sp>
+      <p:sp>
+        <p:nvSpPr>
+          <p:cNvPr id="25" name="TextBox 24"/>
+          <p:cNvSpPr txBox="1"/>
+          <p:nvPr/>
+        </p:nvSpPr>
+        <p:spPr>
+          <a:xfrm>
+            <a:off x="6492240" y="4572000"/>
+            <a:ext cx="4663440" cy="1280160"/>
+          </a:xfrm>
+          <a:prstGeom prst="rect">
+            <a:avLst/>
+          </a:prstGeom>
+          <a:noFill/>
+        </p:spPr>
+        <p:txBody>
+          <a:bodyPr wrap="square" lIns="0" rIns="0" tIns="0" bIns="0" anchor="t">
+            <a:spAutoFit/>
+          </a:bodyPr>
+          <a:lstStyle/>
+          <a:p>
+            <a:pPr algn="l">
+              <a:lnSpc>
+                <a:spcPct val="115000"/>
+              </a:lnSpc>
+              <a:spcAft>
+                <a:spcPts val="600"/>
               </a:spcAft>
             </a:pPr>
             <a:r>
@@ -9286,16 +9989,16 @@
                 </a:solidFill>
                 <a:latin typeface="Calibri"/>
               </a:rPr>
-              <a:t>Free tiers cover normal learning use</a:t>
-            </a:r>
-          </a:p>
-          <a:p>
-            <a:pPr algn="l">
-              <a:lnSpc>
-                <a:spcPct val="115000"/>
-              </a:lnSpc>
-              <a:spcAft>
-                <a:spcPts val="900"/>
+              <a:t>npm run build type-checks the whole app</a:t>
+            </a:r>
+          </a:p>
+          <a:p>
+            <a:pPr algn="l">
+              <a:lnSpc>
+                <a:spcPct val="115000"/>
+              </a:lnSpc>
+              <a:spcAft>
+                <a:spcPts val="600"/>
               </a:spcAft>
             </a:pPr>
             <a:r>
@@ -9305,16 +10008,16 @@
                 </a:solidFill>
                 <a:latin typeface="Calibri"/>
               </a:rPr>
-              <a:t>Paid providers: a few cents per module</a:t>
-            </a:r>
-          </a:p>
-          <a:p>
-            <a:pPr algn="l">
-              <a:lnSpc>
-                <a:spcPct val="115000"/>
-              </a:lnSpc>
-              <a:spcAft>
-                <a:spcPts val="900"/>
+              <a:t>Production build checked in Chrome: offline, key encryption, backup</a:t>
+            </a:r>
+          </a:p>
+          <a:p>
+            <a:pPr algn="l">
+              <a:lnSpc>
+                <a:spcPct val="115000"/>
+              </a:lnSpc>
+              <a:spcAft>
+                <a:spcPts val="600"/>
               </a:spcAft>
             </a:pPr>
             <a:r>
@@ -9324,398 +10027,7 @@
                 </a:solidFill>
                 <a:latin typeface="Calibri"/>
               </a:rPr>
-              <a:t>Effort defaults to low to keep usage down</a:t>
-            </a:r>
-          </a:p>
-          <a:p>
-            <a:pPr algn="l">
-              <a:lnSpc>
-                <a:spcPct val="115000"/>
-              </a:lnSpc>
-              <a:spcAft>
-                <a:spcPts val="900"/>
-              </a:spcAft>
-            </a:pPr>
-            <a:r>
-              <a:rPr sz="1250" b="0">
-                <a:solidFill>
-                  <a:srgbClr val="475569"/>
-                </a:solidFill>
-                <a:latin typeface="Calibri"/>
-              </a:rPr>
-              <a:t>Hosting: none - it is a static site</a:t>
-            </a:r>
-          </a:p>
-        </p:txBody>
-      </p:sp>
-      <p:sp>
-        <p:nvSpPr>
-          <p:cNvPr id="8" name="Rounded Rectangle 7"/>
-          <p:cNvSpPr/>
-          <p:nvPr/>
-        </p:nvSpPr>
-        <p:spPr>
-          <a:xfrm>
-            <a:off x="4434840" y="2194560"/>
-            <a:ext cx="3474720" cy="3566160"/>
-          </a:xfrm>
-          <a:prstGeom prst="roundRect">
-            <a:avLst>
-              <a:gd name="adj" fmla="val 8000"/>
-            </a:avLst>
-          </a:prstGeom>
-          <a:solidFill>
-            <a:srgbClr val="F8FAFC"/>
-          </a:solidFill>
-          <a:ln w="12700">
-            <a:solidFill>
-              <a:srgbClr val="E2E8F0"/>
-            </a:solidFill>
-          </a:ln>
-          <a:effectLst/>
-        </p:spPr>
-        <p:style>
-          <a:lnRef idx="1">
-            <a:schemeClr val="accent1"/>
-          </a:lnRef>
-          <a:fillRef idx="3">
-            <a:schemeClr val="accent1"/>
-          </a:fillRef>
-          <a:effectRef idx="2">
-            <a:schemeClr val="accent1"/>
-          </a:effectRef>
-          <a:fontRef idx="minor">
-            <a:schemeClr val="lt1"/>
-          </a:fontRef>
-        </p:style>
-        <p:txBody>
-          <a:bodyPr rtlCol="0" anchor="ctr"/>
-          <a:lstStyle/>
-          <a:p/>
-        </p:txBody>
-      </p:sp>
-      <p:sp>
-        <p:nvSpPr>
-          <p:cNvPr id="9" name="TextBox 8"/>
-          <p:cNvSpPr txBox="1"/>
-          <p:nvPr/>
-        </p:nvSpPr>
-        <p:spPr>
-          <a:xfrm>
-            <a:off x="4709160" y="2468880"/>
-            <a:ext cx="2926080" cy="365760"/>
-          </a:xfrm>
-          <a:prstGeom prst="rect">
-            <a:avLst/>
-          </a:prstGeom>
-          <a:noFill/>
-        </p:spPr>
-        <p:txBody>
-          <a:bodyPr wrap="square" lIns="0" rIns="0" tIns="0" bIns="0" anchor="t">
-            <a:spAutoFit/>
-          </a:bodyPr>
-          <a:lstStyle/>
-          <a:p>
-            <a:pPr algn="l">
-              <a:lnSpc>
-                <a:spcPct val="115000"/>
-              </a:lnSpc>
-              <a:spcAft>
-                <a:spcPts val="600"/>
-              </a:spcAft>
-            </a:pPr>
-            <a:r>
-              <a:rPr sz="1600" b="1">
-                <a:solidFill>
-                  <a:srgbClr val="0F172A"/>
-                </a:solidFill>
-                <a:latin typeface="Cambria"/>
-              </a:rPr>
-              <a:t>Privacy</a:t>
-            </a:r>
-          </a:p>
-        </p:txBody>
-      </p:sp>
-      <p:sp>
-        <p:nvSpPr>
-          <p:cNvPr id="10" name="TextBox 9"/>
-          <p:cNvSpPr txBox="1"/>
-          <p:nvPr/>
-        </p:nvSpPr>
-        <p:spPr>
-          <a:xfrm>
-            <a:off x="4709160" y="2926080"/>
-            <a:ext cx="3017520" cy="2560320"/>
-          </a:xfrm>
-          <a:prstGeom prst="rect">
-            <a:avLst/>
-          </a:prstGeom>
-          <a:noFill/>
-        </p:spPr>
-        <p:txBody>
-          <a:bodyPr wrap="square" lIns="0" rIns="0" tIns="0" bIns="0" anchor="t">
-            <a:spAutoFit/>
-          </a:bodyPr>
-          <a:lstStyle/>
-          <a:p>
-            <a:pPr algn="l">
-              <a:lnSpc>
-                <a:spcPct val="115000"/>
-              </a:lnSpc>
-              <a:spcAft>
-                <a:spcPts val="900"/>
-              </a:spcAft>
-            </a:pPr>
-            <a:r>
-              <a:rPr sz="1250" b="0">
-                <a:solidFill>
-                  <a:srgbClr val="475569"/>
-                </a:solidFill>
-                <a:latin typeface="Calibri"/>
-              </a:rPr>
-              <a:t>Learner data stays in the browser</a:t>
-            </a:r>
-          </a:p>
-          <a:p>
-            <a:pPr algn="l">
-              <a:lnSpc>
-                <a:spcPct val="115000"/>
-              </a:lnSpc>
-              <a:spcAft>
-                <a:spcPts val="900"/>
-              </a:spcAft>
-            </a:pPr>
-            <a:r>
-              <a:rPr sz="1250" b="0">
-                <a:solidFill>
-                  <a:srgbClr val="475569"/>
-                </a:solidFill>
-                <a:latin typeface="Calibri"/>
-              </a:rPr>
-              <a:t>No SkillPath server, no account</a:t>
-            </a:r>
-          </a:p>
-          <a:p>
-            <a:pPr algn="l">
-              <a:lnSpc>
-                <a:spcPct val="115000"/>
-              </a:lnSpc>
-              <a:spcAft>
-                <a:spcPts val="900"/>
-              </a:spcAft>
-            </a:pPr>
-            <a:r>
-              <a:rPr sz="1250" b="0">
-                <a:solidFill>
-                  <a:srgbClr val="475569"/>
-                </a:solidFill>
-                <a:latin typeface="Calibri"/>
-              </a:rPr>
-              <a:t>Text goes only to the chosen provider</a:t>
-            </a:r>
-          </a:p>
-          <a:p>
-            <a:pPr algn="l">
-              <a:lnSpc>
-                <a:spcPct val="115000"/>
-              </a:lnSpc>
-              <a:spcAft>
-                <a:spcPts val="900"/>
-              </a:spcAft>
-            </a:pPr>
-            <a:r>
-              <a:rPr sz="1250" b="0">
-                <a:solidFill>
-                  <a:srgbClr val="475569"/>
-                </a:solidFill>
-                <a:latin typeface="Calibri"/>
-              </a:rPr>
-              <a:t>Free tiers may train on prompts - the app says so</a:t>
-            </a:r>
-          </a:p>
-        </p:txBody>
-      </p:sp>
-      <p:sp>
-        <p:nvSpPr>
-          <p:cNvPr id="11" name="Rounded Rectangle 10"/>
-          <p:cNvSpPr/>
-          <p:nvPr/>
-        </p:nvSpPr>
-        <p:spPr>
-          <a:xfrm>
-            <a:off x="8138160" y="2194560"/>
-            <a:ext cx="3291840" cy="3566160"/>
-          </a:xfrm>
-          <a:prstGeom prst="roundRect">
-            <a:avLst>
-              <a:gd name="adj" fmla="val 8000"/>
-            </a:avLst>
-          </a:prstGeom>
-          <a:solidFill>
-            <a:srgbClr val="1E1B4B"/>
-          </a:solidFill>
-          <a:ln>
-            <a:noFill/>
-          </a:ln>
-          <a:effectLst/>
-        </p:spPr>
-        <p:style>
-          <a:lnRef idx="1">
-            <a:schemeClr val="accent1"/>
-          </a:lnRef>
-          <a:fillRef idx="3">
-            <a:schemeClr val="accent1"/>
-          </a:fillRef>
-          <a:effectRef idx="2">
-            <a:schemeClr val="accent1"/>
-          </a:effectRef>
-          <a:fontRef idx="minor">
-            <a:schemeClr val="lt1"/>
-          </a:fontRef>
-        </p:style>
-        <p:txBody>
-          <a:bodyPr rtlCol="0" anchor="ctr"/>
-          <a:lstStyle/>
-          <a:p/>
-        </p:txBody>
-      </p:sp>
-      <p:sp>
-        <p:nvSpPr>
-          <p:cNvPr id="12" name="TextBox 11"/>
-          <p:cNvSpPr txBox="1"/>
-          <p:nvPr/>
-        </p:nvSpPr>
-        <p:spPr>
-          <a:xfrm>
-            <a:off x="8412480" y="2468880"/>
-            <a:ext cx="2743200" cy="365760"/>
-          </a:xfrm>
-          <a:prstGeom prst="rect">
-            <a:avLst/>
-          </a:prstGeom>
-          <a:noFill/>
-        </p:spPr>
-        <p:txBody>
-          <a:bodyPr wrap="square" lIns="0" rIns="0" tIns="0" bIns="0" anchor="t">
-            <a:spAutoFit/>
-          </a:bodyPr>
-          <a:lstStyle/>
-          <a:p>
-            <a:pPr algn="l">
-              <a:lnSpc>
-                <a:spcPct val="115000"/>
-              </a:lnSpc>
-              <a:spcAft>
-                <a:spcPts val="600"/>
-              </a:spcAft>
-            </a:pPr>
-            <a:r>
-              <a:rPr sz="1600" b="1">
-                <a:solidFill>
-                  <a:srgbClr val="FFFFFF"/>
-                </a:solidFill>
-                <a:latin typeface="Cambria"/>
-              </a:rPr>
-              <a:t>The caveat</a:t>
-            </a:r>
-          </a:p>
-        </p:txBody>
-      </p:sp>
-      <p:sp>
-        <p:nvSpPr>
-          <p:cNvPr id="13" name="TextBox 12"/>
-          <p:cNvSpPr txBox="1"/>
-          <p:nvPr/>
-        </p:nvSpPr>
-        <p:spPr>
-          <a:xfrm>
-            <a:off x="8412480" y="2926080"/>
-            <a:ext cx="2834640" cy="2560320"/>
-          </a:xfrm>
-          <a:prstGeom prst="rect">
-            <a:avLst/>
-          </a:prstGeom>
-          <a:noFill/>
-        </p:spPr>
-        <p:txBody>
-          <a:bodyPr wrap="square" lIns="0" rIns="0" tIns="0" bIns="0" anchor="t">
-            <a:spAutoFit/>
-          </a:bodyPr>
-          <a:lstStyle/>
-          <a:p>
-            <a:pPr algn="l">
-              <a:lnSpc>
-                <a:spcPct val="115000"/>
-              </a:lnSpc>
-              <a:spcAft>
-                <a:spcPts val="900"/>
-              </a:spcAft>
-            </a:pPr>
-            <a:r>
-              <a:rPr sz="1250" b="0">
-                <a:solidFill>
-                  <a:srgbClr val="C7D2FE"/>
-                </a:solidFill>
-                <a:latin typeface="Calibri"/>
-              </a:rPr>
-              <a:t>The API key sits in the browser.</a:t>
-            </a:r>
-          </a:p>
-          <a:p>
-            <a:pPr algn="l">
-              <a:lnSpc>
-                <a:spcPct val="115000"/>
-              </a:lnSpc>
-              <a:spcAft>
-                <a:spcPts val="900"/>
-              </a:spcAft>
-            </a:pPr>
-            <a:r>
-              <a:rPr sz="1250" b="0">
-                <a:solidFill>
-                  <a:srgbClr val="C7D2FE"/>
-                </a:solidFill>
-                <a:latin typeface="Calibri"/>
-              </a:rPr>
-              <a:t>Fine on your own machine.</a:t>
-            </a:r>
-          </a:p>
-          <a:p>
-            <a:pPr algn="l">
-              <a:lnSpc>
-                <a:spcPct val="115000"/>
-              </a:lnSpc>
-              <a:spcAft>
-                <a:spcPts val="900"/>
-              </a:spcAft>
-            </a:pPr>
-            <a:r>
-              <a:rPr sz="1250" b="0">
-                <a:solidFill>
-                  <a:srgbClr val="C7D2FE"/>
-                </a:solidFill>
-                <a:latin typeface="Calibri"/>
-              </a:rPr>
-              <a:t>Before sharing: move the calls behind a small serverless function.</a:t>
-            </a:r>
-          </a:p>
-          <a:p>
-            <a:pPr algn="l">
-              <a:lnSpc>
-                <a:spcPct val="115000"/>
-              </a:lnSpc>
-              <a:spcAft>
-                <a:spcPts val="900"/>
-              </a:spcAft>
-            </a:pPr>
-            <a:r>
-              <a:rPr sz="1250" b="0">
-                <a:solidFill>
-                  <a:srgbClr val="C7D2FE"/>
-                </a:solidFill>
-                <a:latin typeface="Calibri"/>
-              </a:rPr>
-              <a:t>That is a one-file change.</a:t>
+              <a:t>Manual smoke test for the six learner steps</a:t>
             </a:r>
           </a:p>
         </p:txBody>
@@ -9819,7 +10131,7 @@
                 </a:solidFill>
                 <a:latin typeface="Cambria"/>
               </a:rPr>
-              <a:t>Where it goes next</a:t>
+              <a:t>Cost, privacy and the honest caveat</a:t>
             </a:r>
           </a:p>
         </p:txBody>
@@ -9861,7 +10173,7 @@
                 </a:solidFill>
                 <a:latin typeface="Calibri"/>
               </a:rPr>
-              <a:t>Each step is a known, scoped change</a:t>
+              <a:t>What it costs to run, how data is protected, and the one caveat</a:t>
             </a:r>
           </a:p>
         </p:txBody>
@@ -9875,223 +10187,7 @@
         <p:spPr>
           <a:xfrm>
             <a:off x="731520" y="2194560"/>
-            <a:ext cx="10698480" cy="868680"/>
-          </a:xfrm>
-          <a:prstGeom prst="roundRect">
-            <a:avLst>
-              <a:gd name="adj" fmla="val 8000"/>
-            </a:avLst>
-          </a:prstGeom>
-          <a:solidFill>
-            <a:srgbClr val="FFFFFF"/>
-          </a:solidFill>
-          <a:ln w="12700">
-            <a:solidFill>
-              <a:srgbClr val="E2E8F0"/>
-            </a:solidFill>
-          </a:ln>
-          <a:effectLst/>
-        </p:spPr>
-        <p:style>
-          <a:lnRef idx="1">
-            <a:schemeClr val="accent1"/>
-          </a:lnRef>
-          <a:fillRef idx="3">
-            <a:schemeClr val="accent1"/>
-          </a:fillRef>
-          <a:effectRef idx="2">
-            <a:schemeClr val="accent1"/>
-          </a:effectRef>
-          <a:fontRef idx="minor">
-            <a:schemeClr val="lt1"/>
-          </a:fontRef>
-        </p:style>
-        <p:txBody>
-          <a:bodyPr rtlCol="0" anchor="ctr"/>
-          <a:lstStyle/>
-          <a:p/>
-        </p:txBody>
-      </p:sp>
-      <p:sp>
-        <p:nvSpPr>
-          <p:cNvPr id="6" name="Rounded Rectangle 5"/>
-          <p:cNvSpPr/>
-          <p:nvPr/>
-        </p:nvSpPr>
-        <p:spPr>
-          <a:xfrm>
-            <a:off x="1005840" y="2423160"/>
-            <a:ext cx="1005840" cy="411480"/>
-          </a:xfrm>
-          <a:prstGeom prst="roundRect">
-            <a:avLst>
-              <a:gd name="adj" fmla="val 30000"/>
-            </a:avLst>
-          </a:prstGeom>
-          <a:solidFill>
-            <a:srgbClr val="4F46E5"/>
-          </a:solidFill>
-          <a:ln>
-            <a:noFill/>
-          </a:ln>
-          <a:effectLst/>
-        </p:spPr>
-        <p:style>
-          <a:lnRef idx="1">
-            <a:schemeClr val="accent1"/>
-          </a:lnRef>
-          <a:fillRef idx="3">
-            <a:schemeClr val="accent1"/>
-          </a:fillRef>
-          <a:effectRef idx="2">
-            <a:schemeClr val="accent1"/>
-          </a:effectRef>
-          <a:fontRef idx="minor">
-            <a:schemeClr val="lt1"/>
-          </a:fontRef>
-        </p:style>
-        <p:txBody>
-          <a:bodyPr rtlCol="0" anchor="ctr"/>
-          <a:lstStyle/>
-          <a:p/>
-        </p:txBody>
-      </p:sp>
-      <p:sp>
-        <p:nvSpPr>
-          <p:cNvPr id="7" name="TextBox 6"/>
-          <p:cNvSpPr txBox="1"/>
-          <p:nvPr/>
-        </p:nvSpPr>
-        <p:spPr>
-          <a:xfrm>
-            <a:off x="1005840" y="2505456"/>
-            <a:ext cx="1005840" cy="274320"/>
-          </a:xfrm>
-          <a:prstGeom prst="rect">
-            <a:avLst/>
-          </a:prstGeom>
-          <a:noFill/>
-        </p:spPr>
-        <p:txBody>
-          <a:bodyPr wrap="square" lIns="0" rIns="0" tIns="0" bIns="0" anchor="t">
-            <a:spAutoFit/>
-          </a:bodyPr>
-          <a:lstStyle/>
-          <a:p>
-            <a:pPr algn="ctr">
-              <a:lnSpc>
-                <a:spcPct val="115000"/>
-              </a:lnSpc>
-              <a:spcAft>
-                <a:spcPts val="600"/>
-              </a:spcAft>
-            </a:pPr>
-            <a:r>
-              <a:rPr sz="1100" b="1">
-                <a:solidFill>
-                  <a:srgbClr val="FFFFFF"/>
-                </a:solidFill>
-                <a:latin typeface="Calibri"/>
-              </a:rPr>
-              <a:t>Next</a:t>
-            </a:r>
-          </a:p>
-        </p:txBody>
-      </p:sp>
-      <p:sp>
-        <p:nvSpPr>
-          <p:cNvPr id="8" name="TextBox 7"/>
-          <p:cNvSpPr txBox="1"/>
-          <p:nvPr/>
-        </p:nvSpPr>
-        <p:spPr>
-          <a:xfrm>
-            <a:off x="2240280" y="2377440"/>
-            <a:ext cx="3657600" cy="365760"/>
-          </a:xfrm>
-          <a:prstGeom prst="rect">
-            <a:avLst/>
-          </a:prstGeom>
-          <a:noFill/>
-        </p:spPr>
-        <p:txBody>
-          <a:bodyPr wrap="square" lIns="0" rIns="0" tIns="0" bIns="0" anchor="t">
-            <a:spAutoFit/>
-          </a:bodyPr>
-          <a:lstStyle/>
-          <a:p>
-            <a:pPr algn="l">
-              <a:lnSpc>
-                <a:spcPct val="115000"/>
-              </a:lnSpc>
-              <a:spcAft>
-                <a:spcPts val="600"/>
-              </a:spcAft>
-            </a:pPr>
-            <a:r>
-              <a:rPr sz="1500" b="1">
-                <a:solidFill>
-                  <a:srgbClr val="0F172A"/>
-                </a:solidFill>
-                <a:latin typeface="Cambria"/>
-              </a:rPr>
-              <a:t>Serverless key proxy</a:t>
-            </a:r>
-          </a:p>
-        </p:txBody>
-      </p:sp>
-      <p:sp>
-        <p:nvSpPr>
-          <p:cNvPr id="9" name="TextBox 8"/>
-          <p:cNvSpPr txBox="1"/>
-          <p:nvPr/>
-        </p:nvSpPr>
-        <p:spPr>
-          <a:xfrm>
-            <a:off x="2240280" y="2697480"/>
-            <a:ext cx="7315200" cy="274320"/>
-          </a:xfrm>
-          <a:prstGeom prst="rect">
-            <a:avLst/>
-          </a:prstGeom>
-          <a:noFill/>
-        </p:spPr>
-        <p:txBody>
-          <a:bodyPr wrap="square" lIns="0" rIns="0" tIns="0" bIns="0" anchor="t">
-            <a:spAutoFit/>
-          </a:bodyPr>
-          <a:lstStyle/>
-          <a:p>
-            <a:pPr algn="l">
-              <a:lnSpc>
-                <a:spcPct val="115000"/>
-              </a:lnSpc>
-              <a:spcAft>
-                <a:spcPts val="600"/>
-              </a:spcAft>
-            </a:pPr>
-            <a:r>
-              <a:rPr sz="1250" b="0">
-                <a:solidFill>
-                  <a:srgbClr val="475569"/>
-                </a:solidFill>
-                <a:latin typeface="Calibri"/>
-              </a:rPr>
-              <a:t>Share the app safely with a team</a:t>
-            </a:r>
-          </a:p>
-        </p:txBody>
-      </p:sp>
-      <p:sp>
-        <p:nvSpPr>
-          <p:cNvPr id="10" name="Rounded Rectangle 9"/>
-          <p:cNvSpPr/>
-          <p:nvPr/>
-        </p:nvSpPr>
-        <p:spPr>
-          <a:xfrm>
-            <a:off x="731520" y="3200400"/>
-            <a:ext cx="10698480" cy="868680"/>
+            <a:ext cx="3474720" cy="3566160"/>
           </a:xfrm>
           <a:prstGeom prst="roundRect">
             <a:avLst>
@@ -10130,400 +10226,155 @@
       </p:sp>
       <p:sp>
         <p:nvSpPr>
-          <p:cNvPr id="11" name="Rounded Rectangle 10"/>
+          <p:cNvPr id="6" name="TextBox 5"/>
+          <p:cNvSpPr txBox="1"/>
+          <p:nvPr/>
+        </p:nvSpPr>
+        <p:spPr>
+          <a:xfrm>
+            <a:off x="1005840" y="2468880"/>
+            <a:ext cx="2926080" cy="365760"/>
+          </a:xfrm>
+          <a:prstGeom prst="rect">
+            <a:avLst/>
+          </a:prstGeom>
+          <a:noFill/>
+        </p:spPr>
+        <p:txBody>
+          <a:bodyPr wrap="square" lIns="0" rIns="0" tIns="0" bIns="0" anchor="t">
+            <a:spAutoFit/>
+          </a:bodyPr>
+          <a:lstStyle/>
+          <a:p>
+            <a:pPr algn="l">
+              <a:lnSpc>
+                <a:spcPct val="115000"/>
+              </a:lnSpc>
+              <a:spcAft>
+                <a:spcPts val="600"/>
+              </a:spcAft>
+            </a:pPr>
+            <a:r>
+              <a:rPr sz="1600" b="1">
+                <a:solidFill>
+                  <a:srgbClr val="0F172A"/>
+                </a:solidFill>
+                <a:latin typeface="Cambria"/>
+              </a:rPr>
+              <a:t>Cost</a:t>
+            </a:r>
+          </a:p>
+        </p:txBody>
+      </p:sp>
+      <p:sp>
+        <p:nvSpPr>
+          <p:cNvPr id="7" name="TextBox 6"/>
+          <p:cNvSpPr txBox="1"/>
+          <p:nvPr/>
+        </p:nvSpPr>
+        <p:spPr>
+          <a:xfrm>
+            <a:off x="1005840" y="2926080"/>
+            <a:ext cx="3017520" cy="2560320"/>
+          </a:xfrm>
+          <a:prstGeom prst="rect">
+            <a:avLst/>
+          </a:prstGeom>
+          <a:noFill/>
+        </p:spPr>
+        <p:txBody>
+          <a:bodyPr wrap="square" lIns="0" rIns="0" tIns="0" bIns="0" anchor="t">
+            <a:spAutoFit/>
+          </a:bodyPr>
+          <a:lstStyle/>
+          <a:p>
+            <a:pPr algn="l">
+              <a:lnSpc>
+                <a:spcPct val="115000"/>
+              </a:lnSpc>
+              <a:spcAft>
+                <a:spcPts val="900"/>
+              </a:spcAft>
+            </a:pPr>
+            <a:r>
+              <a:rPr sz="1250" b="0">
+                <a:solidFill>
+                  <a:srgbClr val="475569"/>
+                </a:solidFill>
+                <a:latin typeface="Calibri"/>
+              </a:rPr>
+              <a:t>Free tiers cover normal learning use</a:t>
+            </a:r>
+          </a:p>
+          <a:p>
+            <a:pPr algn="l">
+              <a:lnSpc>
+                <a:spcPct val="115000"/>
+              </a:lnSpc>
+              <a:spcAft>
+                <a:spcPts val="900"/>
+              </a:spcAft>
+            </a:pPr>
+            <a:r>
+              <a:rPr sz="1250" b="0">
+                <a:solidFill>
+                  <a:srgbClr val="475569"/>
+                </a:solidFill>
+                <a:latin typeface="Calibri"/>
+              </a:rPr>
+              <a:t>Paid providers: a few cents per module</a:t>
+            </a:r>
+          </a:p>
+          <a:p>
+            <a:pPr algn="l">
+              <a:lnSpc>
+                <a:spcPct val="115000"/>
+              </a:lnSpc>
+              <a:spcAft>
+                <a:spcPts val="900"/>
+              </a:spcAft>
+            </a:pPr>
+            <a:r>
+              <a:rPr sz="1250" b="0">
+                <a:solidFill>
+                  <a:srgbClr val="475569"/>
+                </a:solidFill>
+                <a:latin typeface="Calibri"/>
+              </a:rPr>
+              <a:t>Effort defaults to low to keep usage down</a:t>
+            </a:r>
+          </a:p>
+          <a:p>
+            <a:pPr algn="l">
+              <a:lnSpc>
+                <a:spcPct val="115000"/>
+              </a:lnSpc>
+              <a:spcAft>
+                <a:spcPts val="900"/>
+              </a:spcAft>
+            </a:pPr>
+            <a:r>
+              <a:rPr sz="1250" b="0">
+                <a:solidFill>
+                  <a:srgbClr val="475569"/>
+                </a:solidFill>
+                <a:latin typeface="Calibri"/>
+              </a:rPr>
+              <a:t>Hosting: free - it is a static site</a:t>
+            </a:r>
+          </a:p>
+        </p:txBody>
+      </p:sp>
+      <p:sp>
+        <p:nvSpPr>
+          <p:cNvPr id="8" name="Rounded Rectangle 7"/>
           <p:cNvSpPr/>
           <p:nvPr/>
         </p:nvSpPr>
         <p:spPr>
           <a:xfrm>
-            <a:off x="1005840" y="3429000"/>
-            <a:ext cx="1005840" cy="411480"/>
-          </a:xfrm>
-          <a:prstGeom prst="roundRect">
-            <a:avLst>
-              <a:gd name="adj" fmla="val 30000"/>
-            </a:avLst>
-          </a:prstGeom>
-          <a:solidFill>
-            <a:srgbClr val="CBD5E1"/>
-          </a:solidFill>
-          <a:ln>
-            <a:noFill/>
-          </a:ln>
-          <a:effectLst/>
-        </p:spPr>
-        <p:style>
-          <a:lnRef idx="1">
-            <a:schemeClr val="accent1"/>
-          </a:lnRef>
-          <a:fillRef idx="3">
-            <a:schemeClr val="accent1"/>
-          </a:fillRef>
-          <a:effectRef idx="2">
-            <a:schemeClr val="accent1"/>
-          </a:effectRef>
-          <a:fontRef idx="minor">
-            <a:schemeClr val="lt1"/>
-          </a:fontRef>
-        </p:style>
-        <p:txBody>
-          <a:bodyPr rtlCol="0" anchor="ctr"/>
-          <a:lstStyle/>
-          <a:p/>
-        </p:txBody>
-      </p:sp>
-      <p:sp>
-        <p:nvSpPr>
-          <p:cNvPr id="12" name="TextBox 11"/>
-          <p:cNvSpPr txBox="1"/>
-          <p:nvPr/>
-        </p:nvSpPr>
-        <p:spPr>
-          <a:xfrm>
-            <a:off x="1005840" y="3511296"/>
-            <a:ext cx="1005840" cy="274320"/>
-          </a:xfrm>
-          <a:prstGeom prst="rect">
-            <a:avLst/>
-          </a:prstGeom>
-          <a:noFill/>
-        </p:spPr>
-        <p:txBody>
-          <a:bodyPr wrap="square" lIns="0" rIns="0" tIns="0" bIns="0" anchor="t">
-            <a:spAutoFit/>
-          </a:bodyPr>
-          <a:lstStyle/>
-          <a:p>
-            <a:pPr algn="ctr">
-              <a:lnSpc>
-                <a:spcPct val="115000"/>
-              </a:lnSpc>
-              <a:spcAft>
-                <a:spcPts val="600"/>
-              </a:spcAft>
-            </a:pPr>
-            <a:r>
-              <a:rPr sz="1100" b="1">
-                <a:solidFill>
-                  <a:srgbClr val="1E1B4B"/>
-                </a:solidFill>
-                <a:latin typeface="Calibri"/>
-              </a:rPr>
-              <a:t>Then</a:t>
-            </a:r>
-          </a:p>
-        </p:txBody>
-      </p:sp>
-      <p:sp>
-        <p:nvSpPr>
-          <p:cNvPr id="13" name="TextBox 12"/>
-          <p:cNvSpPr txBox="1"/>
-          <p:nvPr/>
-        </p:nvSpPr>
-        <p:spPr>
-          <a:xfrm>
-            <a:off x="2240280" y="3383280"/>
-            <a:ext cx="3657600" cy="365760"/>
-          </a:xfrm>
-          <a:prstGeom prst="rect">
-            <a:avLst/>
-          </a:prstGeom>
-          <a:noFill/>
-        </p:spPr>
-        <p:txBody>
-          <a:bodyPr wrap="square" lIns="0" rIns="0" tIns="0" bIns="0" anchor="t">
-            <a:spAutoFit/>
-          </a:bodyPr>
-          <a:lstStyle/>
-          <a:p>
-            <a:pPr algn="l">
-              <a:lnSpc>
-                <a:spcPct val="115000"/>
-              </a:lnSpc>
-              <a:spcAft>
-                <a:spcPts val="600"/>
-              </a:spcAft>
-            </a:pPr>
-            <a:r>
-              <a:rPr sz="1500" b="1">
-                <a:solidFill>
-                  <a:srgbClr val="0F172A"/>
-                </a:solidFill>
-                <a:latin typeface="Cambria"/>
-              </a:rPr>
-              <a:t>Accounts and sync</a:t>
-            </a:r>
-          </a:p>
-        </p:txBody>
-      </p:sp>
-      <p:sp>
-        <p:nvSpPr>
-          <p:cNvPr id="14" name="TextBox 13"/>
-          <p:cNvSpPr txBox="1"/>
-          <p:nvPr/>
-        </p:nvSpPr>
-        <p:spPr>
-          <a:xfrm>
-            <a:off x="2240280" y="3703320"/>
-            <a:ext cx="7315200" cy="274320"/>
-          </a:xfrm>
-          <a:prstGeom prst="rect">
-            <a:avLst/>
-          </a:prstGeom>
-          <a:noFill/>
-        </p:spPr>
-        <p:txBody>
-          <a:bodyPr wrap="square" lIns="0" rIns="0" tIns="0" bIns="0" anchor="t">
-            <a:spAutoFit/>
-          </a:bodyPr>
-          <a:lstStyle/>
-          <a:p>
-            <a:pPr algn="l">
-              <a:lnSpc>
-                <a:spcPct val="115000"/>
-              </a:lnSpc>
-              <a:spcAft>
-                <a:spcPts val="600"/>
-              </a:spcAft>
-            </a:pPr>
-            <a:r>
-              <a:rPr sz="1250" b="0">
-                <a:solidFill>
-                  <a:srgbClr val="475569"/>
-                </a:solidFill>
-                <a:latin typeface="Calibri"/>
-              </a:rPr>
-              <a:t>Progress across devices; replace storage.ts</a:t>
-            </a:r>
-          </a:p>
-        </p:txBody>
-      </p:sp>
-      <p:sp>
-        <p:nvSpPr>
-          <p:cNvPr id="15" name="Rounded Rectangle 14"/>
-          <p:cNvSpPr/>
-          <p:nvPr/>
-        </p:nvSpPr>
-        <p:spPr>
-          <a:xfrm>
-            <a:off x="731520" y="4206240"/>
-            <a:ext cx="10698480" cy="868680"/>
-          </a:xfrm>
-          <a:prstGeom prst="roundRect">
-            <a:avLst>
-              <a:gd name="adj" fmla="val 8000"/>
-            </a:avLst>
-          </a:prstGeom>
-          <a:solidFill>
-            <a:srgbClr val="FFFFFF"/>
-          </a:solidFill>
-          <a:ln w="12700">
-            <a:solidFill>
-              <a:srgbClr val="E2E8F0"/>
-            </a:solidFill>
-          </a:ln>
-          <a:effectLst/>
-        </p:spPr>
-        <p:style>
-          <a:lnRef idx="1">
-            <a:schemeClr val="accent1"/>
-          </a:lnRef>
-          <a:fillRef idx="3">
-            <a:schemeClr val="accent1"/>
-          </a:fillRef>
-          <a:effectRef idx="2">
-            <a:schemeClr val="accent1"/>
-          </a:effectRef>
-          <a:fontRef idx="minor">
-            <a:schemeClr val="lt1"/>
-          </a:fontRef>
-        </p:style>
-        <p:txBody>
-          <a:bodyPr rtlCol="0" anchor="ctr"/>
-          <a:lstStyle/>
-          <a:p/>
-        </p:txBody>
-      </p:sp>
-      <p:sp>
-        <p:nvSpPr>
-          <p:cNvPr id="16" name="Rounded Rectangle 15"/>
-          <p:cNvSpPr/>
-          <p:nvPr/>
-        </p:nvSpPr>
-        <p:spPr>
-          <a:xfrm>
-            <a:off x="1005840" y="4434840"/>
-            <a:ext cx="1005840" cy="411480"/>
-          </a:xfrm>
-          <a:prstGeom prst="roundRect">
-            <a:avLst>
-              <a:gd name="adj" fmla="val 30000"/>
-            </a:avLst>
-          </a:prstGeom>
-          <a:solidFill>
-            <a:srgbClr val="CBD5E1"/>
-          </a:solidFill>
-          <a:ln>
-            <a:noFill/>
-          </a:ln>
-          <a:effectLst/>
-        </p:spPr>
-        <p:style>
-          <a:lnRef idx="1">
-            <a:schemeClr val="accent1"/>
-          </a:lnRef>
-          <a:fillRef idx="3">
-            <a:schemeClr val="accent1"/>
-          </a:fillRef>
-          <a:effectRef idx="2">
-            <a:schemeClr val="accent1"/>
-          </a:effectRef>
-          <a:fontRef idx="minor">
-            <a:schemeClr val="lt1"/>
-          </a:fontRef>
-        </p:style>
-        <p:txBody>
-          <a:bodyPr rtlCol="0" anchor="ctr"/>
-          <a:lstStyle/>
-          <a:p/>
-        </p:txBody>
-      </p:sp>
-      <p:sp>
-        <p:nvSpPr>
-          <p:cNvPr id="17" name="TextBox 16"/>
-          <p:cNvSpPr txBox="1"/>
-          <p:nvPr/>
-        </p:nvSpPr>
-        <p:spPr>
-          <a:xfrm>
-            <a:off x="1005840" y="4517136"/>
-            <a:ext cx="1005840" cy="274320"/>
-          </a:xfrm>
-          <a:prstGeom prst="rect">
-            <a:avLst/>
-          </a:prstGeom>
-          <a:noFill/>
-        </p:spPr>
-        <p:txBody>
-          <a:bodyPr wrap="square" lIns="0" rIns="0" tIns="0" bIns="0" anchor="t">
-            <a:spAutoFit/>
-          </a:bodyPr>
-          <a:lstStyle/>
-          <a:p>
-            <a:pPr algn="ctr">
-              <a:lnSpc>
-                <a:spcPct val="115000"/>
-              </a:lnSpc>
-              <a:spcAft>
-                <a:spcPts val="600"/>
-              </a:spcAft>
-            </a:pPr>
-            <a:r>
-              <a:rPr sz="1100" b="1">
-                <a:solidFill>
-                  <a:srgbClr val="1E1B4B"/>
-                </a:solidFill>
-                <a:latin typeface="Calibri"/>
-              </a:rPr>
-              <a:t>Then</a:t>
-            </a:r>
-          </a:p>
-        </p:txBody>
-      </p:sp>
-      <p:sp>
-        <p:nvSpPr>
-          <p:cNvPr id="18" name="TextBox 17"/>
-          <p:cNvSpPr txBox="1"/>
-          <p:nvPr/>
-        </p:nvSpPr>
-        <p:spPr>
-          <a:xfrm>
-            <a:off x="2240280" y="4389120"/>
-            <a:ext cx="3657600" cy="365760"/>
-          </a:xfrm>
-          <a:prstGeom prst="rect">
-            <a:avLst/>
-          </a:prstGeom>
-          <a:noFill/>
-        </p:spPr>
-        <p:txBody>
-          <a:bodyPr wrap="square" lIns="0" rIns="0" tIns="0" bIns="0" anchor="t">
-            <a:spAutoFit/>
-          </a:bodyPr>
-          <a:lstStyle/>
-          <a:p>
-            <a:pPr algn="l">
-              <a:lnSpc>
-                <a:spcPct val="115000"/>
-              </a:lnSpc>
-              <a:spcAft>
-                <a:spcPts val="600"/>
-              </a:spcAft>
-            </a:pPr>
-            <a:r>
-              <a:rPr sz="1500" b="1">
-                <a:solidFill>
-                  <a:srgbClr val="0F172A"/>
-                </a:solidFill>
-                <a:latin typeface="Cambria"/>
-              </a:rPr>
-              <a:t>Manager / trainer view</a:t>
-            </a:r>
-          </a:p>
-        </p:txBody>
-      </p:sp>
-      <p:sp>
-        <p:nvSpPr>
-          <p:cNvPr id="19" name="TextBox 18"/>
-          <p:cNvSpPr txBox="1"/>
-          <p:nvPr/>
-        </p:nvSpPr>
-        <p:spPr>
-          <a:xfrm>
-            <a:off x="2240280" y="4709159"/>
-            <a:ext cx="7315200" cy="274320"/>
-          </a:xfrm>
-          <a:prstGeom prst="rect">
-            <a:avLst/>
-          </a:prstGeom>
-          <a:noFill/>
-        </p:spPr>
-        <p:txBody>
-          <a:bodyPr wrap="square" lIns="0" rIns="0" tIns="0" bIns="0" anchor="t">
-            <a:spAutoFit/>
-          </a:bodyPr>
-          <a:lstStyle/>
-          <a:p>
-            <a:pPr algn="l">
-              <a:lnSpc>
-                <a:spcPct val="115000"/>
-              </a:lnSpc>
-              <a:spcAft>
-                <a:spcPts val="600"/>
-              </a:spcAft>
-            </a:pPr>
-            <a:r>
-              <a:rPr sz="1250" b="0">
-                <a:solidFill>
-                  <a:srgbClr val="475569"/>
-                </a:solidFill>
-                <a:latin typeface="Calibri"/>
-              </a:rPr>
-              <a:t>Team skill profiles and gaps in one place</a:t>
-            </a:r>
-          </a:p>
-        </p:txBody>
-      </p:sp>
-      <p:sp>
-        <p:nvSpPr>
-          <p:cNvPr id="20" name="Rounded Rectangle 19"/>
-          <p:cNvSpPr/>
-          <p:nvPr/>
-        </p:nvSpPr>
-        <p:spPr>
-          <a:xfrm>
-            <a:off x="731520" y="5212080"/>
-            <a:ext cx="10698480" cy="868680"/>
+            <a:off x="4434840" y="2194560"/>
+            <a:ext cx="3474720" cy="3566160"/>
           </a:xfrm>
           <a:prstGeom prst="roundRect">
             <a:avLst>
@@ -10562,22 +10413,182 @@
       </p:sp>
       <p:sp>
         <p:nvSpPr>
-          <p:cNvPr id="21" name="Rounded Rectangle 20"/>
+          <p:cNvPr id="9" name="TextBox 8"/>
+          <p:cNvSpPr txBox="1"/>
+          <p:nvPr/>
+        </p:nvSpPr>
+        <p:spPr>
+          <a:xfrm>
+            <a:off x="4709160" y="2468880"/>
+            <a:ext cx="2926080" cy="365760"/>
+          </a:xfrm>
+          <a:prstGeom prst="rect">
+            <a:avLst/>
+          </a:prstGeom>
+          <a:noFill/>
+        </p:spPr>
+        <p:txBody>
+          <a:bodyPr wrap="square" lIns="0" rIns="0" tIns="0" bIns="0" anchor="t">
+            <a:spAutoFit/>
+          </a:bodyPr>
+          <a:lstStyle/>
+          <a:p>
+            <a:pPr algn="l">
+              <a:lnSpc>
+                <a:spcPct val="115000"/>
+              </a:lnSpc>
+              <a:spcAft>
+                <a:spcPts val="600"/>
+              </a:spcAft>
+            </a:pPr>
+            <a:r>
+              <a:rPr sz="1600" b="1">
+                <a:solidFill>
+                  <a:srgbClr val="0F172A"/>
+                </a:solidFill>
+                <a:latin typeface="Cambria"/>
+              </a:rPr>
+              <a:t>Privacy</a:t>
+            </a:r>
+          </a:p>
+        </p:txBody>
+      </p:sp>
+      <p:sp>
+        <p:nvSpPr>
+          <p:cNvPr id="10" name="TextBox 9"/>
+          <p:cNvSpPr txBox="1"/>
+          <p:nvPr/>
+        </p:nvSpPr>
+        <p:spPr>
+          <a:xfrm>
+            <a:off x="4709160" y="2926080"/>
+            <a:ext cx="3017520" cy="2560320"/>
+          </a:xfrm>
+          <a:prstGeom prst="rect">
+            <a:avLst/>
+          </a:prstGeom>
+          <a:noFill/>
+        </p:spPr>
+        <p:txBody>
+          <a:bodyPr wrap="square" lIns="0" rIns="0" tIns="0" bIns="0" anchor="t">
+            <a:spAutoFit/>
+          </a:bodyPr>
+          <a:lstStyle/>
+          <a:p>
+            <a:pPr algn="l">
+              <a:lnSpc>
+                <a:spcPct val="115000"/>
+              </a:lnSpc>
+              <a:spcAft>
+                <a:spcPts val="900"/>
+              </a:spcAft>
+            </a:pPr>
+            <a:r>
+              <a:rPr sz="1250" b="0">
+                <a:solidFill>
+                  <a:srgbClr val="475569"/>
+                </a:solidFill>
+                <a:latin typeface="Calibri"/>
+              </a:rPr>
+              <a:t>Learner data stays on the device</a:t>
+            </a:r>
+          </a:p>
+          <a:p>
+            <a:pPr algn="l">
+              <a:lnSpc>
+                <a:spcPct val="115000"/>
+              </a:lnSpc>
+              <a:spcAft>
+                <a:spcPts val="900"/>
+              </a:spcAft>
+            </a:pPr>
+            <a:r>
+              <a:rPr sz="1250" b="0">
+                <a:solidFill>
+                  <a:srgbClr val="475569"/>
+                </a:solidFill>
+                <a:latin typeface="Calibri"/>
+              </a:rPr>
+              <a:t>No SkillPath server, no account</a:t>
+            </a:r>
+          </a:p>
+          <a:p>
+            <a:pPr algn="l">
+              <a:lnSpc>
+                <a:spcPct val="115000"/>
+              </a:lnSpc>
+              <a:spcAft>
+                <a:spcPts val="900"/>
+              </a:spcAft>
+            </a:pPr>
+            <a:r>
+              <a:rPr sz="1250" b="0">
+                <a:solidFill>
+                  <a:srgbClr val="475569"/>
+                </a:solidFill>
+                <a:latin typeface="Calibri"/>
+              </a:rPr>
+              <a:t>Text goes only to the chosen provider</a:t>
+            </a:r>
+          </a:p>
+          <a:p>
+            <a:pPr algn="l">
+              <a:lnSpc>
+                <a:spcPct val="115000"/>
+              </a:lnSpc>
+              <a:spcAft>
+                <a:spcPts val="900"/>
+              </a:spcAft>
+            </a:pPr>
+            <a:r>
+              <a:rPr sz="1250" b="0">
+                <a:solidFill>
+                  <a:srgbClr val="475569"/>
+                </a:solidFill>
+                <a:latin typeface="Calibri"/>
+              </a:rPr>
+              <a:t>Backups are a file the learner keeps</a:t>
+            </a:r>
+          </a:p>
+          <a:p>
+            <a:pPr algn="l">
+              <a:lnSpc>
+                <a:spcPct val="115000"/>
+              </a:lnSpc>
+              <a:spcAft>
+                <a:spcPts val="900"/>
+              </a:spcAft>
+            </a:pPr>
+            <a:r>
+              <a:rPr sz="1250" b="0">
+                <a:solidFill>
+                  <a:srgbClr val="475569"/>
+                </a:solidFill>
+                <a:latin typeface="Calibri"/>
+              </a:rPr>
+              <a:t>Free tiers may train on prompts - the app says so</a:t>
+            </a:r>
+          </a:p>
+        </p:txBody>
+      </p:sp>
+      <p:sp>
+        <p:nvSpPr>
+          <p:cNvPr id="11" name="Rounded Rectangle 10"/>
           <p:cNvSpPr/>
           <p:nvPr/>
         </p:nvSpPr>
         <p:spPr>
           <a:xfrm>
-            <a:off x="1005840" y="5440680"/>
-            <a:ext cx="1005840" cy="411480"/>
+            <a:off x="8138160" y="2194560"/>
+            <a:ext cx="3291840" cy="3566160"/>
           </a:xfrm>
           <a:prstGeom prst="roundRect">
             <a:avLst>
-              <a:gd name="adj" fmla="val 30000"/>
+              <a:gd name="adj" fmla="val 8000"/>
             </a:avLst>
           </a:prstGeom>
           <a:solidFill>
-            <a:srgbClr val="CBD5E1"/>
+            <a:srgbClr val="1E1B4B"/>
           </a:solidFill>
           <a:ln>
             <a:noFill/>
@@ -10606,126 +10617,141 @@
       </p:sp>
       <p:sp>
         <p:nvSpPr>
-          <p:cNvPr id="22" name="TextBox 21"/>
-          <p:cNvSpPr txBox="1"/>
-          <p:nvPr/>
-        </p:nvSpPr>
-        <p:spPr>
-          <a:xfrm>
-            <a:off x="1005840" y="5522976"/>
-            <a:ext cx="1005840" cy="274320"/>
-          </a:xfrm>
-          <a:prstGeom prst="rect">
-            <a:avLst/>
-          </a:prstGeom>
-          <a:noFill/>
-        </p:spPr>
-        <p:txBody>
-          <a:bodyPr wrap="square" lIns="0" rIns="0" tIns="0" bIns="0" anchor="t">
-            <a:spAutoFit/>
-          </a:bodyPr>
-          <a:lstStyle/>
-          <a:p>
-            <a:pPr algn="ctr">
-              <a:lnSpc>
-                <a:spcPct val="115000"/>
-              </a:lnSpc>
-              <a:spcAft>
-                <a:spcPts val="600"/>
-              </a:spcAft>
-            </a:pPr>
-            <a:r>
-              <a:rPr sz="1100" b="1">
-                <a:solidFill>
-                  <a:srgbClr val="1E1B4B"/>
+          <p:cNvPr id="12" name="TextBox 11"/>
+          <p:cNvSpPr txBox="1"/>
+          <p:nvPr/>
+        </p:nvSpPr>
+        <p:spPr>
+          <a:xfrm>
+            <a:off x="8412480" y="2468880"/>
+            <a:ext cx="2743200" cy="365760"/>
+          </a:xfrm>
+          <a:prstGeom prst="rect">
+            <a:avLst/>
+          </a:prstGeom>
+          <a:noFill/>
+        </p:spPr>
+        <p:txBody>
+          <a:bodyPr wrap="square" lIns="0" rIns="0" tIns="0" bIns="0" anchor="t">
+            <a:spAutoFit/>
+          </a:bodyPr>
+          <a:lstStyle/>
+          <a:p>
+            <a:pPr algn="l">
+              <a:lnSpc>
+                <a:spcPct val="115000"/>
+              </a:lnSpc>
+              <a:spcAft>
+                <a:spcPts val="600"/>
+              </a:spcAft>
+            </a:pPr>
+            <a:r>
+              <a:rPr sz="1600" b="1">
+                <a:solidFill>
+                  <a:srgbClr val="FFFFFF"/>
+                </a:solidFill>
+                <a:latin typeface="Cambria"/>
+              </a:rPr>
+              <a:t>The caveat</a:t>
+            </a:r>
+          </a:p>
+        </p:txBody>
+      </p:sp>
+      <p:sp>
+        <p:nvSpPr>
+          <p:cNvPr id="13" name="TextBox 12"/>
+          <p:cNvSpPr txBox="1"/>
+          <p:nvPr/>
+        </p:nvSpPr>
+        <p:spPr>
+          <a:xfrm>
+            <a:off x="8412480" y="2926080"/>
+            <a:ext cx="2834640" cy="2560320"/>
+          </a:xfrm>
+          <a:prstGeom prst="rect">
+            <a:avLst/>
+          </a:prstGeom>
+          <a:noFill/>
+        </p:spPr>
+        <p:txBody>
+          <a:bodyPr wrap="square" lIns="0" rIns="0" tIns="0" bIns="0" anchor="t">
+            <a:spAutoFit/>
+          </a:bodyPr>
+          <a:lstStyle/>
+          <a:p>
+            <a:pPr algn="l">
+              <a:lnSpc>
+                <a:spcPct val="115000"/>
+              </a:lnSpc>
+              <a:spcAft>
+                <a:spcPts val="900"/>
+              </a:spcAft>
+            </a:pPr>
+            <a:r>
+              <a:rPr sz="1250" b="0">
+                <a:solidFill>
+                  <a:srgbClr val="C7D2FE"/>
                 </a:solidFill>
                 <a:latin typeface="Calibri"/>
               </a:rPr>
-              <a:t>Later</a:t>
-            </a:r>
-          </a:p>
-        </p:txBody>
-      </p:sp>
-      <p:sp>
-        <p:nvSpPr>
-          <p:cNvPr id="23" name="TextBox 22"/>
-          <p:cNvSpPr txBox="1"/>
-          <p:nvPr/>
-        </p:nvSpPr>
-        <p:spPr>
-          <a:xfrm>
-            <a:off x="2240280" y="5394960"/>
-            <a:ext cx="3657600" cy="365760"/>
-          </a:xfrm>
-          <a:prstGeom prst="rect">
-            <a:avLst/>
-          </a:prstGeom>
-          <a:noFill/>
-        </p:spPr>
-        <p:txBody>
-          <a:bodyPr wrap="square" lIns="0" rIns="0" tIns="0" bIns="0" anchor="t">
-            <a:spAutoFit/>
-          </a:bodyPr>
-          <a:lstStyle/>
-          <a:p>
-            <a:pPr algn="l">
-              <a:lnSpc>
-                <a:spcPct val="115000"/>
-              </a:lnSpc>
-              <a:spcAft>
-                <a:spcPts val="600"/>
-              </a:spcAft>
-            </a:pPr>
-            <a:r>
-              <a:rPr sz="1500" b="1">
-                <a:solidFill>
-                  <a:srgbClr val="0F172A"/>
-                </a:solidFill>
-                <a:latin typeface="Cambria"/>
-              </a:rPr>
-              <a:t>Content hooks</a:t>
-            </a:r>
-          </a:p>
-        </p:txBody>
-      </p:sp>
-      <p:sp>
-        <p:nvSpPr>
-          <p:cNvPr id="24" name="TextBox 23"/>
-          <p:cNvSpPr txBox="1"/>
-          <p:nvPr/>
-        </p:nvSpPr>
-        <p:spPr>
-          <a:xfrm>
-            <a:off x="2240280" y="5715000"/>
-            <a:ext cx="7315200" cy="274320"/>
-          </a:xfrm>
-          <a:prstGeom prst="rect">
-            <a:avLst/>
-          </a:prstGeom>
-          <a:noFill/>
-        </p:spPr>
-        <p:txBody>
-          <a:bodyPr wrap="square" lIns="0" rIns="0" tIns="0" bIns="0" anchor="t">
-            <a:spAutoFit/>
-          </a:bodyPr>
-          <a:lstStyle/>
-          <a:p>
-            <a:pPr algn="l">
-              <a:lnSpc>
-                <a:spcPct val="115000"/>
-              </a:lnSpc>
-              <a:spcAft>
-                <a:spcPts val="600"/>
+              <a:t>Each learner brings their own API key - Gemini's is free.</a:t>
+            </a:r>
+          </a:p>
+          <a:p>
+            <a:pPr algn="l">
+              <a:lnSpc>
+                <a:spcPct val="115000"/>
+              </a:lnSpc>
+              <a:spcAft>
+                <a:spcPts val="900"/>
               </a:spcAft>
             </a:pPr>
             <a:r>
               <a:rPr sz="1250" b="0">
                 <a:solidFill>
-                  <a:srgbClr val="475569"/>
+                  <a:srgbClr val="C7D2FE"/>
                 </a:solidFill>
                 <a:latin typeface="Calibri"/>
               </a:rPr>
-              <a:t>Plug in internal wikis and course catalogues</a:t>
+              <a:t>It is encrypted on their device and never ships in the app.</a:t>
+            </a:r>
+          </a:p>
+          <a:p>
+            <a:pPr algn="l">
+              <a:lnSpc>
+                <a:spcPct val="115000"/>
+              </a:lnSpc>
+              <a:spcAft>
+                <a:spcPts val="900"/>
+              </a:spcAft>
+            </a:pPr>
+            <a:r>
+              <a:rPr sz="1250" b="0">
+                <a:solidFill>
+                  <a:srgbClr val="C7D2FE"/>
+                </a:solidFill>
+                <a:latin typeface="Calibri"/>
+              </a:rPr>
+              <a:t>To let people learn without a key: a small serverless proxy.</a:t>
+            </a:r>
+          </a:p>
+          <a:p>
+            <a:pPr algn="l">
+              <a:lnSpc>
+                <a:spcPct val="115000"/>
+              </a:lnSpc>
+              <a:spcAft>
+                <a:spcPts val="900"/>
+              </a:spcAft>
+            </a:pPr>
+            <a:r>
+              <a:rPr sz="1250" b="0">
+                <a:solidFill>
+                  <a:srgbClr val="C7D2FE"/>
+                </a:solidFill>
+                <a:latin typeface="Calibri"/>
+              </a:rPr>
+              <a:t>That is a one-file change.</a:t>
             </a:r>
           </a:p>
         </p:txBody>
@@ -10763,6 +10789,1016 @@
             <a:avLst/>
           </a:prstGeom>
           <a:solidFill>
+            <a:srgbClr val="FFFFFF"/>
+          </a:solidFill>
+          <a:ln>
+            <a:noFill/>
+          </a:ln>
+          <a:effectLst/>
+        </p:spPr>
+        <p:style>
+          <a:lnRef idx="1">
+            <a:schemeClr val="accent1"/>
+          </a:lnRef>
+          <a:fillRef idx="3">
+            <a:schemeClr val="accent1"/>
+          </a:fillRef>
+          <a:effectRef idx="2">
+            <a:schemeClr val="accent1"/>
+          </a:effectRef>
+          <a:fontRef idx="minor">
+            <a:schemeClr val="lt1"/>
+          </a:fontRef>
+        </p:style>
+        <p:txBody>
+          <a:bodyPr rtlCol="0" anchor="ctr"/>
+          <a:lstStyle/>
+          <a:p>
+            <a:pPr algn="ctr"/>
+          </a:p>
+        </p:txBody>
+      </p:sp>
+      <p:sp>
+        <p:nvSpPr>
+          <p:cNvPr id="3" name="TextBox 2"/>
+          <p:cNvSpPr txBox="1"/>
+          <p:nvPr/>
+        </p:nvSpPr>
+        <p:spPr>
+          <a:xfrm>
+            <a:off x="731520" y="502920"/>
+            <a:ext cx="10789920" cy="822960"/>
+          </a:xfrm>
+          <a:prstGeom prst="rect">
+            <a:avLst/>
+          </a:prstGeom>
+          <a:noFill/>
+        </p:spPr>
+        <p:txBody>
+          <a:bodyPr wrap="square" lIns="0" rIns="0" tIns="0" bIns="0" anchor="t">
+            <a:spAutoFit/>
+          </a:bodyPr>
+          <a:lstStyle/>
+          <a:p>
+            <a:pPr algn="l">
+              <a:lnSpc>
+                <a:spcPct val="115000"/>
+              </a:lnSpc>
+              <a:spcAft>
+                <a:spcPts val="600"/>
+              </a:spcAft>
+            </a:pPr>
+            <a:r>
+              <a:rPr sz="3400" b="1">
+                <a:solidFill>
+                  <a:srgbClr val="0F172A"/>
+                </a:solidFill>
+                <a:latin typeface="Cambria"/>
+              </a:rPr>
+              <a:t>Where it goes next</a:t>
+            </a:r>
+          </a:p>
+        </p:txBody>
+      </p:sp>
+      <p:sp>
+        <p:nvSpPr>
+          <p:cNvPr id="4" name="TextBox 3"/>
+          <p:cNvSpPr txBox="1"/>
+          <p:nvPr/>
+        </p:nvSpPr>
+        <p:spPr>
+          <a:xfrm>
+            <a:off x="731520" y="1325880"/>
+            <a:ext cx="10789920" cy="457200"/>
+          </a:xfrm>
+          <a:prstGeom prst="rect">
+            <a:avLst/>
+          </a:prstGeom>
+          <a:noFill/>
+        </p:spPr>
+        <p:txBody>
+          <a:bodyPr wrap="square" lIns="0" rIns="0" tIns="0" bIns="0" anchor="t">
+            <a:spAutoFit/>
+          </a:bodyPr>
+          <a:lstStyle/>
+          <a:p>
+            <a:pPr algn="l">
+              <a:lnSpc>
+                <a:spcPct val="115000"/>
+              </a:lnSpc>
+              <a:spcAft>
+                <a:spcPts val="600"/>
+              </a:spcAft>
+            </a:pPr>
+            <a:r>
+              <a:rPr sz="1500" b="0">
+                <a:solidFill>
+                  <a:srgbClr val="475569"/>
+                </a:solidFill>
+                <a:latin typeface="Calibri"/>
+              </a:rPr>
+              <a:t>Each step is a known, scoped change</a:t>
+            </a:r>
+          </a:p>
+        </p:txBody>
+      </p:sp>
+      <p:sp>
+        <p:nvSpPr>
+          <p:cNvPr id="5" name="Rounded Rectangle 4"/>
+          <p:cNvSpPr/>
+          <p:nvPr/>
+        </p:nvSpPr>
+        <p:spPr>
+          <a:xfrm>
+            <a:off x="731520" y="2194560"/>
+            <a:ext cx="10698480" cy="868680"/>
+          </a:xfrm>
+          <a:prstGeom prst="roundRect">
+            <a:avLst>
+              <a:gd name="adj" fmla="val 8000"/>
+            </a:avLst>
+          </a:prstGeom>
+          <a:solidFill>
+            <a:srgbClr val="FFFFFF"/>
+          </a:solidFill>
+          <a:ln w="12700">
+            <a:solidFill>
+              <a:srgbClr val="E2E8F0"/>
+            </a:solidFill>
+          </a:ln>
+          <a:effectLst/>
+        </p:spPr>
+        <p:style>
+          <a:lnRef idx="1">
+            <a:schemeClr val="accent1"/>
+          </a:lnRef>
+          <a:fillRef idx="3">
+            <a:schemeClr val="accent1"/>
+          </a:fillRef>
+          <a:effectRef idx="2">
+            <a:schemeClr val="accent1"/>
+          </a:effectRef>
+          <a:fontRef idx="minor">
+            <a:schemeClr val="lt1"/>
+          </a:fontRef>
+        </p:style>
+        <p:txBody>
+          <a:bodyPr rtlCol="0" anchor="ctr"/>
+          <a:lstStyle/>
+          <a:p/>
+        </p:txBody>
+      </p:sp>
+      <p:sp>
+        <p:nvSpPr>
+          <p:cNvPr id="6" name="Rounded Rectangle 5"/>
+          <p:cNvSpPr/>
+          <p:nvPr/>
+        </p:nvSpPr>
+        <p:spPr>
+          <a:xfrm>
+            <a:off x="1005840" y="2423160"/>
+            <a:ext cx="1005840" cy="411480"/>
+          </a:xfrm>
+          <a:prstGeom prst="roundRect">
+            <a:avLst>
+              <a:gd name="adj" fmla="val 30000"/>
+            </a:avLst>
+          </a:prstGeom>
+          <a:solidFill>
+            <a:srgbClr val="4F46E5"/>
+          </a:solidFill>
+          <a:ln>
+            <a:noFill/>
+          </a:ln>
+          <a:effectLst/>
+        </p:spPr>
+        <p:style>
+          <a:lnRef idx="1">
+            <a:schemeClr val="accent1"/>
+          </a:lnRef>
+          <a:fillRef idx="3">
+            <a:schemeClr val="accent1"/>
+          </a:fillRef>
+          <a:effectRef idx="2">
+            <a:schemeClr val="accent1"/>
+          </a:effectRef>
+          <a:fontRef idx="minor">
+            <a:schemeClr val="lt1"/>
+          </a:fontRef>
+        </p:style>
+        <p:txBody>
+          <a:bodyPr rtlCol="0" anchor="ctr"/>
+          <a:lstStyle/>
+          <a:p/>
+        </p:txBody>
+      </p:sp>
+      <p:sp>
+        <p:nvSpPr>
+          <p:cNvPr id="7" name="TextBox 6"/>
+          <p:cNvSpPr txBox="1"/>
+          <p:nvPr/>
+        </p:nvSpPr>
+        <p:spPr>
+          <a:xfrm>
+            <a:off x="1005840" y="2505456"/>
+            <a:ext cx="1005840" cy="274320"/>
+          </a:xfrm>
+          <a:prstGeom prst="rect">
+            <a:avLst/>
+          </a:prstGeom>
+          <a:noFill/>
+        </p:spPr>
+        <p:txBody>
+          <a:bodyPr wrap="square" lIns="0" rIns="0" tIns="0" bIns="0" anchor="t">
+            <a:spAutoFit/>
+          </a:bodyPr>
+          <a:lstStyle/>
+          <a:p>
+            <a:pPr algn="ctr">
+              <a:lnSpc>
+                <a:spcPct val="115000"/>
+              </a:lnSpc>
+              <a:spcAft>
+                <a:spcPts val="600"/>
+              </a:spcAft>
+            </a:pPr>
+            <a:r>
+              <a:rPr sz="1100" b="1">
+                <a:solidFill>
+                  <a:srgbClr val="FFFFFF"/>
+                </a:solidFill>
+                <a:latin typeface="Calibri"/>
+              </a:rPr>
+              <a:t>Done</a:t>
+            </a:r>
+          </a:p>
+        </p:txBody>
+      </p:sp>
+      <p:sp>
+        <p:nvSpPr>
+          <p:cNvPr id="8" name="TextBox 7"/>
+          <p:cNvSpPr txBox="1"/>
+          <p:nvPr/>
+        </p:nvSpPr>
+        <p:spPr>
+          <a:xfrm>
+            <a:off x="2240280" y="2377440"/>
+            <a:ext cx="3657600" cy="365760"/>
+          </a:xfrm>
+          <a:prstGeom prst="rect">
+            <a:avLst/>
+          </a:prstGeom>
+          <a:noFill/>
+        </p:spPr>
+        <p:txBody>
+          <a:bodyPr wrap="square" lIns="0" rIns="0" tIns="0" bIns="0" anchor="t">
+            <a:spAutoFit/>
+          </a:bodyPr>
+          <a:lstStyle/>
+          <a:p>
+            <a:pPr algn="l">
+              <a:lnSpc>
+                <a:spcPct val="115000"/>
+              </a:lnSpc>
+              <a:spcAft>
+                <a:spcPts val="600"/>
+              </a:spcAft>
+            </a:pPr>
+            <a:r>
+              <a:rPr sz="1500" b="1">
+                <a:solidFill>
+                  <a:srgbClr val="0F172A"/>
+                </a:solidFill>
+                <a:latin typeface="Cambria"/>
+              </a:rPr>
+              <a:t>Installable app, encrypted keys</a:t>
+            </a:r>
+          </a:p>
+        </p:txBody>
+      </p:sp>
+      <p:sp>
+        <p:nvSpPr>
+          <p:cNvPr id="9" name="TextBox 8"/>
+          <p:cNvSpPr txBox="1"/>
+          <p:nvPr/>
+        </p:nvSpPr>
+        <p:spPr>
+          <a:xfrm>
+            <a:off x="2240280" y="2697480"/>
+            <a:ext cx="7315200" cy="274320"/>
+          </a:xfrm>
+          <a:prstGeom prst="rect">
+            <a:avLst/>
+          </a:prstGeom>
+          <a:noFill/>
+        </p:spPr>
+        <p:txBody>
+          <a:bodyPr wrap="square" lIns="0" rIns="0" tIns="0" bIns="0" anchor="t">
+            <a:spAutoFit/>
+          </a:bodyPr>
+          <a:lstStyle/>
+          <a:p>
+            <a:pPr algn="l">
+              <a:lnSpc>
+                <a:spcPct val="115000"/>
+              </a:lnSpc>
+              <a:spcAft>
+                <a:spcPts val="600"/>
+              </a:spcAft>
+            </a:pPr>
+            <a:r>
+              <a:rPr sz="1250" b="0">
+                <a:solidFill>
+                  <a:srgbClr val="475569"/>
+                </a:solidFill>
+                <a:latin typeface="Calibri"/>
+              </a:rPr>
+              <a:t>Offline use, backup and restore, Gemini by default</a:t>
+            </a:r>
+          </a:p>
+        </p:txBody>
+      </p:sp>
+      <p:sp>
+        <p:nvSpPr>
+          <p:cNvPr id="10" name="Rounded Rectangle 9"/>
+          <p:cNvSpPr/>
+          <p:nvPr/>
+        </p:nvSpPr>
+        <p:spPr>
+          <a:xfrm>
+            <a:off x="731520" y="3200400"/>
+            <a:ext cx="10698480" cy="868680"/>
+          </a:xfrm>
+          <a:prstGeom prst="roundRect">
+            <a:avLst>
+              <a:gd name="adj" fmla="val 8000"/>
+            </a:avLst>
+          </a:prstGeom>
+          <a:solidFill>
+            <a:srgbClr val="F8FAFC"/>
+          </a:solidFill>
+          <a:ln w="12700">
+            <a:solidFill>
+              <a:srgbClr val="E2E8F0"/>
+            </a:solidFill>
+          </a:ln>
+          <a:effectLst/>
+        </p:spPr>
+        <p:style>
+          <a:lnRef idx="1">
+            <a:schemeClr val="accent1"/>
+          </a:lnRef>
+          <a:fillRef idx="3">
+            <a:schemeClr val="accent1"/>
+          </a:fillRef>
+          <a:effectRef idx="2">
+            <a:schemeClr val="accent1"/>
+          </a:effectRef>
+          <a:fontRef idx="minor">
+            <a:schemeClr val="lt1"/>
+          </a:fontRef>
+        </p:style>
+        <p:txBody>
+          <a:bodyPr rtlCol="0" anchor="ctr"/>
+          <a:lstStyle/>
+          <a:p/>
+        </p:txBody>
+      </p:sp>
+      <p:sp>
+        <p:nvSpPr>
+          <p:cNvPr id="11" name="Rounded Rectangle 10"/>
+          <p:cNvSpPr/>
+          <p:nvPr/>
+        </p:nvSpPr>
+        <p:spPr>
+          <a:xfrm>
+            <a:off x="1005840" y="3429000"/>
+            <a:ext cx="1005840" cy="411480"/>
+          </a:xfrm>
+          <a:prstGeom prst="roundRect">
+            <a:avLst>
+              <a:gd name="adj" fmla="val 30000"/>
+            </a:avLst>
+          </a:prstGeom>
+          <a:solidFill>
+            <a:srgbClr val="CBD5E1"/>
+          </a:solidFill>
+          <a:ln>
+            <a:noFill/>
+          </a:ln>
+          <a:effectLst/>
+        </p:spPr>
+        <p:style>
+          <a:lnRef idx="1">
+            <a:schemeClr val="accent1"/>
+          </a:lnRef>
+          <a:fillRef idx="3">
+            <a:schemeClr val="accent1"/>
+          </a:fillRef>
+          <a:effectRef idx="2">
+            <a:schemeClr val="accent1"/>
+          </a:effectRef>
+          <a:fontRef idx="minor">
+            <a:schemeClr val="lt1"/>
+          </a:fontRef>
+        </p:style>
+        <p:txBody>
+          <a:bodyPr rtlCol="0" anchor="ctr"/>
+          <a:lstStyle/>
+          <a:p/>
+        </p:txBody>
+      </p:sp>
+      <p:sp>
+        <p:nvSpPr>
+          <p:cNvPr id="12" name="TextBox 11"/>
+          <p:cNvSpPr txBox="1"/>
+          <p:nvPr/>
+        </p:nvSpPr>
+        <p:spPr>
+          <a:xfrm>
+            <a:off x="1005840" y="3511296"/>
+            <a:ext cx="1005840" cy="274320"/>
+          </a:xfrm>
+          <a:prstGeom prst="rect">
+            <a:avLst/>
+          </a:prstGeom>
+          <a:noFill/>
+        </p:spPr>
+        <p:txBody>
+          <a:bodyPr wrap="square" lIns="0" rIns="0" tIns="0" bIns="0" anchor="t">
+            <a:spAutoFit/>
+          </a:bodyPr>
+          <a:lstStyle/>
+          <a:p>
+            <a:pPr algn="ctr">
+              <a:lnSpc>
+                <a:spcPct val="115000"/>
+              </a:lnSpc>
+              <a:spcAft>
+                <a:spcPts val="600"/>
+              </a:spcAft>
+            </a:pPr>
+            <a:r>
+              <a:rPr sz="1100" b="1">
+                <a:solidFill>
+                  <a:srgbClr val="1E1B4B"/>
+                </a:solidFill>
+                <a:latin typeface="Calibri"/>
+              </a:rPr>
+              <a:t>Next</a:t>
+            </a:r>
+          </a:p>
+        </p:txBody>
+      </p:sp>
+      <p:sp>
+        <p:nvSpPr>
+          <p:cNvPr id="13" name="TextBox 12"/>
+          <p:cNvSpPr txBox="1"/>
+          <p:nvPr/>
+        </p:nvSpPr>
+        <p:spPr>
+          <a:xfrm>
+            <a:off x="2240280" y="3383280"/>
+            <a:ext cx="3657600" cy="365760"/>
+          </a:xfrm>
+          <a:prstGeom prst="rect">
+            <a:avLst/>
+          </a:prstGeom>
+          <a:noFill/>
+        </p:spPr>
+        <p:txBody>
+          <a:bodyPr wrap="square" lIns="0" rIns="0" tIns="0" bIns="0" anchor="t">
+            <a:spAutoFit/>
+          </a:bodyPr>
+          <a:lstStyle/>
+          <a:p>
+            <a:pPr algn="l">
+              <a:lnSpc>
+                <a:spcPct val="115000"/>
+              </a:lnSpc>
+              <a:spcAft>
+                <a:spcPts val="600"/>
+              </a:spcAft>
+            </a:pPr>
+            <a:r>
+              <a:rPr sz="1500" b="1">
+                <a:solidFill>
+                  <a:srgbClr val="0F172A"/>
+                </a:solidFill>
+                <a:latin typeface="Cambria"/>
+              </a:rPr>
+              <a:t>Publish it</a:t>
+            </a:r>
+          </a:p>
+        </p:txBody>
+      </p:sp>
+      <p:sp>
+        <p:nvSpPr>
+          <p:cNvPr id="14" name="TextBox 13"/>
+          <p:cNvSpPr txBox="1"/>
+          <p:nvPr/>
+        </p:nvSpPr>
+        <p:spPr>
+          <a:xfrm>
+            <a:off x="2240280" y="3703320"/>
+            <a:ext cx="7315200" cy="274320"/>
+          </a:xfrm>
+          <a:prstGeom prst="rect">
+            <a:avLst/>
+          </a:prstGeom>
+          <a:noFill/>
+        </p:spPr>
+        <p:txBody>
+          <a:bodyPr wrap="square" lIns="0" rIns="0" tIns="0" bIns="0" anchor="t">
+            <a:spAutoFit/>
+          </a:bodyPr>
+          <a:lstStyle/>
+          <a:p>
+            <a:pPr algn="l">
+              <a:lnSpc>
+                <a:spcPct val="115000"/>
+              </a:lnSpc>
+              <a:spcAft>
+                <a:spcPts val="600"/>
+              </a:spcAft>
+            </a:pPr>
+            <a:r>
+              <a:rPr sz="1250" b="0">
+                <a:solidFill>
+                  <a:srgbClr val="475569"/>
+                </a:solidFill>
+                <a:latin typeface="Calibri"/>
+              </a:rPr>
+              <a:t>Host on Vercel; Android app via PWABuilder</a:t>
+            </a:r>
+          </a:p>
+        </p:txBody>
+      </p:sp>
+      <p:sp>
+        <p:nvSpPr>
+          <p:cNvPr id="15" name="Rounded Rectangle 14"/>
+          <p:cNvSpPr/>
+          <p:nvPr/>
+        </p:nvSpPr>
+        <p:spPr>
+          <a:xfrm>
+            <a:off x="731520" y="4206240"/>
+            <a:ext cx="10698480" cy="868680"/>
+          </a:xfrm>
+          <a:prstGeom prst="roundRect">
+            <a:avLst>
+              <a:gd name="adj" fmla="val 8000"/>
+            </a:avLst>
+          </a:prstGeom>
+          <a:solidFill>
+            <a:srgbClr val="FFFFFF"/>
+          </a:solidFill>
+          <a:ln w="12700">
+            <a:solidFill>
+              <a:srgbClr val="E2E8F0"/>
+            </a:solidFill>
+          </a:ln>
+          <a:effectLst/>
+        </p:spPr>
+        <p:style>
+          <a:lnRef idx="1">
+            <a:schemeClr val="accent1"/>
+          </a:lnRef>
+          <a:fillRef idx="3">
+            <a:schemeClr val="accent1"/>
+          </a:fillRef>
+          <a:effectRef idx="2">
+            <a:schemeClr val="accent1"/>
+          </a:effectRef>
+          <a:fontRef idx="minor">
+            <a:schemeClr val="lt1"/>
+          </a:fontRef>
+        </p:style>
+        <p:txBody>
+          <a:bodyPr rtlCol="0" anchor="ctr"/>
+          <a:lstStyle/>
+          <a:p/>
+        </p:txBody>
+      </p:sp>
+      <p:sp>
+        <p:nvSpPr>
+          <p:cNvPr id="16" name="Rounded Rectangle 15"/>
+          <p:cNvSpPr/>
+          <p:nvPr/>
+        </p:nvSpPr>
+        <p:spPr>
+          <a:xfrm>
+            <a:off x="1005840" y="4434840"/>
+            <a:ext cx="1005840" cy="411480"/>
+          </a:xfrm>
+          <a:prstGeom prst="roundRect">
+            <a:avLst>
+              <a:gd name="adj" fmla="val 30000"/>
+            </a:avLst>
+          </a:prstGeom>
+          <a:solidFill>
+            <a:srgbClr val="CBD5E1"/>
+          </a:solidFill>
+          <a:ln>
+            <a:noFill/>
+          </a:ln>
+          <a:effectLst/>
+        </p:spPr>
+        <p:style>
+          <a:lnRef idx="1">
+            <a:schemeClr val="accent1"/>
+          </a:lnRef>
+          <a:fillRef idx="3">
+            <a:schemeClr val="accent1"/>
+          </a:fillRef>
+          <a:effectRef idx="2">
+            <a:schemeClr val="accent1"/>
+          </a:effectRef>
+          <a:fontRef idx="minor">
+            <a:schemeClr val="lt1"/>
+          </a:fontRef>
+        </p:style>
+        <p:txBody>
+          <a:bodyPr rtlCol="0" anchor="ctr"/>
+          <a:lstStyle/>
+          <a:p/>
+        </p:txBody>
+      </p:sp>
+      <p:sp>
+        <p:nvSpPr>
+          <p:cNvPr id="17" name="TextBox 16"/>
+          <p:cNvSpPr txBox="1"/>
+          <p:nvPr/>
+        </p:nvSpPr>
+        <p:spPr>
+          <a:xfrm>
+            <a:off x="1005840" y="4517136"/>
+            <a:ext cx="1005840" cy="274320"/>
+          </a:xfrm>
+          <a:prstGeom prst="rect">
+            <a:avLst/>
+          </a:prstGeom>
+          <a:noFill/>
+        </p:spPr>
+        <p:txBody>
+          <a:bodyPr wrap="square" lIns="0" rIns="0" tIns="0" bIns="0" anchor="t">
+            <a:spAutoFit/>
+          </a:bodyPr>
+          <a:lstStyle/>
+          <a:p>
+            <a:pPr algn="ctr">
+              <a:lnSpc>
+                <a:spcPct val="115000"/>
+              </a:lnSpc>
+              <a:spcAft>
+                <a:spcPts val="600"/>
+              </a:spcAft>
+            </a:pPr>
+            <a:r>
+              <a:rPr sz="1100" b="1">
+                <a:solidFill>
+                  <a:srgbClr val="1E1B4B"/>
+                </a:solidFill>
+                <a:latin typeface="Calibri"/>
+              </a:rPr>
+              <a:t>Then</a:t>
+            </a:r>
+          </a:p>
+        </p:txBody>
+      </p:sp>
+      <p:sp>
+        <p:nvSpPr>
+          <p:cNvPr id="18" name="TextBox 17"/>
+          <p:cNvSpPr txBox="1"/>
+          <p:nvPr/>
+        </p:nvSpPr>
+        <p:spPr>
+          <a:xfrm>
+            <a:off x="2240280" y="4389120"/>
+            <a:ext cx="3657600" cy="365760"/>
+          </a:xfrm>
+          <a:prstGeom prst="rect">
+            <a:avLst/>
+          </a:prstGeom>
+          <a:noFill/>
+        </p:spPr>
+        <p:txBody>
+          <a:bodyPr wrap="square" lIns="0" rIns="0" tIns="0" bIns="0" anchor="t">
+            <a:spAutoFit/>
+          </a:bodyPr>
+          <a:lstStyle/>
+          <a:p>
+            <a:pPr algn="l">
+              <a:lnSpc>
+                <a:spcPct val="115000"/>
+              </a:lnSpc>
+              <a:spcAft>
+                <a:spcPts val="600"/>
+              </a:spcAft>
+            </a:pPr>
+            <a:r>
+              <a:rPr sz="1500" b="1">
+                <a:solidFill>
+                  <a:srgbClr val="0F172A"/>
+                </a:solidFill>
+                <a:latin typeface="Cambria"/>
+              </a:rPr>
+              <a:t>Serverless key proxy</a:t>
+            </a:r>
+          </a:p>
+        </p:txBody>
+      </p:sp>
+      <p:sp>
+        <p:nvSpPr>
+          <p:cNvPr id="19" name="TextBox 18"/>
+          <p:cNvSpPr txBox="1"/>
+          <p:nvPr/>
+        </p:nvSpPr>
+        <p:spPr>
+          <a:xfrm>
+            <a:off x="2240280" y="4709159"/>
+            <a:ext cx="7315200" cy="274320"/>
+          </a:xfrm>
+          <a:prstGeom prst="rect">
+            <a:avLst/>
+          </a:prstGeom>
+          <a:noFill/>
+        </p:spPr>
+        <p:txBody>
+          <a:bodyPr wrap="square" lIns="0" rIns="0" tIns="0" bIns="0" anchor="t">
+            <a:spAutoFit/>
+          </a:bodyPr>
+          <a:lstStyle/>
+          <a:p>
+            <a:pPr algn="l">
+              <a:lnSpc>
+                <a:spcPct val="115000"/>
+              </a:lnSpc>
+              <a:spcAft>
+                <a:spcPts val="600"/>
+              </a:spcAft>
+            </a:pPr>
+            <a:r>
+              <a:rPr sz="1250" b="0">
+                <a:solidFill>
+                  <a:srgbClr val="475569"/>
+                </a:solidFill>
+                <a:latin typeface="Calibri"/>
+              </a:rPr>
+              <a:t>Let people learn without their own key</a:t>
+            </a:r>
+          </a:p>
+        </p:txBody>
+      </p:sp>
+      <p:sp>
+        <p:nvSpPr>
+          <p:cNvPr id="20" name="Rounded Rectangle 19"/>
+          <p:cNvSpPr/>
+          <p:nvPr/>
+        </p:nvSpPr>
+        <p:spPr>
+          <a:xfrm>
+            <a:off x="731520" y="5212080"/>
+            <a:ext cx="10698480" cy="868680"/>
+          </a:xfrm>
+          <a:prstGeom prst="roundRect">
+            <a:avLst>
+              <a:gd name="adj" fmla="val 8000"/>
+            </a:avLst>
+          </a:prstGeom>
+          <a:solidFill>
+            <a:srgbClr val="F8FAFC"/>
+          </a:solidFill>
+          <a:ln w="12700">
+            <a:solidFill>
+              <a:srgbClr val="E2E8F0"/>
+            </a:solidFill>
+          </a:ln>
+          <a:effectLst/>
+        </p:spPr>
+        <p:style>
+          <a:lnRef idx="1">
+            <a:schemeClr val="accent1"/>
+          </a:lnRef>
+          <a:fillRef idx="3">
+            <a:schemeClr val="accent1"/>
+          </a:fillRef>
+          <a:effectRef idx="2">
+            <a:schemeClr val="accent1"/>
+          </a:effectRef>
+          <a:fontRef idx="minor">
+            <a:schemeClr val="lt1"/>
+          </a:fontRef>
+        </p:style>
+        <p:txBody>
+          <a:bodyPr rtlCol="0" anchor="ctr"/>
+          <a:lstStyle/>
+          <a:p/>
+        </p:txBody>
+      </p:sp>
+      <p:sp>
+        <p:nvSpPr>
+          <p:cNvPr id="21" name="Rounded Rectangle 20"/>
+          <p:cNvSpPr/>
+          <p:nvPr/>
+        </p:nvSpPr>
+        <p:spPr>
+          <a:xfrm>
+            <a:off x="1005840" y="5440680"/>
+            <a:ext cx="1005840" cy="411480"/>
+          </a:xfrm>
+          <a:prstGeom prst="roundRect">
+            <a:avLst>
+              <a:gd name="adj" fmla="val 30000"/>
+            </a:avLst>
+          </a:prstGeom>
+          <a:solidFill>
+            <a:srgbClr val="CBD5E1"/>
+          </a:solidFill>
+          <a:ln>
+            <a:noFill/>
+          </a:ln>
+          <a:effectLst/>
+        </p:spPr>
+        <p:style>
+          <a:lnRef idx="1">
+            <a:schemeClr val="accent1"/>
+          </a:lnRef>
+          <a:fillRef idx="3">
+            <a:schemeClr val="accent1"/>
+          </a:fillRef>
+          <a:effectRef idx="2">
+            <a:schemeClr val="accent1"/>
+          </a:effectRef>
+          <a:fontRef idx="minor">
+            <a:schemeClr val="lt1"/>
+          </a:fontRef>
+        </p:style>
+        <p:txBody>
+          <a:bodyPr rtlCol="0" anchor="ctr"/>
+          <a:lstStyle/>
+          <a:p/>
+        </p:txBody>
+      </p:sp>
+      <p:sp>
+        <p:nvSpPr>
+          <p:cNvPr id="22" name="TextBox 21"/>
+          <p:cNvSpPr txBox="1"/>
+          <p:nvPr/>
+        </p:nvSpPr>
+        <p:spPr>
+          <a:xfrm>
+            <a:off x="1005840" y="5522976"/>
+            <a:ext cx="1005840" cy="274320"/>
+          </a:xfrm>
+          <a:prstGeom prst="rect">
+            <a:avLst/>
+          </a:prstGeom>
+          <a:noFill/>
+        </p:spPr>
+        <p:txBody>
+          <a:bodyPr wrap="square" lIns="0" rIns="0" tIns="0" bIns="0" anchor="t">
+            <a:spAutoFit/>
+          </a:bodyPr>
+          <a:lstStyle/>
+          <a:p>
+            <a:pPr algn="ctr">
+              <a:lnSpc>
+                <a:spcPct val="115000"/>
+              </a:lnSpc>
+              <a:spcAft>
+                <a:spcPts val="600"/>
+              </a:spcAft>
+            </a:pPr>
+            <a:r>
+              <a:rPr sz="1100" b="1">
+                <a:solidFill>
+                  <a:srgbClr val="1E1B4B"/>
+                </a:solidFill>
+                <a:latin typeface="Calibri"/>
+              </a:rPr>
+              <a:t>Later</a:t>
+            </a:r>
+          </a:p>
+        </p:txBody>
+      </p:sp>
+      <p:sp>
+        <p:nvSpPr>
+          <p:cNvPr id="23" name="TextBox 22"/>
+          <p:cNvSpPr txBox="1"/>
+          <p:nvPr/>
+        </p:nvSpPr>
+        <p:spPr>
+          <a:xfrm>
+            <a:off x="2240280" y="5394960"/>
+            <a:ext cx="3657600" cy="365760"/>
+          </a:xfrm>
+          <a:prstGeom prst="rect">
+            <a:avLst/>
+          </a:prstGeom>
+          <a:noFill/>
+        </p:spPr>
+        <p:txBody>
+          <a:bodyPr wrap="square" lIns="0" rIns="0" tIns="0" bIns="0" anchor="t">
+            <a:spAutoFit/>
+          </a:bodyPr>
+          <a:lstStyle/>
+          <a:p>
+            <a:pPr algn="l">
+              <a:lnSpc>
+                <a:spcPct val="115000"/>
+              </a:lnSpc>
+              <a:spcAft>
+                <a:spcPts val="600"/>
+              </a:spcAft>
+            </a:pPr>
+            <a:r>
+              <a:rPr sz="1500" b="1">
+                <a:solidFill>
+                  <a:srgbClr val="0F172A"/>
+                </a:solidFill>
+                <a:latin typeface="Cambria"/>
+              </a:rPr>
+              <a:t>Accounts, sync and trainer view</a:t>
+            </a:r>
+          </a:p>
+        </p:txBody>
+      </p:sp>
+      <p:sp>
+        <p:nvSpPr>
+          <p:cNvPr id="24" name="TextBox 23"/>
+          <p:cNvSpPr txBox="1"/>
+          <p:nvPr/>
+        </p:nvSpPr>
+        <p:spPr>
+          <a:xfrm>
+            <a:off x="2240280" y="5715000"/>
+            <a:ext cx="7315200" cy="274320"/>
+          </a:xfrm>
+          <a:prstGeom prst="rect">
+            <a:avLst/>
+          </a:prstGeom>
+          <a:noFill/>
+        </p:spPr>
+        <p:txBody>
+          <a:bodyPr wrap="square" lIns="0" rIns="0" tIns="0" bIns="0" anchor="t">
+            <a:spAutoFit/>
+          </a:bodyPr>
+          <a:lstStyle/>
+          <a:p>
+            <a:pPr algn="l">
+              <a:lnSpc>
+                <a:spcPct val="115000"/>
+              </a:lnSpc>
+              <a:spcAft>
+                <a:spcPts val="600"/>
+              </a:spcAft>
+            </a:pPr>
+            <a:r>
+              <a:rPr sz="1250" b="0">
+                <a:solidFill>
+                  <a:srgbClr val="475569"/>
+                </a:solidFill>
+                <a:latin typeface="Calibri"/>
+              </a:rPr>
+              <a:t>Progress across devices; team skill profiles in one place</a:t>
+            </a:r>
+          </a:p>
+        </p:txBody>
+      </p:sp>
+    </p:spTree>
+  </p:cSld>
+  <p:clrMapOvr>
+    <a:masterClrMapping/>
+  </p:clrMapOvr>
+</p:sld>
+</file>
+
+<file path=ppt/slides/slide17.xml><?xml version="1.0" encoding="utf-8"?>
+<p:sld xmlns:a="http://schemas.openxmlformats.org/drawingml/2006/main" xmlns:p="http://schemas.openxmlformats.org/presentationml/2006/main" xmlns:r="http://schemas.openxmlformats.org/officeDocument/2006/relationships">
+  <p:cSld>
+    <p:spTree>
+      <p:nvGrpSpPr>
+        <p:cNvPr id="1" name=""/>
+        <p:cNvGrpSpPr/>
+        <p:nvPr/>
+      </p:nvGrpSpPr>
+      <p:grpSpPr/>
+      <p:sp>
+        <p:nvSpPr>
+          <p:cNvPr id="2" name="Rectangle 1"/>
+          <p:cNvSpPr/>
+          <p:nvPr/>
+        </p:nvSpPr>
+        <p:spPr>
+          <a:xfrm>
+            <a:off x="0" y="0"/>
+            <a:ext cx="12191695" cy="6858000"/>
+          </a:xfrm>
+          <a:prstGeom prst="rect">
+            <a:avLst/>
+          </a:prstGeom>
+          <a:solidFill>
             <a:srgbClr val="1E1B4B"/>
           </a:solidFill>
           <a:ln>
@@ -11127,7 +12163,7 @@
                 </a:solidFill>
                 <a:latin typeface="Calibri"/>
               </a:rPr>
-              <a:t>docs/USER_GUIDE.md  ·  docs/DEVELOPER_GUIDE.md</a:t>
+              <a:t>docs/USER_GUIDE.docx  ·  docs/DEVELOPER_GUIDE.docx</a:t>
             </a:r>
           </a:p>
         </p:txBody>
@@ -11256,6 +12292,48 @@
                 <a:latin typeface="Calibri"/>
               </a:rPr>
               <a:t>One entry adds an AI provider</a:t>
+            </a:r>
+          </a:p>
+        </p:txBody>
+      </p:sp>
+      <p:sp>
+        <p:nvSpPr>
+          <p:cNvPr id="14" name="Credit"/>
+          <p:cNvSpPr txBox="1"/>
+          <p:nvPr/>
+        </p:nvSpPr>
+        <p:spPr>
+          <a:xfrm>
+            <a:off x="731520" y="6172200"/>
+            <a:ext cx="10789920" cy="365760"/>
+          </a:xfrm>
+          <a:prstGeom prst="rect">
+            <a:avLst/>
+          </a:prstGeom>
+          <a:noFill/>
+        </p:spPr>
+        <p:txBody>
+          <a:bodyPr wrap="square" lIns="0" rIns="0" tIns="0" bIns="0" anchor="t">
+            <a:spAutoFit/>
+          </a:bodyPr>
+          <a:lstStyle/>
+          <a:p>
+            <a:pPr algn="l">
+              <a:lnSpc>
+                <a:spcPct val="115000"/>
+              </a:lnSpc>
+              <a:spcAft>
+                <a:spcPts val="600"/>
+              </a:spcAft>
+            </a:pPr>
+            <a:r>
+              <a:rPr sz="1150" b="0">
+                <a:solidFill>
+                  <a:srgbClr val="C7D2FE"/>
+                </a:solidFill>
+                <a:latin typeface="Calibri"/>
+              </a:rPr>
+              <a:t>Designed &amp; developed by Sohel Pathan  ·  © 2026 Sohel Pathan. All rights reserved.</a:t>
             </a:r>
           </a:p>
         </p:txBody>
@@ -18650,7 +19728,7 @@
                 </a:solidFill>
                 <a:latin typeface="Calibri"/>
               </a:rPr>
-              <a:t>The default provider, and the features the app is built around</a:t>
+              <a:t>The deepest integration, and the features the app is built around</a:t>
             </a:r>
           </a:p>
         </p:txBody>

--- a/docs/SkillPath-Presentation.pptx
+++ b/docs/SkillPath-Presentation.pptx
@@ -5133,7 +5133,7 @@
                 </a:solidFill>
                 <a:latin typeface="Calibri"/>
               </a:rPr>
-              <a:t>Designed &amp; developed by Sohel Pathan  ·  © 2026 Sohel Pathan. All rights reserved.</a:t>
+              <a:t>Designed &amp; developed by Harbinger  ·  © 2026 Harbinger. All rights reserved.</a:t>
             </a:r>
           </a:p>
         </p:txBody>
@@ -12333,7 +12333,7 @@
                 </a:solidFill>
                 <a:latin typeface="Calibri"/>
               </a:rPr>
-              <a:t>Designed &amp; developed by Sohel Pathan  ·  © 2026 Sohel Pathan. All rights reserved.</a:t>
+              <a:t>Designed &amp; developed by Harbinger  ·  © 2026 Harbinger. All rights reserved.</a:t>
             </a:r>
           </a:p>
         </p:txBody>

--- a/docs/SkillPath-Presentation.pptx
+++ b/docs/SkillPath-Presentation.pptx
@@ -17,6 +17,7 @@
     <p:sldId id="265" r:id="rId17"/>
     <p:sldId id="266" r:id="rId18"/>
     <p:sldId id="267" r:id="rId19"/>
+    <p:sldId id="272" r:id="rId24"/>
     <p:sldId id="268" r:id="rId20"/>
     <p:sldId id="269" r:id="rId21"/>
     <p:sldId id="270" r:id="rId22"/>
@@ -517,7 +518,7 @@
           <a:lstStyle/>
           <a:p>
             <a:r>
-              <a:t>Opening: SkillPath is an AI learning coach. Most training starts by guessing what you know. This starts by measuring it, then teaches only the gaps. It runs entirely in a browser tab, with no backend to host, and works with whichever AI provider you already pay for - or a free one.</a:t>
+              <a:t>Opening: SkillPath is an AI learning coach. Most training starts by guessing what you know. This starts by measuring it, then teaches only the gaps. There is no backend to host: it runs in the browser and installs on a phone or laptop like an app. It works with whichever AI provider you already pay for - or Google Gemini's free tier, which is the default.</a:t>
             </a:r>
           </a:p>
         </p:txBody>
@@ -587,7 +588,7 @@
           <a:lstStyle/>
           <a:p>
             <a:r>
-              <a:t>No lock-in was a deliberate design goal. A team can use its existing paid provider, or a learner can start free on Gemini or Groq. Adding a provider later is one catalog entry, not a refactor.</a:t>
+              <a:t>No lock-in was a deliberate design goal. Google Gemini is the default because a learner can get a free key in a minute, with no credit card. A team can still use its existing paid provider. Whatever key is used, it is encrypted on the learner's device and sent only to that provider. Adding a provider later is one catalog entry, not a refactor.</a:t>
             </a:r>
           </a:p>
         </p:txBody>
@@ -657,7 +658,7 @@
           <a:lstStyle/>
           <a:p>
             <a:r>
-              <a:t>This is the engineering that is invisible when it works. Without it, a free model returns almost-JSON and the screen breaks. With it, the same model produces a usable lesson. 54 automated checks cover exactly these paths.</a:t>
+              <a:t>This is the engineering that is invisible when it works. Without it, a free model returns almost-JSON and the screen breaks. With it, the same model produces a usable lesson.</a:t>
             </a:r>
           </a:p>
         </p:txBody>
@@ -727,7 +728,7 @@
           <a:lstStyle/>
           <a:p>
             <a:r>
-              <a:t>Deliberately boring architecture: a static site plus the provider's API. It deploys anywhere, costs nothing to host, and has two clearly marked seams for the next stage - storage and the key proxy.</a:t>
+              <a:t>Deliberately boring architecture: a static site, a service worker for offline use, and the provider's API. It deploys anywhere, costs nothing to host, and has two clearly marked seams for the next stage - storage, and an optional key proxy.</a:t>
             </a:r>
           </a:p>
         </p:txBody>
@@ -797,7 +798,7 @@
           <a:lstStyle/>
           <a:p>
             <a:r>
-              <a:t>Keep this slide short. The point is that it is small enough for one developer to own, strictly typed end to end, and the risky AI paths are covered by automated checks that run without spending a penny on tokens.</a:t>
+              <a:t>Keep this slide short. The point is that it is small enough for one developer to own, strictly typed end to end, and the key never sits in plain text anywhere - not in the code, not in the build, not in browser storage.</a:t>
             </a:r>
           </a:p>
         </p:txBody>
@@ -867,7 +868,7 @@
           <a:lstStyle/>
           <a:p>
             <a:r>
-              <a:t>Say the caveat before anyone asks - it builds trust. Today it is a personal tool. The fix is understood and scoped: one serverless function holding the key, and the app points at it instead of the provider.</a:t>
+              <a:t>Say the caveat before anyone asks - it builds trust. Every learner needs their own API key. Gemini's is free and takes a minute, and the app stores it encrypted. If we want people to use SkillPath with no key at all, the fix is understood and scoped: one serverless function holding our key, with a usage limit per person.</a:t>
             </a:r>
           </a:p>
         </p:txBody>
@@ -937,7 +938,7 @@
           <a:lstStyle/>
           <a:p>
             <a:r>
-              <a:t>Close the technical story with direction. The first item is what turns this from a personal tool into something the team can use, and it is small.</a:t>
+              <a:t>Close the technical story with direction. The installable, encrypted version is done. Publishing is next and small: static hosting on Vercel, and PWABuilder turns the same site into an Android package. The key proxy only matters if we want people to learn without a key of their own.</a:t>
             </a:r>
           </a:p>
         </p:txBody>
@@ -1032,6 +1033,76 @@
 </p:notes>
 </file>
 
+<file path=ppt/notesSlides/notesSlide17.xml><?xml version="1.0" encoding="utf-8"?>
+<p:notes xmlns:a="http://schemas.openxmlformats.org/drawingml/2006/main" xmlns:p="http://schemas.openxmlformats.org/presentationml/2006/main" xmlns:r="http://schemas.openxmlformats.org/officeDocument/2006/relationships">
+  <p:cSld>
+    <p:spTree>
+      <p:nvGrpSpPr>
+        <p:cNvPr id="1" name=""/>
+        <p:cNvGrpSpPr/>
+        <p:nvPr/>
+      </p:nvGrpSpPr>
+      <p:grpSpPr>
+        <a:xfrm>
+          <a:off x="0" y="0"/>
+          <a:ext cx="0" cy="0"/>
+          <a:chOff x="0" y="0"/>
+          <a:chExt cx="0" cy="0"/>
+        </a:xfrm>
+      </p:grpSpPr>
+      <p:sp>
+        <p:nvSpPr>
+          <p:cNvPr id="2" name="Slide Image Placeholder 1"/>
+          <p:cNvSpPr>
+            <a:spLocks noGrp="1"/>
+          </p:cNvSpPr>
+          <p:nvPr>
+            <p:ph type="sldImg" idx="2"/>
+          </p:nvPr>
+        </p:nvSpPr>
+        <p:spPr/>
+      </p:sp>
+      <p:sp>
+        <p:nvSpPr>
+          <p:cNvPr id="3" name="Notes Placeholder 2"/>
+          <p:cNvSpPr>
+            <a:spLocks noGrp="1"/>
+          </p:cNvSpPr>
+          <p:nvPr>
+            <p:ph type="body" idx="3" sz="quarter"/>
+          </p:nvPr>
+        </p:nvSpPr>
+        <p:spPr/>
+        <p:txBody>
+          <a:bodyPr/>
+          <a:lstStyle/>
+          <a:p>
+            <a:r>
+              <a:t>This is what turned a personal tool into something we can hand out. SkillPath is now a Progressive Web App: people install it from the browser, it opens offline, and it updates itself. Each learner uses their own key - Gemini's is free - and it is encrypted on their device with a key the app can use but never read out. Backups are a single file, so nothing is lost when someone changes phone.</a:t>
+            </a:r>
+          </a:p>
+        </p:txBody>
+      </p:sp>
+      <p:sp>
+        <p:nvSpPr>
+          <p:cNvPr id="4" name="Slide Number Placeholder 3"/>
+          <p:cNvSpPr>
+            <a:spLocks noGrp="1"/>
+          </p:cNvSpPr>
+          <p:nvPr>
+            <p:ph type="sldNum" idx="5" sz="quarter"/>
+          </p:nvPr>
+        </p:nvSpPr>
+        <p:spPr/>
+      </p:sp>
+    </p:spTree>
+  </p:cSld>
+  <p:clrMapOvr>
+    <a:masterClrMapping/>
+  </p:clrMapOvr>
+</p:notes>
+</file>
+
 <file path=ppt/notesSlides/notesSlide2.xml><?xml version="1.0" encoding="utf-8"?>
 <p:notes xmlns:a="http://schemas.openxmlformats.org/drawingml/2006/main" xmlns:p="http://schemas.openxmlformats.org/presentationml/2006/main" xmlns:r="http://schemas.openxmlformats.org/officeDocument/2006/relationships">
   <p:cSld>
@@ -1497,7 +1568,7 @@
           <a:lstStyle/>
           <a:p>
             <a:r>
-              <a:t>Claude is the default because of this list, especially structured outputs and caching. Every other provider is mapped onto the same ideas, and where a model cannot do one of them the app degrades gracefully instead of failing.</a:t>
+              <a:t>Gemini is now the default because it is free to start with. Claude is still the deepest integration: it has its own adapter built on the official SDK, and this list is why - especially structured outputs and caching. Every other provider is mapped onto the same ideas, and where a model cannot do one of them the app degrades gracefully instead of failing.</a:t>
             </a:r>
           </a:p>
         </p:txBody>
@@ -4619,59 +4690,6 @@
       </p:sp>
       <p:sp>
         <p:nvSpPr>
-          <p:cNvPr id="3" name="Oval 2"/>
-          <p:cNvSpPr/>
-          <p:nvPr/>
-        </p:nvSpPr>
-        <p:spPr>
-          <a:xfrm>
-            <a:off x="731520" y="822960"/>
-            <a:ext cx="822960" cy="822960"/>
-          </a:xfrm>
-          <a:prstGeom prst="ellipse">
-            <a:avLst/>
-          </a:prstGeom>
-          <a:solidFill>
-            <a:srgbClr val="4F46E5"/>
-          </a:solidFill>
-          <a:ln>
-            <a:noFill/>
-          </a:ln>
-          <a:effectLst/>
-        </p:spPr>
-        <p:style>
-          <a:lnRef idx="1">
-            <a:schemeClr val="accent1"/>
-          </a:lnRef>
-          <a:fillRef idx="3">
-            <a:schemeClr val="accent1"/>
-          </a:fillRef>
-          <a:effectRef idx="2">
-            <a:schemeClr val="accent1"/>
-          </a:effectRef>
-          <a:fontRef idx="minor">
-            <a:schemeClr val="lt1"/>
-          </a:fontRef>
-        </p:style>
-        <p:txBody>
-          <a:bodyPr rtlCol="0" anchor="ctr" lIns="0" rIns="0" tIns="0" bIns="0"/>
-          <a:lstStyle/>
-          <a:p>
-            <a:pPr algn="ctr"/>
-            <a:r>
-              <a:rPr sz="3000" b="1">
-                <a:solidFill>
-                  <a:srgbClr val="FFFFFF"/>
-                </a:solidFill>
-                <a:latin typeface="Calibri"/>
-              </a:rPr>
-              <a:t>S</a:t>
-            </a:r>
-          </a:p>
-        </p:txBody>
-      </p:sp>
-      <p:sp>
-        <p:nvSpPr>
           <p:cNvPr id="4" name="TextBox 3"/>
           <p:cNvSpPr txBox="1"/>
           <p:nvPr/>
@@ -5049,7 +5067,73 @@
                 </a:solidFill>
                 <a:latin typeface="Calibri"/>
               </a:rPr>
-              <a:t>Runs in a browser tab</a:t>
+              <a:t>Installs as an app</a:t>
+            </a:r>
+          </a:p>
+        </p:txBody>
+      </p:sp>
+      <p:pic>
+        <p:nvPicPr>
+          <p:cNvPr id="13" name="SkillPath logo" descr="pwa-512x512.png"/>
+          <p:cNvPicPr>
+            <a:picLocks noChangeAspect="1"/>
+          </p:cNvPicPr>
+          <p:nvPr/>
+        </p:nvPicPr>
+        <p:blipFill>
+          <a:blip r:embed="rId3"/>
+          <a:stretch>
+            <a:fillRect/>
+          </a:stretch>
+        </p:blipFill>
+        <p:spPr>
+          <a:xfrm>
+            <a:off x="731520" y="822960"/>
+            <a:ext cx="822960" cy="822960"/>
+          </a:xfrm>
+          <a:prstGeom prst="rect">
+            <a:avLst/>
+          </a:prstGeom>
+        </p:spPr>
+      </p:pic>
+      <p:sp>
+        <p:nvSpPr>
+          <p:cNvPr id="14" name="Credit"/>
+          <p:cNvSpPr txBox="1"/>
+          <p:nvPr/>
+        </p:nvSpPr>
+        <p:spPr>
+          <a:xfrm>
+            <a:off x="731520" y="5989320"/>
+            <a:ext cx="10058400" cy="457200"/>
+          </a:xfrm>
+          <a:prstGeom prst="rect">
+            <a:avLst/>
+          </a:prstGeom>
+          <a:noFill/>
+        </p:spPr>
+        <p:txBody>
+          <a:bodyPr wrap="square" lIns="0" rIns="0" tIns="0" bIns="0" anchor="t">
+            <a:spAutoFit/>
+          </a:bodyPr>
+          <a:lstStyle/>
+          <a:p>
+            <a:pPr algn="l">
+              <a:lnSpc>
+                <a:spcPct val="115000"/>
+              </a:lnSpc>
+              <a:spcAft>
+                <a:spcPts val="600"/>
+              </a:spcAft>
+            </a:pPr>
+            <a:r>
+              <a:rPr sz="1500" b="0">
+                <a:solidFill>
+                  <a:srgbClr val="C7D2FE"/>
+                </a:solidFill>
+                <a:latin typeface="Calibri"/>
+              </a:rPr>
+              <a:t>Designed &amp; developed by Harbinger  ·  © 2026 Harbinger. All rights reserved.</a:t>
             </a:r>
           </a:p>
         </p:txBody>
@@ -5195,7 +5279,7 @@
                 </a:solidFill>
                 <a:latin typeface="Calibri"/>
               </a:rPr>
-              <a:t>Pick one in the app, switch any time - keys stay in your browser</a:t>
+              <a:t>Pick one in the app, switch any time - your key stays encrypted on your device</a:t>
             </a:r>
           </a:p>
         </p:txBody>
@@ -5369,7 +5453,7 @@
                 </a:solidFill>
                 <a:latin typeface="Calibri"/>
               </a:rPr>
-              <a:t>Google Gemini</a:t>
+              <a:t>Google Gemini (default)</a:t>
             </a:r>
           </a:p>
           <a:p>
@@ -5657,7 +5741,7 @@
                 </a:solidFill>
                 <a:latin typeface="Calibri"/>
               </a:rPr>
-              <a:t>Anthropic Claude (default)</a:t>
+              <a:t>Anthropic Claude</a:t>
             </a:r>
           </a:p>
           <a:p>
@@ -7047,7 +7131,7 @@
                 </a:solidFill>
                 <a:latin typeface="Calibri"/>
               </a:rPr>
-              <a:t>No backend, no database, no account</a:t>
+              <a:t>No backend, no database, no account - and it installs as an app</a:t>
             </a:r>
           </a:p>
         </p:txBody>
@@ -7697,7 +7781,7 @@
                 </a:solidFill>
                 <a:latin typeface="Calibri"/>
               </a:rPr>
-              <a:t>Claude, Gemini, Groq, OpenAI, ...</a:t>
+              <a:t>Gemini (default), Claude, Groq, OpenAI, ...</a:t>
             </a:r>
           </a:p>
         </p:txBody>
@@ -7827,7 +7911,7 @@
                 </a:solidFill>
                 <a:latin typeface="Calibri"/>
               </a:rPr>
-              <a:t>Tracks, profiles, plans, chats and quiz history - in this browser</a:t>
+              <a:t>Tracks, profiles, plans, chats, quiz history and the encrypted API key - on this device</a:t>
             </a:r>
           </a:p>
         </p:txBody>
@@ -7888,7 +7972,7 @@
                 </a:solidFill>
                 <a:latin typeface="Calibri"/>
               </a:rPr>
-              <a:t>Putting a small serverless function in front of lib/ai is the only change needed to hide the API key.</a:t>
+              <a:t>A small serverless proxy in front of lib/ai would let people learn without their own key.</a:t>
             </a:r>
           </a:p>
         </p:txBody>
@@ -7926,7 +8010,7 @@
             <a:avLst/>
           </a:prstGeom>
           <a:solidFill>
-            <a:srgbClr val="FFFFFF"/>
+            <a:srgbClr val="1E1B4B"/>
           </a:solidFill>
           <a:ln>
             <a:noFill/>
@@ -7988,11 +8072,11 @@
             <a:r>
               <a:rPr sz="3400" b="1">
                 <a:solidFill>
-                  <a:srgbClr val="0F172A"/>
+                  <a:srgbClr val="FFFFFF"/>
                 </a:solidFill>
                 <a:latin typeface="Cambria"/>
               </a:rPr>
-              <a:t>Build and quality</a:t>
+              <a:t>Private, installable, offline</a:t>
             </a:r>
           </a:p>
         </p:txBody>
@@ -8030,11 +8114,11 @@
             <a:r>
               <a:rPr sz="1500" b="0">
                 <a:solidFill>
-                  <a:srgbClr val="475569"/>
+                  <a:srgbClr val="C7D2FE"/>
                 </a:solidFill>
                 <a:latin typeface="Calibri"/>
               </a:rPr>
-              <a:t>Small, typed, and checked</a:t>
+              <a:t>One codebase for the web, Android and iPhone - no app store needed</a:t>
             </a:r>
           </a:p>
         </p:txBody>
@@ -8047,8 +8131,8 @@
         </p:nvSpPr>
         <p:spPr>
           <a:xfrm>
-            <a:off x="731520" y="2194560"/>
-            <a:ext cx="2011680" cy="1371600"/>
+            <a:off x="731520" y="2286000"/>
+            <a:ext cx="3383280" cy="1600200"/>
           </a:xfrm>
           <a:prstGeom prst="roundRect">
             <a:avLst>
@@ -8056,7 +8140,7 @@
             </a:avLst>
           </a:prstGeom>
           <a:solidFill>
-            <a:srgbClr val="EEF2FF"/>
+            <a:srgbClr val="2E2A6B"/>
           </a:solidFill>
           <a:ln>
             <a:noFill/>
@@ -8091,36 +8175,36 @@
         </p:nvSpPr>
         <p:spPr>
           <a:xfrm>
-            <a:off x="731520" y="2377440"/>
-            <a:ext cx="2011680" cy="640080"/>
-          </a:xfrm>
-          <a:prstGeom prst="rect">
-            <a:avLst/>
-          </a:prstGeom>
-          <a:noFill/>
-        </p:spPr>
-        <p:txBody>
-          <a:bodyPr wrap="square" lIns="0" rIns="0" tIns="0" bIns="0" anchor="t">
-            <a:spAutoFit/>
-          </a:bodyPr>
-          <a:lstStyle/>
-          <a:p>
-            <a:pPr algn="ctr">
-              <a:lnSpc>
-                <a:spcPct val="115000"/>
-              </a:lnSpc>
-              <a:spcAft>
-                <a:spcPts val="600"/>
-              </a:spcAft>
-            </a:pPr>
-            <a:r>
-              <a:rPr sz="3000" b="1">
-                <a:solidFill>
-                  <a:srgbClr val="4F46E5"/>
+            <a:off x="1005840" y="2542032"/>
+            <a:ext cx="2834640" cy="365760"/>
+          </a:xfrm>
+          <a:prstGeom prst="rect">
+            <a:avLst/>
+          </a:prstGeom>
+          <a:noFill/>
+        </p:spPr>
+        <p:txBody>
+          <a:bodyPr wrap="square" lIns="0" rIns="0" tIns="0" bIns="0" anchor="t">
+            <a:spAutoFit/>
+          </a:bodyPr>
+          <a:lstStyle/>
+          <a:p>
+            <a:pPr algn="l">
+              <a:lnSpc>
+                <a:spcPct val="115000"/>
+              </a:lnSpc>
+              <a:spcAft>
+                <a:spcPts val="600"/>
+              </a:spcAft>
+            </a:pPr>
+            <a:r>
+              <a:rPr sz="1450" b="1">
+                <a:solidFill>
+                  <a:srgbClr val="FFFFFF"/>
                 </a:solidFill>
                 <a:latin typeface="Cambria"/>
               </a:rPr>
-              <a:t>~4,400</a:t>
+              <a:t>Installs like an app</a:t>
             </a:r>
           </a:p>
         </p:txBody>
@@ -8133,36 +8217,36 @@
         </p:nvSpPr>
         <p:spPr>
           <a:xfrm>
-            <a:off x="731520" y="3063240"/>
-            <a:ext cx="2011680" cy="365760"/>
-          </a:xfrm>
-          <a:prstGeom prst="rect">
-            <a:avLst/>
-          </a:prstGeom>
-          <a:noFill/>
-        </p:spPr>
-        <p:txBody>
-          <a:bodyPr wrap="square" lIns="0" rIns="0" tIns="0" bIns="0" anchor="t">
-            <a:spAutoFit/>
-          </a:bodyPr>
-          <a:lstStyle/>
-          <a:p>
-            <a:pPr algn="ctr">
-              <a:lnSpc>
-                <a:spcPct val="115000"/>
-              </a:lnSpc>
-              <a:spcAft>
-                <a:spcPts val="600"/>
-              </a:spcAft>
-            </a:pPr>
-            <a:r>
-              <a:rPr sz="1100" b="0">
-                <a:solidFill>
-                  <a:srgbClr val="1E1B4B"/>
+            <a:off x="1005840" y="2999232"/>
+            <a:ext cx="2834640" cy="777240"/>
+          </a:xfrm>
+          <a:prstGeom prst="rect">
+            <a:avLst/>
+          </a:prstGeom>
+          <a:noFill/>
+        </p:spPr>
+        <p:txBody>
+          <a:bodyPr wrap="square" lIns="0" rIns="0" tIns="0" bIns="0" anchor="t">
+            <a:spAutoFit/>
+          </a:bodyPr>
+          <a:lstStyle/>
+          <a:p>
+            <a:pPr algn="l">
+              <a:lnSpc>
+                <a:spcPct val="115000"/>
+              </a:lnSpc>
+              <a:spcAft>
+                <a:spcPts val="600"/>
+              </a:spcAft>
+            </a:pPr>
+            <a:r>
+              <a:rPr sz="1150" b="0">
+                <a:solidFill>
+                  <a:srgbClr val="C7D2FE"/>
                 </a:solidFill>
                 <a:latin typeface="Calibri"/>
               </a:rPr>
-              <a:t>lines of TypeScript</a:t>
+              <a:t>Install app in Chrome or Edge, Add to Home Screen on iPhone - own icon and window.</a:t>
             </a:r>
           </a:p>
         </p:txBody>
@@ -8175,8 +8259,8 @@
         </p:nvSpPr>
         <p:spPr>
           <a:xfrm>
-            <a:off x="2907791" y="2194560"/>
-            <a:ext cx="2011680" cy="1371600"/>
+            <a:off x="4434840" y="2286000"/>
+            <a:ext cx="3383280" cy="1600200"/>
           </a:xfrm>
           <a:prstGeom prst="roundRect">
             <a:avLst>
@@ -8184,7 +8268,7 @@
             </a:avLst>
           </a:prstGeom>
           <a:solidFill>
-            <a:srgbClr val="EEF2FF"/>
+            <a:srgbClr val="2E2A6B"/>
           </a:solidFill>
           <a:ln>
             <a:noFill/>
@@ -8219,36 +8303,36 @@
         </p:nvSpPr>
         <p:spPr>
           <a:xfrm>
-            <a:off x="2907791" y="2377440"/>
-            <a:ext cx="2011680" cy="640080"/>
-          </a:xfrm>
-          <a:prstGeom prst="rect">
-            <a:avLst/>
-          </a:prstGeom>
-          <a:noFill/>
-        </p:spPr>
-        <p:txBody>
-          <a:bodyPr wrap="square" lIns="0" rIns="0" tIns="0" bIns="0" anchor="t">
-            <a:spAutoFit/>
-          </a:bodyPr>
-          <a:lstStyle/>
-          <a:p>
-            <a:pPr algn="ctr">
-              <a:lnSpc>
-                <a:spcPct val="115000"/>
-              </a:lnSpc>
-              <a:spcAft>
-                <a:spcPts val="600"/>
-              </a:spcAft>
-            </a:pPr>
-            <a:r>
-              <a:rPr sz="3000" b="1">
-                <a:solidFill>
-                  <a:srgbClr val="4F46E5"/>
+            <a:off x="4709159" y="2542032"/>
+            <a:ext cx="2834640" cy="365760"/>
+          </a:xfrm>
+          <a:prstGeom prst="rect">
+            <a:avLst/>
+          </a:prstGeom>
+          <a:noFill/>
+        </p:spPr>
+        <p:txBody>
+          <a:bodyPr wrap="square" lIns="0" rIns="0" tIns="0" bIns="0" anchor="t">
+            <a:spAutoFit/>
+          </a:bodyPr>
+          <a:lstStyle/>
+          <a:p>
+            <a:pPr algn="l">
+              <a:lnSpc>
+                <a:spcPct val="115000"/>
+              </a:lnSpc>
+              <a:spcAft>
+                <a:spcPts val="600"/>
+              </a:spcAft>
+            </a:pPr>
+            <a:r>
+              <a:rPr sz="1450" b="1">
+                <a:solidFill>
+                  <a:srgbClr val="FFFFFF"/>
                 </a:solidFill>
                 <a:latin typeface="Cambria"/>
               </a:rPr>
-              <a:t>~40</a:t>
+              <a:t>Works offline</a:t>
             </a:r>
           </a:p>
         </p:txBody>
@@ -8261,36 +8345,36 @@
         </p:nvSpPr>
         <p:spPr>
           <a:xfrm>
-            <a:off x="2907791" y="3063240"/>
-            <a:ext cx="2011680" cy="365760"/>
-          </a:xfrm>
-          <a:prstGeom prst="rect">
-            <a:avLst/>
-          </a:prstGeom>
-          <a:noFill/>
-        </p:spPr>
-        <p:txBody>
-          <a:bodyPr wrap="square" lIns="0" rIns="0" tIns="0" bIns="0" anchor="t">
-            <a:spAutoFit/>
-          </a:bodyPr>
-          <a:lstStyle/>
-          <a:p>
-            <a:pPr algn="ctr">
-              <a:lnSpc>
-                <a:spcPct val="115000"/>
-              </a:lnSpc>
-              <a:spcAft>
-                <a:spcPts val="600"/>
-              </a:spcAft>
-            </a:pPr>
-            <a:r>
-              <a:rPr sz="1100" b="0">
-                <a:solidFill>
-                  <a:srgbClr val="1E1B4B"/>
+            <a:off x="4709159" y="2999232"/>
+            <a:ext cx="2834640" cy="777240"/>
+          </a:xfrm>
+          <a:prstGeom prst="rect">
+            <a:avLst/>
+          </a:prstGeom>
+          <a:noFill/>
+        </p:spPr>
+        <p:txBody>
+          <a:bodyPr wrap="square" lIns="0" rIns="0" tIns="0" bIns="0" anchor="t">
+            <a:spAutoFit/>
+          </a:bodyPr>
+          <a:lstStyle/>
+          <a:p>
+            <a:pPr algn="l">
+              <a:lnSpc>
+                <a:spcPct val="115000"/>
+              </a:lnSpc>
+              <a:spcAft>
+                <a:spcPts val="600"/>
+              </a:spcAft>
+            </a:pPr>
+            <a:r>
+              <a:rPr sz="1150" b="0">
+                <a:solidFill>
+                  <a:srgbClr val="C7D2FE"/>
                 </a:solidFill>
                 <a:latin typeface="Calibri"/>
               </a:rPr>
-              <a:t>source files</a:t>
+              <a:t>A service worker caches the app, so saved tracks open with no connection.</a:t>
             </a:r>
           </a:p>
         </p:txBody>
@@ -8303,8 +8387,8 @@
         </p:nvSpPr>
         <p:spPr>
           <a:xfrm>
-            <a:off x="5084064" y="2194560"/>
-            <a:ext cx="2011680" cy="1371600"/>
+            <a:off x="8138160" y="2286000"/>
+            <a:ext cx="3383280" cy="1600200"/>
           </a:xfrm>
           <a:prstGeom prst="roundRect">
             <a:avLst>
@@ -8312,7 +8396,7 @@
             </a:avLst>
           </a:prstGeom>
           <a:solidFill>
-            <a:srgbClr val="EEF2FF"/>
+            <a:srgbClr val="2E2A6B"/>
           </a:solidFill>
           <a:ln>
             <a:noFill/>
@@ -8347,36 +8431,36 @@
         </p:nvSpPr>
         <p:spPr>
           <a:xfrm>
-            <a:off x="5084064" y="2377440"/>
-            <a:ext cx="2011680" cy="640080"/>
-          </a:xfrm>
-          <a:prstGeom prst="rect">
-            <a:avLst/>
-          </a:prstGeom>
-          <a:noFill/>
-        </p:spPr>
-        <p:txBody>
-          <a:bodyPr wrap="square" lIns="0" rIns="0" tIns="0" bIns="0" anchor="t">
-            <a:spAutoFit/>
-          </a:bodyPr>
-          <a:lstStyle/>
-          <a:p>
-            <a:pPr algn="ctr">
-              <a:lnSpc>
-                <a:spcPct val="115000"/>
-              </a:lnSpc>
-              <a:spcAft>
-                <a:spcPts val="600"/>
-              </a:spcAft>
-            </a:pPr>
-            <a:r>
-              <a:rPr sz="3000" b="1">
-                <a:solidFill>
-                  <a:srgbClr val="4F46E5"/>
+            <a:off x="8412480" y="2542032"/>
+            <a:ext cx="2834640" cy="365760"/>
+          </a:xfrm>
+          <a:prstGeom prst="rect">
+            <a:avLst/>
+          </a:prstGeom>
+          <a:noFill/>
+        </p:spPr>
+        <p:txBody>
+          <a:bodyPr wrap="square" lIns="0" rIns="0" tIns="0" bIns="0" anchor="t">
+            <a:spAutoFit/>
+          </a:bodyPr>
+          <a:lstStyle/>
+          <a:p>
+            <a:pPr algn="l">
+              <a:lnSpc>
+                <a:spcPct val="115000"/>
+              </a:lnSpc>
+              <a:spcAft>
+                <a:spcPts val="600"/>
+              </a:spcAft>
+            </a:pPr>
+            <a:r>
+              <a:rPr sz="1450" b="1">
+                <a:solidFill>
+                  <a:srgbClr val="FFFFFF"/>
                 </a:solidFill>
                 <a:latin typeface="Cambria"/>
               </a:rPr>
-              <a:t>12</a:t>
+              <a:t>Your key, encrypted</a:t>
             </a:r>
           </a:p>
         </p:txBody>
@@ -8389,36 +8473,36 @@
         </p:nvSpPr>
         <p:spPr>
           <a:xfrm>
-            <a:off x="5084064" y="3063240"/>
-            <a:ext cx="2011680" cy="365760"/>
-          </a:xfrm>
-          <a:prstGeom prst="rect">
-            <a:avLst/>
-          </a:prstGeom>
-          <a:noFill/>
-        </p:spPr>
-        <p:txBody>
-          <a:bodyPr wrap="square" lIns="0" rIns="0" tIns="0" bIns="0" anchor="t">
-            <a:spAutoFit/>
-          </a:bodyPr>
-          <a:lstStyle/>
-          <a:p>
-            <a:pPr algn="ctr">
-              <a:lnSpc>
-                <a:spcPct val="115000"/>
-              </a:lnSpc>
-              <a:spcAft>
-                <a:spcPts val="600"/>
-              </a:spcAft>
-            </a:pPr>
-            <a:r>
-              <a:rPr sz="1100" b="0">
-                <a:solidFill>
-                  <a:srgbClr val="1E1B4B"/>
+            <a:off x="8412480" y="2999232"/>
+            <a:ext cx="2834640" cy="777240"/>
+          </a:xfrm>
+          <a:prstGeom prst="rect">
+            <a:avLst/>
+          </a:prstGeom>
+          <a:noFill/>
+        </p:spPr>
+        <p:txBody>
+          <a:bodyPr wrap="square" lIns="0" rIns="0" tIns="0" bIns="0" anchor="t">
+            <a:spAutoFit/>
+          </a:bodyPr>
+          <a:lstStyle/>
+          <a:p>
+            <a:pPr algn="l">
+              <a:lnSpc>
+                <a:spcPct val="115000"/>
+              </a:lnSpc>
+              <a:spcAft>
+                <a:spcPts val="600"/>
+              </a:spcAft>
+            </a:pPr>
+            <a:r>
+              <a:rPr sz="1150" b="0">
+                <a:solidFill>
+                  <a:srgbClr val="C7D2FE"/>
                 </a:solidFill>
                 <a:latin typeface="Calibri"/>
               </a:rPr>
-              <a:t>AI providers</a:t>
+              <a:t>AES-GCM with a non-extractable device key; decrypted only in memory.</a:t>
             </a:r>
           </a:p>
         </p:txBody>
@@ -8431,8 +8515,8 @@
         </p:nvSpPr>
         <p:spPr>
           <a:xfrm>
-            <a:off x="7260336" y="2194560"/>
-            <a:ext cx="2011680" cy="1371600"/>
+            <a:off x="731520" y="4160520"/>
+            <a:ext cx="3383280" cy="1600200"/>
           </a:xfrm>
           <a:prstGeom prst="roundRect">
             <a:avLst>
@@ -8440,7 +8524,7 @@
             </a:avLst>
           </a:prstGeom>
           <a:solidFill>
-            <a:srgbClr val="EEF2FF"/>
+            <a:srgbClr val="2E2A6B"/>
           </a:solidFill>
           <a:ln>
             <a:noFill/>
@@ -8475,36 +8559,36 @@
         </p:nvSpPr>
         <p:spPr>
           <a:xfrm>
-            <a:off x="7260336" y="2377440"/>
-            <a:ext cx="2011680" cy="640080"/>
-          </a:xfrm>
-          <a:prstGeom prst="rect">
-            <a:avLst/>
-          </a:prstGeom>
-          <a:noFill/>
-        </p:spPr>
-        <p:txBody>
-          <a:bodyPr wrap="square" lIns="0" rIns="0" tIns="0" bIns="0" anchor="t">
-            <a:spAutoFit/>
-          </a:bodyPr>
-          <a:lstStyle/>
-          <a:p>
-            <a:pPr algn="ctr">
-              <a:lnSpc>
-                <a:spcPct val="115000"/>
-              </a:lnSpc>
-              <a:spcAft>
-                <a:spcPts val="600"/>
-              </a:spcAft>
-            </a:pPr>
-            <a:r>
-              <a:rPr sz="3000" b="1">
-                <a:solidFill>
-                  <a:srgbClr val="4F46E5"/>
+            <a:off x="1005840" y="4416552"/>
+            <a:ext cx="2834640" cy="365760"/>
+          </a:xfrm>
+          <a:prstGeom prst="rect">
+            <a:avLst/>
+          </a:prstGeom>
+          <a:noFill/>
+        </p:spPr>
+        <p:txBody>
+          <a:bodyPr wrap="square" lIns="0" rIns="0" tIns="0" bIns="0" anchor="t">
+            <a:spAutoFit/>
+          </a:bodyPr>
+          <a:lstStyle/>
+          <a:p>
+            <a:pPr algn="l">
+              <a:lnSpc>
+                <a:spcPct val="115000"/>
+              </a:lnSpc>
+              <a:spcAft>
+                <a:spcPts val="600"/>
+              </a:spcAft>
+            </a:pPr>
+            <a:r>
+              <a:rPr sz="1450" b="1">
+                <a:solidFill>
+                  <a:srgbClr val="FFFFFF"/>
                 </a:solidFill>
                 <a:latin typeface="Cambria"/>
               </a:rPr>
-              <a:t>54</a:t>
+              <a:t>No keys in the build</a:t>
             </a:r>
           </a:p>
         </p:txBody>
@@ -8517,36 +8601,36 @@
         </p:nvSpPr>
         <p:spPr>
           <a:xfrm>
-            <a:off x="7260336" y="3063240"/>
-            <a:ext cx="2011680" cy="365760"/>
-          </a:xfrm>
-          <a:prstGeom prst="rect">
-            <a:avLst/>
-          </a:prstGeom>
-          <a:noFill/>
-        </p:spPr>
-        <p:txBody>
-          <a:bodyPr wrap="square" lIns="0" rIns="0" tIns="0" bIns="0" anchor="t">
-            <a:spAutoFit/>
-          </a:bodyPr>
-          <a:lstStyle/>
-          <a:p>
-            <a:pPr algn="ctr">
-              <a:lnSpc>
-                <a:spcPct val="115000"/>
-              </a:lnSpc>
-              <a:spcAft>
-                <a:spcPts val="600"/>
-              </a:spcAft>
-            </a:pPr>
-            <a:r>
-              <a:rPr sz="1100" b="0">
-                <a:solidFill>
-                  <a:srgbClr val="1E1B4B"/>
+            <a:off x="1005840" y="4873752"/>
+            <a:ext cx="2834640" cy="777240"/>
+          </a:xfrm>
+          <a:prstGeom prst="rect">
+            <a:avLst/>
+          </a:prstGeom>
+          <a:noFill/>
+        </p:spPr>
+        <p:txBody>
+          <a:bodyPr wrap="square" lIns="0" rIns="0" tIns="0" bIns="0" anchor="t">
+            <a:spAutoFit/>
+          </a:bodyPr>
+          <a:lstStyle/>
+          <a:p>
+            <a:pPr algn="l">
+              <a:lnSpc>
+                <a:spcPct val="115000"/>
+              </a:lnSpc>
+              <a:spcAft>
+                <a:spcPts val="600"/>
+              </a:spcAft>
+            </a:pPr>
+            <a:r>
+              <a:rPr sz="1150" b="0">
+                <a:solidFill>
+                  <a:srgbClr val="C7D2FE"/>
                 </a:solidFill>
                 <a:latin typeface="Calibri"/>
               </a:rPr>
-              <a:t>automated checks passing</a:t>
+              <a:t>.env keys are for local development only - a deployed app never contains one.</a:t>
             </a:r>
           </a:p>
         </p:txBody>
@@ -8559,8 +8643,8 @@
         </p:nvSpPr>
         <p:spPr>
           <a:xfrm>
-            <a:off x="9436608" y="2194560"/>
-            <a:ext cx="2011680" cy="1371600"/>
+            <a:off x="4434840" y="4160520"/>
+            <a:ext cx="3383280" cy="1600200"/>
           </a:xfrm>
           <a:prstGeom prst="roundRect">
             <a:avLst>
@@ -8568,7 +8652,7 @@
             </a:avLst>
           </a:prstGeom>
           <a:solidFill>
-            <a:srgbClr val="EEF2FF"/>
+            <a:srgbClr val="2E2A6B"/>
           </a:solidFill>
           <a:ln>
             <a:noFill/>
@@ -8603,36 +8687,36 @@
         </p:nvSpPr>
         <p:spPr>
           <a:xfrm>
-            <a:off x="9436608" y="2377440"/>
-            <a:ext cx="2011680" cy="640080"/>
-          </a:xfrm>
-          <a:prstGeom prst="rect">
-            <a:avLst/>
-          </a:prstGeom>
-          <a:noFill/>
-        </p:spPr>
-        <p:txBody>
-          <a:bodyPr wrap="square" lIns="0" rIns="0" tIns="0" bIns="0" anchor="t">
-            <a:spAutoFit/>
-          </a:bodyPr>
-          <a:lstStyle/>
-          <a:p>
-            <a:pPr algn="ctr">
-              <a:lnSpc>
-                <a:spcPct val="115000"/>
-              </a:lnSpc>
-              <a:spcAft>
-                <a:spcPts val="600"/>
-              </a:spcAft>
-            </a:pPr>
-            <a:r>
-              <a:rPr sz="3000" b="1">
-                <a:solidFill>
-                  <a:srgbClr val="4F46E5"/>
+            <a:off x="4709159" y="4416552"/>
+            <a:ext cx="2834640" cy="365760"/>
+          </a:xfrm>
+          <a:prstGeom prst="rect">
+            <a:avLst/>
+          </a:prstGeom>
+          <a:noFill/>
+        </p:spPr>
+        <p:txBody>
+          <a:bodyPr wrap="square" lIns="0" rIns="0" tIns="0" bIns="0" anchor="t">
+            <a:spAutoFit/>
+          </a:bodyPr>
+          <a:lstStyle/>
+          <a:p>
+            <a:pPr algn="l">
+              <a:lnSpc>
+                <a:spcPct val="115000"/>
+              </a:lnSpc>
+              <a:spcAft>
+                <a:spcPts val="600"/>
+              </a:spcAft>
+            </a:pPr>
+            <a:r>
+              <a:rPr sz="1450" b="1">
+                <a:solidFill>
+                  <a:srgbClr val="FFFFFF"/>
                 </a:solidFill>
                 <a:latin typeface="Cambria"/>
               </a:rPr>
-              <a:t>0</a:t>
+              <a:t>Back up and restore</a:t>
             </a:r>
           </a:p>
         </p:txBody>
@@ -8645,36 +8729,36 @@
         </p:nvSpPr>
         <p:spPr>
           <a:xfrm>
-            <a:off x="9436608" y="3063240"/>
-            <a:ext cx="2011680" cy="365760"/>
-          </a:xfrm>
-          <a:prstGeom prst="rect">
-            <a:avLst/>
-          </a:prstGeom>
-          <a:noFill/>
-        </p:spPr>
-        <p:txBody>
-          <a:bodyPr wrap="square" lIns="0" rIns="0" tIns="0" bIns="0" anchor="t">
-            <a:spAutoFit/>
-          </a:bodyPr>
-          <a:lstStyle/>
-          <a:p>
-            <a:pPr algn="ctr">
-              <a:lnSpc>
-                <a:spcPct val="115000"/>
-              </a:lnSpc>
-              <a:spcAft>
-                <a:spcPts val="600"/>
-              </a:spcAft>
-            </a:pPr>
-            <a:r>
-              <a:rPr sz="1100" b="0">
-                <a:solidFill>
-                  <a:srgbClr val="1E1B4B"/>
+            <a:off x="4709159" y="4873752"/>
+            <a:ext cx="2834640" cy="777240"/>
+          </a:xfrm>
+          <a:prstGeom prst="rect">
+            <a:avLst/>
+          </a:prstGeom>
+          <a:noFill/>
+        </p:spPr>
+        <p:txBody>
+          <a:bodyPr wrap="square" lIns="0" rIns="0" tIns="0" bIns="0" anchor="t">
+            <a:spAutoFit/>
+          </a:bodyPr>
+          <a:lstStyle/>
+          <a:p>
+            <a:pPr algn="l">
+              <a:lnSpc>
+                <a:spcPct val="115000"/>
+              </a:lnSpc>
+              <a:spcAft>
+                <a:spcPts val="600"/>
+              </a:spcAft>
+            </a:pPr>
+            <a:r>
+              <a:rPr sz="1150" b="0">
+                <a:solidFill>
+                  <a:srgbClr val="C7D2FE"/>
                 </a:solidFill>
                 <a:latin typeface="Calibri"/>
               </a:rPr>
-              <a:t>backend services</a:t>
+              <a:t>Every track in one JSON file, checked on restore. API keys are never included.</a:t>
             </a:r>
           </a:p>
         </p:txBody>
@@ -8687,8 +8771,8 @@
         </p:nvSpPr>
         <p:spPr>
           <a:xfrm>
-            <a:off x="731520" y="3840480"/>
-            <a:ext cx="5257800" cy="2103120"/>
+            <a:off x="8138160" y="4160520"/>
+            <a:ext cx="3383280" cy="1600200"/>
           </a:xfrm>
           <a:prstGeom prst="roundRect">
             <a:avLst>
@@ -8696,12 +8780,10 @@
             </a:avLst>
           </a:prstGeom>
           <a:solidFill>
-            <a:srgbClr val="FFFFFF"/>
+            <a:srgbClr val="2E2A6B"/>
           </a:solidFill>
-          <a:ln w="12700">
-            <a:solidFill>
-              <a:srgbClr val="E2E8F0"/>
-            </a:solidFill>
+          <a:ln>
+            <a:noFill/>
           </a:ln>
           <a:effectLst/>
         </p:spPr>
@@ -8733,36 +8815,36 @@
         </p:nvSpPr>
         <p:spPr>
           <a:xfrm>
-            <a:off x="1051560" y="4114800"/>
-            <a:ext cx="4572000" cy="365760"/>
-          </a:xfrm>
-          <a:prstGeom prst="rect">
-            <a:avLst/>
-          </a:prstGeom>
-          <a:noFill/>
-        </p:spPr>
-        <p:txBody>
-          <a:bodyPr wrap="square" lIns="0" rIns="0" tIns="0" bIns="0" anchor="t">
-            <a:spAutoFit/>
-          </a:bodyPr>
-          <a:lstStyle/>
-          <a:p>
-            <a:pPr algn="l">
-              <a:lnSpc>
-                <a:spcPct val="115000"/>
-              </a:lnSpc>
-              <a:spcAft>
-                <a:spcPts val="600"/>
-              </a:spcAft>
-            </a:pPr>
-            <a:r>
-              <a:rPr sz="1600" b="1">
-                <a:solidFill>
-                  <a:srgbClr val="0F172A"/>
+            <a:off x="8412480" y="4416552"/>
+            <a:ext cx="2834640" cy="365760"/>
+          </a:xfrm>
+          <a:prstGeom prst="rect">
+            <a:avLst/>
+          </a:prstGeom>
+          <a:noFill/>
+        </p:spPr>
+        <p:txBody>
+          <a:bodyPr wrap="square" lIns="0" rIns="0" tIns="0" bIns="0" anchor="t">
+            <a:spAutoFit/>
+          </a:bodyPr>
+          <a:lstStyle/>
+          <a:p>
+            <a:pPr algn="l">
+              <a:lnSpc>
+                <a:spcPct val="115000"/>
+              </a:lnSpc>
+              <a:spcAft>
+                <a:spcPts val="600"/>
+              </a:spcAft>
+            </a:pPr>
+            <a:r>
+              <a:rPr sz="1450" b="1">
+                <a:solidFill>
+                  <a:srgbClr val="FFFFFF"/>
                 </a:solidFill>
                 <a:latin typeface="Cambria"/>
               </a:rPr>
-              <a:t>Stack</a:t>
+              <a:t>Updates itself</a:t>
             </a:r>
           </a:p>
         </p:txBody>
@@ -8775,242 +8857,36 @@
         </p:nvSpPr>
         <p:spPr>
           <a:xfrm>
-            <a:off x="1051560" y="4572000"/>
-            <a:ext cx="4663440" cy="1280160"/>
-          </a:xfrm>
-          <a:prstGeom prst="rect">
-            <a:avLst/>
-          </a:prstGeom>
-          <a:noFill/>
-        </p:spPr>
-        <p:txBody>
-          <a:bodyPr wrap="square" lIns="0" rIns="0" tIns="0" bIns="0" anchor="t">
-            <a:spAutoFit/>
-          </a:bodyPr>
-          <a:lstStyle/>
-          <a:p>
-            <a:pPr algn="l">
-              <a:lnSpc>
-                <a:spcPct val="115000"/>
-              </a:lnSpc>
-              <a:spcAft>
-                <a:spcPts val="600"/>
-              </a:spcAft>
-            </a:pPr>
-            <a:r>
-              <a:rPr sz="1250" b="0">
-                <a:solidFill>
-                  <a:srgbClr val="475569"/>
+            <a:off x="8412480" y="4873752"/>
+            <a:ext cx="2834640" cy="777240"/>
+          </a:xfrm>
+          <a:prstGeom prst="rect">
+            <a:avLst/>
+          </a:prstGeom>
+          <a:noFill/>
+        </p:spPr>
+        <p:txBody>
+          <a:bodyPr wrap="square" lIns="0" rIns="0" tIns="0" bIns="0" anchor="t">
+            <a:spAutoFit/>
+          </a:bodyPr>
+          <a:lstStyle/>
+          <a:p>
+            <a:pPr algn="l">
+              <a:lnSpc>
+                <a:spcPct val="115000"/>
+              </a:lnSpc>
+              <a:spcAft>
+                <a:spcPts val="600"/>
+              </a:spcAft>
+            </a:pPr>
+            <a:r>
+              <a:rPr sz="1150" b="0">
+                <a:solidFill>
+                  <a:srgbClr val="C7D2FE"/>
                 </a:solidFill>
                 <a:latin typeface="Calibri"/>
               </a:rPr>
-              <a:t>React 19 + TypeScript (strict), Vite 8, Tailwind CSS 4</a:t>
-            </a:r>
-          </a:p>
-          <a:p>
-            <a:pPr algn="l">
-              <a:lnSpc>
-                <a:spcPct val="115000"/>
-              </a:lnSpc>
-              <a:spcAft>
-                <a:spcPts val="600"/>
-              </a:spcAft>
-            </a:pPr>
-            <a:r>
-              <a:rPr sz="1250" b="0">
-                <a:solidFill>
-                  <a:srgbClr val="475569"/>
-                </a:solidFill>
-                <a:latin typeface="Calibri"/>
-              </a:rPr>
-              <a:t>Zod for every AI reply - types flow from one schema</a:t>
-            </a:r>
-          </a:p>
-          <a:p>
-            <a:pPr algn="l">
-              <a:lnSpc>
-                <a:spcPct val="115000"/>
-              </a:lnSpc>
-              <a:spcAft>
-                <a:spcPts val="600"/>
-              </a:spcAft>
-            </a:pPr>
-            <a:r>
-              <a:rPr sz="1250" b="0">
-                <a:solidFill>
-                  <a:srgbClr val="475569"/>
-                </a:solidFill>
-                <a:latin typeface="Calibri"/>
-              </a:rPr>
-              <a:t>IndexedDB via idb; no server, no database</a:t>
-            </a:r>
-          </a:p>
-        </p:txBody>
-      </p:sp>
-      <p:sp>
-        <p:nvSpPr>
-          <p:cNvPr id="23" name="Rounded Rectangle 22"/>
-          <p:cNvSpPr/>
-          <p:nvPr/>
-        </p:nvSpPr>
-        <p:spPr>
-          <a:xfrm>
-            <a:off x="6172200" y="3840480"/>
-            <a:ext cx="5257800" cy="2103120"/>
-          </a:xfrm>
-          <a:prstGeom prst="roundRect">
-            <a:avLst>
-              <a:gd name="adj" fmla="val 8000"/>
-            </a:avLst>
-          </a:prstGeom>
-          <a:solidFill>
-            <a:srgbClr val="F8FAFC"/>
-          </a:solidFill>
-          <a:ln w="12700">
-            <a:solidFill>
-              <a:srgbClr val="E2E8F0"/>
-            </a:solidFill>
-          </a:ln>
-          <a:effectLst/>
-        </p:spPr>
-        <p:style>
-          <a:lnRef idx="1">
-            <a:schemeClr val="accent1"/>
-          </a:lnRef>
-          <a:fillRef idx="3">
-            <a:schemeClr val="accent1"/>
-          </a:fillRef>
-          <a:effectRef idx="2">
-            <a:schemeClr val="accent1"/>
-          </a:effectRef>
-          <a:fontRef idx="minor">
-            <a:schemeClr val="lt1"/>
-          </a:fontRef>
-        </p:style>
-        <p:txBody>
-          <a:bodyPr rtlCol="0" anchor="ctr"/>
-          <a:lstStyle/>
-          <a:p/>
-        </p:txBody>
-      </p:sp>
-      <p:sp>
-        <p:nvSpPr>
-          <p:cNvPr id="24" name="TextBox 23"/>
-          <p:cNvSpPr txBox="1"/>
-          <p:nvPr/>
-        </p:nvSpPr>
-        <p:spPr>
-          <a:xfrm>
-            <a:off x="6492240" y="4114800"/>
-            <a:ext cx="4572000" cy="365760"/>
-          </a:xfrm>
-          <a:prstGeom prst="rect">
-            <a:avLst/>
-          </a:prstGeom>
-          <a:noFill/>
-        </p:spPr>
-        <p:txBody>
-          <a:bodyPr wrap="square" lIns="0" rIns="0" tIns="0" bIns="0" anchor="t">
-            <a:spAutoFit/>
-          </a:bodyPr>
-          <a:lstStyle/>
-          <a:p>
-            <a:pPr algn="l">
-              <a:lnSpc>
-                <a:spcPct val="115000"/>
-              </a:lnSpc>
-              <a:spcAft>
-                <a:spcPts val="600"/>
-              </a:spcAft>
-            </a:pPr>
-            <a:r>
-              <a:rPr sz="1600" b="1">
-                <a:solidFill>
-                  <a:srgbClr val="0F172A"/>
-                </a:solidFill>
-                <a:latin typeface="Cambria"/>
-              </a:rPr>
-              <a:t>How it is verified</a:t>
-            </a:r>
-          </a:p>
-        </p:txBody>
-      </p:sp>
-      <p:sp>
-        <p:nvSpPr>
-          <p:cNvPr id="25" name="TextBox 24"/>
-          <p:cNvSpPr txBox="1"/>
-          <p:nvPr/>
-        </p:nvSpPr>
-        <p:spPr>
-          <a:xfrm>
-            <a:off x="6492240" y="4572000"/>
-            <a:ext cx="4663440" cy="1280160"/>
-          </a:xfrm>
-          <a:prstGeom prst="rect">
-            <a:avLst/>
-          </a:prstGeom>
-          <a:noFill/>
-        </p:spPr>
-        <p:txBody>
-          <a:bodyPr wrap="square" lIns="0" rIns="0" tIns="0" bIns="0" anchor="t">
-            <a:spAutoFit/>
-          </a:bodyPr>
-          <a:lstStyle/>
-          <a:p>
-            <a:pPr algn="l">
-              <a:lnSpc>
-                <a:spcPct val="115000"/>
-              </a:lnSpc>
-              <a:spcAft>
-                <a:spcPts val="600"/>
-              </a:spcAft>
-            </a:pPr>
-            <a:r>
-              <a:rPr sz="1250" b="0">
-                <a:solidFill>
-                  <a:srgbClr val="475569"/>
-                </a:solidFill>
-                <a:latin typeface="Calibri"/>
-              </a:rPr>
-              <a:t>npm run build type-checks the whole app</a:t>
-            </a:r>
-          </a:p>
-          <a:p>
-            <a:pPr algn="l">
-              <a:lnSpc>
-                <a:spcPct val="115000"/>
-              </a:lnSpc>
-              <a:spcAft>
-                <a:spcPts val="600"/>
-              </a:spcAft>
-            </a:pPr>
-            <a:r>
-              <a:rPr sz="1250" b="0">
-                <a:solidFill>
-                  <a:srgbClr val="475569"/>
-                </a:solidFill>
-                <a:latin typeface="Calibri"/>
-              </a:rPr>
-              <a:t>Adapter suite runs against a fake AI server: fallbacks, errors, streaming, abort</a:t>
-            </a:r>
-          </a:p>
-          <a:p>
-            <a:pPr algn="l">
-              <a:lnSpc>
-                <a:spcPct val="115000"/>
-              </a:lnSpc>
-              <a:spcAft>
-                <a:spcPts val="600"/>
-              </a:spcAft>
-            </a:pPr>
-            <a:r>
-              <a:rPr sz="1250" b="0">
-                <a:solidFill>
-                  <a:srgbClr val="475569"/>
-                </a:solidFill>
-                <a:latin typeface="Calibri"/>
-              </a:rPr>
-              <a:t>Manual smoke test for the six learner steps</a:t>
+              <a:t>A new deploy shows "New version ready - Reload" - nobody is stuck on an old copy.</a:t>
             </a:r>
           </a:p>
         </p:txBody>
@@ -9114,7 +8990,7 @@
                 </a:solidFill>
                 <a:latin typeface="Cambria"/>
               </a:rPr>
-              <a:t>Cost, privacy and the honest caveat</a:t>
+              <a:t>Build and quality</a:t>
             </a:r>
           </a:p>
         </p:txBody>
@@ -9156,7 +9032,7 @@
                 </a:solidFill>
                 <a:latin typeface="Calibri"/>
               </a:rPr>
-              <a:t>What it costs to run, and what to fix before sharing it</a:t>
+              <a:t>Small, typed, and checked</a:t>
             </a:r>
           </a:p>
         </p:txBody>
@@ -9170,7 +9046,834 @@
         <p:spPr>
           <a:xfrm>
             <a:off x="731520" y="2194560"/>
-            <a:ext cx="3474720" cy="3566160"/>
+            <a:ext cx="2011680" cy="1371600"/>
+          </a:xfrm>
+          <a:prstGeom prst="roundRect">
+            <a:avLst>
+              <a:gd name="adj" fmla="val 8000"/>
+            </a:avLst>
+          </a:prstGeom>
+          <a:solidFill>
+            <a:srgbClr val="EEF2FF"/>
+          </a:solidFill>
+          <a:ln>
+            <a:noFill/>
+          </a:ln>
+          <a:effectLst/>
+        </p:spPr>
+        <p:style>
+          <a:lnRef idx="1">
+            <a:schemeClr val="accent1"/>
+          </a:lnRef>
+          <a:fillRef idx="3">
+            <a:schemeClr val="accent1"/>
+          </a:fillRef>
+          <a:effectRef idx="2">
+            <a:schemeClr val="accent1"/>
+          </a:effectRef>
+          <a:fontRef idx="minor">
+            <a:schemeClr val="lt1"/>
+          </a:fontRef>
+        </p:style>
+        <p:txBody>
+          <a:bodyPr rtlCol="0" anchor="ctr"/>
+          <a:lstStyle/>
+          <a:p/>
+        </p:txBody>
+      </p:sp>
+      <p:sp>
+        <p:nvSpPr>
+          <p:cNvPr id="6" name="TextBox 5"/>
+          <p:cNvSpPr txBox="1"/>
+          <p:nvPr/>
+        </p:nvSpPr>
+        <p:spPr>
+          <a:xfrm>
+            <a:off x="731520" y="2377440"/>
+            <a:ext cx="2011680" cy="640080"/>
+          </a:xfrm>
+          <a:prstGeom prst="rect">
+            <a:avLst/>
+          </a:prstGeom>
+          <a:noFill/>
+        </p:spPr>
+        <p:txBody>
+          <a:bodyPr wrap="square" lIns="0" rIns="0" tIns="0" bIns="0" anchor="t">
+            <a:spAutoFit/>
+          </a:bodyPr>
+          <a:lstStyle/>
+          <a:p>
+            <a:pPr algn="ctr">
+              <a:lnSpc>
+                <a:spcPct val="115000"/>
+              </a:lnSpc>
+              <a:spcAft>
+                <a:spcPts val="600"/>
+              </a:spcAft>
+            </a:pPr>
+            <a:r>
+              <a:rPr sz="3000" b="1">
+                <a:solidFill>
+                  <a:srgbClr val="4F46E5"/>
+                </a:solidFill>
+                <a:latin typeface="Cambria"/>
+              </a:rPr>
+              <a:t>~5,400</a:t>
+            </a:r>
+          </a:p>
+        </p:txBody>
+      </p:sp>
+      <p:sp>
+        <p:nvSpPr>
+          <p:cNvPr id="7" name="TextBox 6"/>
+          <p:cNvSpPr txBox="1"/>
+          <p:nvPr/>
+        </p:nvSpPr>
+        <p:spPr>
+          <a:xfrm>
+            <a:off x="731520" y="3063240"/>
+            <a:ext cx="2011680" cy="365760"/>
+          </a:xfrm>
+          <a:prstGeom prst="rect">
+            <a:avLst/>
+          </a:prstGeom>
+          <a:noFill/>
+        </p:spPr>
+        <p:txBody>
+          <a:bodyPr wrap="square" lIns="0" rIns="0" tIns="0" bIns="0" anchor="t">
+            <a:spAutoFit/>
+          </a:bodyPr>
+          <a:lstStyle/>
+          <a:p>
+            <a:pPr algn="ctr">
+              <a:lnSpc>
+                <a:spcPct val="115000"/>
+              </a:lnSpc>
+              <a:spcAft>
+                <a:spcPts val="600"/>
+              </a:spcAft>
+            </a:pPr>
+            <a:r>
+              <a:rPr sz="1100" b="0">
+                <a:solidFill>
+                  <a:srgbClr val="1E1B4B"/>
+                </a:solidFill>
+                <a:latin typeface="Calibri"/>
+              </a:rPr>
+              <a:t>lines of TypeScript</a:t>
+            </a:r>
+          </a:p>
+        </p:txBody>
+      </p:sp>
+      <p:sp>
+        <p:nvSpPr>
+          <p:cNvPr id="8" name="Rounded Rectangle 7"/>
+          <p:cNvSpPr/>
+          <p:nvPr/>
+        </p:nvSpPr>
+        <p:spPr>
+          <a:xfrm>
+            <a:off x="2907791" y="2194560"/>
+            <a:ext cx="2011680" cy="1371600"/>
+          </a:xfrm>
+          <a:prstGeom prst="roundRect">
+            <a:avLst>
+              <a:gd name="adj" fmla="val 8000"/>
+            </a:avLst>
+          </a:prstGeom>
+          <a:solidFill>
+            <a:srgbClr val="EEF2FF"/>
+          </a:solidFill>
+          <a:ln>
+            <a:noFill/>
+          </a:ln>
+          <a:effectLst/>
+        </p:spPr>
+        <p:style>
+          <a:lnRef idx="1">
+            <a:schemeClr val="accent1"/>
+          </a:lnRef>
+          <a:fillRef idx="3">
+            <a:schemeClr val="accent1"/>
+          </a:fillRef>
+          <a:effectRef idx="2">
+            <a:schemeClr val="accent1"/>
+          </a:effectRef>
+          <a:fontRef idx="minor">
+            <a:schemeClr val="lt1"/>
+          </a:fontRef>
+        </p:style>
+        <p:txBody>
+          <a:bodyPr rtlCol="0" anchor="ctr"/>
+          <a:lstStyle/>
+          <a:p/>
+        </p:txBody>
+      </p:sp>
+      <p:sp>
+        <p:nvSpPr>
+          <p:cNvPr id="9" name="TextBox 8"/>
+          <p:cNvSpPr txBox="1"/>
+          <p:nvPr/>
+        </p:nvSpPr>
+        <p:spPr>
+          <a:xfrm>
+            <a:off x="2907791" y="2377440"/>
+            <a:ext cx="2011680" cy="640080"/>
+          </a:xfrm>
+          <a:prstGeom prst="rect">
+            <a:avLst/>
+          </a:prstGeom>
+          <a:noFill/>
+        </p:spPr>
+        <p:txBody>
+          <a:bodyPr wrap="square" lIns="0" rIns="0" tIns="0" bIns="0" anchor="t">
+            <a:spAutoFit/>
+          </a:bodyPr>
+          <a:lstStyle/>
+          <a:p>
+            <a:pPr algn="ctr">
+              <a:lnSpc>
+                <a:spcPct val="115000"/>
+              </a:lnSpc>
+              <a:spcAft>
+                <a:spcPts val="600"/>
+              </a:spcAft>
+            </a:pPr>
+            <a:r>
+              <a:rPr sz="3000" b="1">
+                <a:solidFill>
+                  <a:srgbClr val="4F46E5"/>
+                </a:solidFill>
+                <a:latin typeface="Cambria"/>
+              </a:rPr>
+              <a:t>48</a:t>
+            </a:r>
+          </a:p>
+        </p:txBody>
+      </p:sp>
+      <p:sp>
+        <p:nvSpPr>
+          <p:cNvPr id="10" name="TextBox 9"/>
+          <p:cNvSpPr txBox="1"/>
+          <p:nvPr/>
+        </p:nvSpPr>
+        <p:spPr>
+          <a:xfrm>
+            <a:off x="2907791" y="3063240"/>
+            <a:ext cx="2011680" cy="365760"/>
+          </a:xfrm>
+          <a:prstGeom prst="rect">
+            <a:avLst/>
+          </a:prstGeom>
+          <a:noFill/>
+        </p:spPr>
+        <p:txBody>
+          <a:bodyPr wrap="square" lIns="0" rIns="0" tIns="0" bIns="0" anchor="t">
+            <a:spAutoFit/>
+          </a:bodyPr>
+          <a:lstStyle/>
+          <a:p>
+            <a:pPr algn="ctr">
+              <a:lnSpc>
+                <a:spcPct val="115000"/>
+              </a:lnSpc>
+              <a:spcAft>
+                <a:spcPts val="600"/>
+              </a:spcAft>
+            </a:pPr>
+            <a:r>
+              <a:rPr sz="1100" b="0">
+                <a:solidFill>
+                  <a:srgbClr val="1E1B4B"/>
+                </a:solidFill>
+                <a:latin typeface="Calibri"/>
+              </a:rPr>
+              <a:t>source files</a:t>
+            </a:r>
+          </a:p>
+        </p:txBody>
+      </p:sp>
+      <p:sp>
+        <p:nvSpPr>
+          <p:cNvPr id="11" name="Rounded Rectangle 10"/>
+          <p:cNvSpPr/>
+          <p:nvPr/>
+        </p:nvSpPr>
+        <p:spPr>
+          <a:xfrm>
+            <a:off x="5084064" y="2194560"/>
+            <a:ext cx="2011680" cy="1371600"/>
+          </a:xfrm>
+          <a:prstGeom prst="roundRect">
+            <a:avLst>
+              <a:gd name="adj" fmla="val 8000"/>
+            </a:avLst>
+          </a:prstGeom>
+          <a:solidFill>
+            <a:srgbClr val="EEF2FF"/>
+          </a:solidFill>
+          <a:ln>
+            <a:noFill/>
+          </a:ln>
+          <a:effectLst/>
+        </p:spPr>
+        <p:style>
+          <a:lnRef idx="1">
+            <a:schemeClr val="accent1"/>
+          </a:lnRef>
+          <a:fillRef idx="3">
+            <a:schemeClr val="accent1"/>
+          </a:fillRef>
+          <a:effectRef idx="2">
+            <a:schemeClr val="accent1"/>
+          </a:effectRef>
+          <a:fontRef idx="minor">
+            <a:schemeClr val="lt1"/>
+          </a:fontRef>
+        </p:style>
+        <p:txBody>
+          <a:bodyPr rtlCol="0" anchor="ctr"/>
+          <a:lstStyle/>
+          <a:p/>
+        </p:txBody>
+      </p:sp>
+      <p:sp>
+        <p:nvSpPr>
+          <p:cNvPr id="12" name="TextBox 11"/>
+          <p:cNvSpPr txBox="1"/>
+          <p:nvPr/>
+        </p:nvSpPr>
+        <p:spPr>
+          <a:xfrm>
+            <a:off x="5084064" y="2377440"/>
+            <a:ext cx="2011680" cy="640080"/>
+          </a:xfrm>
+          <a:prstGeom prst="rect">
+            <a:avLst/>
+          </a:prstGeom>
+          <a:noFill/>
+        </p:spPr>
+        <p:txBody>
+          <a:bodyPr wrap="square" lIns="0" rIns="0" tIns="0" bIns="0" anchor="t">
+            <a:spAutoFit/>
+          </a:bodyPr>
+          <a:lstStyle/>
+          <a:p>
+            <a:pPr algn="ctr">
+              <a:lnSpc>
+                <a:spcPct val="115000"/>
+              </a:lnSpc>
+              <a:spcAft>
+                <a:spcPts val="600"/>
+              </a:spcAft>
+            </a:pPr>
+            <a:r>
+              <a:rPr sz="3000" b="1">
+                <a:solidFill>
+                  <a:srgbClr val="4F46E5"/>
+                </a:solidFill>
+                <a:latin typeface="Cambria"/>
+              </a:rPr>
+              <a:t>12</a:t>
+            </a:r>
+          </a:p>
+        </p:txBody>
+      </p:sp>
+      <p:sp>
+        <p:nvSpPr>
+          <p:cNvPr id="13" name="TextBox 12"/>
+          <p:cNvSpPr txBox="1"/>
+          <p:nvPr/>
+        </p:nvSpPr>
+        <p:spPr>
+          <a:xfrm>
+            <a:off x="5084064" y="3063240"/>
+            <a:ext cx="2011680" cy="365760"/>
+          </a:xfrm>
+          <a:prstGeom prst="rect">
+            <a:avLst/>
+          </a:prstGeom>
+          <a:noFill/>
+        </p:spPr>
+        <p:txBody>
+          <a:bodyPr wrap="square" lIns="0" rIns="0" tIns="0" bIns="0" anchor="t">
+            <a:spAutoFit/>
+          </a:bodyPr>
+          <a:lstStyle/>
+          <a:p>
+            <a:pPr algn="ctr">
+              <a:lnSpc>
+                <a:spcPct val="115000"/>
+              </a:lnSpc>
+              <a:spcAft>
+                <a:spcPts val="600"/>
+              </a:spcAft>
+            </a:pPr>
+            <a:r>
+              <a:rPr sz="1100" b="0">
+                <a:solidFill>
+                  <a:srgbClr val="1E1B4B"/>
+                </a:solidFill>
+                <a:latin typeface="Calibri"/>
+              </a:rPr>
+              <a:t>AI providers</a:t>
+            </a:r>
+          </a:p>
+        </p:txBody>
+      </p:sp>
+      <p:sp>
+        <p:nvSpPr>
+          <p:cNvPr id="14" name="Rounded Rectangle 13"/>
+          <p:cNvSpPr/>
+          <p:nvPr/>
+        </p:nvSpPr>
+        <p:spPr>
+          <a:xfrm>
+            <a:off x="7260336" y="2194560"/>
+            <a:ext cx="2011680" cy="1371600"/>
+          </a:xfrm>
+          <a:prstGeom prst="roundRect">
+            <a:avLst>
+              <a:gd name="adj" fmla="val 8000"/>
+            </a:avLst>
+          </a:prstGeom>
+          <a:solidFill>
+            <a:srgbClr val="EEF2FF"/>
+          </a:solidFill>
+          <a:ln>
+            <a:noFill/>
+          </a:ln>
+          <a:effectLst/>
+        </p:spPr>
+        <p:style>
+          <a:lnRef idx="1">
+            <a:schemeClr val="accent1"/>
+          </a:lnRef>
+          <a:fillRef idx="3">
+            <a:schemeClr val="accent1"/>
+          </a:fillRef>
+          <a:effectRef idx="2">
+            <a:schemeClr val="accent1"/>
+          </a:effectRef>
+          <a:fontRef idx="minor">
+            <a:schemeClr val="lt1"/>
+          </a:fontRef>
+        </p:style>
+        <p:txBody>
+          <a:bodyPr rtlCol="0" anchor="ctr"/>
+          <a:lstStyle/>
+          <a:p/>
+        </p:txBody>
+      </p:sp>
+      <p:sp>
+        <p:nvSpPr>
+          <p:cNvPr id="15" name="TextBox 14"/>
+          <p:cNvSpPr txBox="1"/>
+          <p:nvPr/>
+        </p:nvSpPr>
+        <p:spPr>
+          <a:xfrm>
+            <a:off x="7260336" y="2377440"/>
+            <a:ext cx="2011680" cy="640080"/>
+          </a:xfrm>
+          <a:prstGeom prst="rect">
+            <a:avLst/>
+          </a:prstGeom>
+          <a:noFill/>
+        </p:spPr>
+        <p:txBody>
+          <a:bodyPr wrap="square" lIns="0" rIns="0" tIns="0" bIns="0" anchor="t">
+            <a:spAutoFit/>
+          </a:bodyPr>
+          <a:lstStyle/>
+          <a:p>
+            <a:pPr algn="ctr">
+              <a:lnSpc>
+                <a:spcPct val="115000"/>
+              </a:lnSpc>
+              <a:spcAft>
+                <a:spcPts val="600"/>
+              </a:spcAft>
+            </a:pPr>
+            <a:r>
+              <a:rPr sz="3000" b="1">
+                <a:solidFill>
+                  <a:srgbClr val="4F46E5"/>
+                </a:solidFill>
+                <a:latin typeface="Cambria"/>
+              </a:rPr>
+              <a:t>AES-256</a:t>
+            </a:r>
+          </a:p>
+        </p:txBody>
+      </p:sp>
+      <p:sp>
+        <p:nvSpPr>
+          <p:cNvPr id="16" name="TextBox 15"/>
+          <p:cNvSpPr txBox="1"/>
+          <p:nvPr/>
+        </p:nvSpPr>
+        <p:spPr>
+          <a:xfrm>
+            <a:off x="7260336" y="3063240"/>
+            <a:ext cx="2011680" cy="365760"/>
+          </a:xfrm>
+          <a:prstGeom prst="rect">
+            <a:avLst/>
+          </a:prstGeom>
+          <a:noFill/>
+        </p:spPr>
+        <p:txBody>
+          <a:bodyPr wrap="square" lIns="0" rIns="0" tIns="0" bIns="0" anchor="t">
+            <a:spAutoFit/>
+          </a:bodyPr>
+          <a:lstStyle/>
+          <a:p>
+            <a:pPr algn="ctr">
+              <a:lnSpc>
+                <a:spcPct val="115000"/>
+              </a:lnSpc>
+              <a:spcAft>
+                <a:spcPts val="600"/>
+              </a:spcAft>
+            </a:pPr>
+            <a:r>
+              <a:rPr sz="1100" b="0">
+                <a:solidFill>
+                  <a:srgbClr val="1E1B4B"/>
+                </a:solidFill>
+                <a:latin typeface="Calibri"/>
+              </a:rPr>
+              <a:t>encrypted API keys</a:t>
+            </a:r>
+          </a:p>
+        </p:txBody>
+      </p:sp>
+      <p:sp>
+        <p:nvSpPr>
+          <p:cNvPr id="17" name="Rounded Rectangle 16"/>
+          <p:cNvSpPr/>
+          <p:nvPr/>
+        </p:nvSpPr>
+        <p:spPr>
+          <a:xfrm>
+            <a:off x="9436608" y="2194560"/>
+            <a:ext cx="2011680" cy="1371600"/>
+          </a:xfrm>
+          <a:prstGeom prst="roundRect">
+            <a:avLst>
+              <a:gd name="adj" fmla="val 8000"/>
+            </a:avLst>
+          </a:prstGeom>
+          <a:solidFill>
+            <a:srgbClr val="EEF2FF"/>
+          </a:solidFill>
+          <a:ln>
+            <a:noFill/>
+          </a:ln>
+          <a:effectLst/>
+        </p:spPr>
+        <p:style>
+          <a:lnRef idx="1">
+            <a:schemeClr val="accent1"/>
+          </a:lnRef>
+          <a:fillRef idx="3">
+            <a:schemeClr val="accent1"/>
+          </a:fillRef>
+          <a:effectRef idx="2">
+            <a:schemeClr val="accent1"/>
+          </a:effectRef>
+          <a:fontRef idx="minor">
+            <a:schemeClr val="lt1"/>
+          </a:fontRef>
+        </p:style>
+        <p:txBody>
+          <a:bodyPr rtlCol="0" anchor="ctr"/>
+          <a:lstStyle/>
+          <a:p/>
+        </p:txBody>
+      </p:sp>
+      <p:sp>
+        <p:nvSpPr>
+          <p:cNvPr id="18" name="TextBox 17"/>
+          <p:cNvSpPr txBox="1"/>
+          <p:nvPr/>
+        </p:nvSpPr>
+        <p:spPr>
+          <a:xfrm>
+            <a:off x="9436608" y="2377440"/>
+            <a:ext cx="2011680" cy="640080"/>
+          </a:xfrm>
+          <a:prstGeom prst="rect">
+            <a:avLst/>
+          </a:prstGeom>
+          <a:noFill/>
+        </p:spPr>
+        <p:txBody>
+          <a:bodyPr wrap="square" lIns="0" rIns="0" tIns="0" bIns="0" anchor="t">
+            <a:spAutoFit/>
+          </a:bodyPr>
+          <a:lstStyle/>
+          <a:p>
+            <a:pPr algn="ctr">
+              <a:lnSpc>
+                <a:spcPct val="115000"/>
+              </a:lnSpc>
+              <a:spcAft>
+                <a:spcPts val="600"/>
+              </a:spcAft>
+            </a:pPr>
+            <a:r>
+              <a:rPr sz="3000" b="1">
+                <a:solidFill>
+                  <a:srgbClr val="4F46E5"/>
+                </a:solidFill>
+                <a:latin typeface="Cambria"/>
+              </a:rPr>
+              <a:t>0</a:t>
+            </a:r>
+          </a:p>
+        </p:txBody>
+      </p:sp>
+      <p:sp>
+        <p:nvSpPr>
+          <p:cNvPr id="19" name="TextBox 18"/>
+          <p:cNvSpPr txBox="1"/>
+          <p:nvPr/>
+        </p:nvSpPr>
+        <p:spPr>
+          <a:xfrm>
+            <a:off x="9436608" y="3063240"/>
+            <a:ext cx="2011680" cy="365760"/>
+          </a:xfrm>
+          <a:prstGeom prst="rect">
+            <a:avLst/>
+          </a:prstGeom>
+          <a:noFill/>
+        </p:spPr>
+        <p:txBody>
+          <a:bodyPr wrap="square" lIns="0" rIns="0" tIns="0" bIns="0" anchor="t">
+            <a:spAutoFit/>
+          </a:bodyPr>
+          <a:lstStyle/>
+          <a:p>
+            <a:pPr algn="ctr">
+              <a:lnSpc>
+                <a:spcPct val="115000"/>
+              </a:lnSpc>
+              <a:spcAft>
+                <a:spcPts val="600"/>
+              </a:spcAft>
+            </a:pPr>
+            <a:r>
+              <a:rPr sz="1100" b="0">
+                <a:solidFill>
+                  <a:srgbClr val="1E1B4B"/>
+                </a:solidFill>
+                <a:latin typeface="Calibri"/>
+              </a:rPr>
+              <a:t>backend services</a:t>
+            </a:r>
+          </a:p>
+        </p:txBody>
+      </p:sp>
+      <p:sp>
+        <p:nvSpPr>
+          <p:cNvPr id="20" name="Rounded Rectangle 19"/>
+          <p:cNvSpPr/>
+          <p:nvPr/>
+        </p:nvSpPr>
+        <p:spPr>
+          <a:xfrm>
+            <a:off x="731520" y="3840480"/>
+            <a:ext cx="5257800" cy="2103120"/>
+          </a:xfrm>
+          <a:prstGeom prst="roundRect">
+            <a:avLst>
+              <a:gd name="adj" fmla="val 8000"/>
+            </a:avLst>
+          </a:prstGeom>
+          <a:solidFill>
+            <a:srgbClr val="FFFFFF"/>
+          </a:solidFill>
+          <a:ln w="12700">
+            <a:solidFill>
+              <a:srgbClr val="E2E8F0"/>
+            </a:solidFill>
+          </a:ln>
+          <a:effectLst/>
+        </p:spPr>
+        <p:style>
+          <a:lnRef idx="1">
+            <a:schemeClr val="accent1"/>
+          </a:lnRef>
+          <a:fillRef idx="3">
+            <a:schemeClr val="accent1"/>
+          </a:fillRef>
+          <a:effectRef idx="2">
+            <a:schemeClr val="accent1"/>
+          </a:effectRef>
+          <a:fontRef idx="minor">
+            <a:schemeClr val="lt1"/>
+          </a:fontRef>
+        </p:style>
+        <p:txBody>
+          <a:bodyPr rtlCol="0" anchor="ctr"/>
+          <a:lstStyle/>
+          <a:p/>
+        </p:txBody>
+      </p:sp>
+      <p:sp>
+        <p:nvSpPr>
+          <p:cNvPr id="21" name="TextBox 20"/>
+          <p:cNvSpPr txBox="1"/>
+          <p:nvPr/>
+        </p:nvSpPr>
+        <p:spPr>
+          <a:xfrm>
+            <a:off x="1051560" y="4114800"/>
+            <a:ext cx="4572000" cy="365760"/>
+          </a:xfrm>
+          <a:prstGeom prst="rect">
+            <a:avLst/>
+          </a:prstGeom>
+          <a:noFill/>
+        </p:spPr>
+        <p:txBody>
+          <a:bodyPr wrap="square" lIns="0" rIns="0" tIns="0" bIns="0" anchor="t">
+            <a:spAutoFit/>
+          </a:bodyPr>
+          <a:lstStyle/>
+          <a:p>
+            <a:pPr algn="l">
+              <a:lnSpc>
+                <a:spcPct val="115000"/>
+              </a:lnSpc>
+              <a:spcAft>
+                <a:spcPts val="600"/>
+              </a:spcAft>
+            </a:pPr>
+            <a:r>
+              <a:rPr sz="1600" b="1">
+                <a:solidFill>
+                  <a:srgbClr val="0F172A"/>
+                </a:solidFill>
+                <a:latin typeface="Cambria"/>
+              </a:rPr>
+              <a:t>Stack</a:t>
+            </a:r>
+          </a:p>
+        </p:txBody>
+      </p:sp>
+      <p:sp>
+        <p:nvSpPr>
+          <p:cNvPr id="22" name="TextBox 21"/>
+          <p:cNvSpPr txBox="1"/>
+          <p:nvPr/>
+        </p:nvSpPr>
+        <p:spPr>
+          <a:xfrm>
+            <a:off x="1051560" y="4572000"/>
+            <a:ext cx="4663440" cy="1280160"/>
+          </a:xfrm>
+          <a:prstGeom prst="rect">
+            <a:avLst/>
+          </a:prstGeom>
+          <a:noFill/>
+        </p:spPr>
+        <p:txBody>
+          <a:bodyPr wrap="square" lIns="0" rIns="0" tIns="0" bIns="0" anchor="t">
+            <a:spAutoFit/>
+          </a:bodyPr>
+          <a:lstStyle/>
+          <a:p>
+            <a:pPr algn="l">
+              <a:lnSpc>
+                <a:spcPct val="115000"/>
+              </a:lnSpc>
+              <a:spcAft>
+                <a:spcPts val="600"/>
+              </a:spcAft>
+            </a:pPr>
+            <a:r>
+              <a:rPr sz="1250" b="0">
+                <a:solidFill>
+                  <a:srgbClr val="475569"/>
+                </a:solidFill>
+                <a:latin typeface="Calibri"/>
+              </a:rPr>
+              <a:t>React 19 + TypeScript (strict), Vite 8, Tailwind CSS 4</a:t>
+            </a:r>
+          </a:p>
+          <a:p>
+            <a:pPr algn="l">
+              <a:lnSpc>
+                <a:spcPct val="115000"/>
+              </a:lnSpc>
+              <a:spcAft>
+                <a:spcPts val="600"/>
+              </a:spcAft>
+            </a:pPr>
+            <a:r>
+              <a:rPr sz="1250" b="0">
+                <a:solidFill>
+                  <a:srgbClr val="475569"/>
+                </a:solidFill>
+                <a:latin typeface="Calibri"/>
+              </a:rPr>
+              <a:t>Zod for every AI reply - types flow from one schema</a:t>
+            </a:r>
+          </a:p>
+          <a:p>
+            <a:pPr algn="l">
+              <a:lnSpc>
+                <a:spcPct val="115000"/>
+              </a:lnSpc>
+              <a:spcAft>
+                <a:spcPts val="600"/>
+              </a:spcAft>
+            </a:pPr>
+            <a:r>
+              <a:rPr sz="1250" b="0">
+                <a:solidFill>
+                  <a:srgbClr val="475569"/>
+                </a:solidFill>
+                <a:latin typeface="Calibri"/>
+              </a:rPr>
+              <a:t>IndexedDB via idb; Web Crypto for the API key</a:t>
+            </a:r>
+          </a:p>
+          <a:p>
+            <a:pPr algn="l">
+              <a:lnSpc>
+                <a:spcPct val="115000"/>
+              </a:lnSpc>
+              <a:spcAft>
+                <a:spcPts val="600"/>
+              </a:spcAft>
+            </a:pPr>
+            <a:r>
+              <a:rPr sz="1250" b="0">
+                <a:solidFill>
+                  <a:srgbClr val="475569"/>
+                </a:solidFill>
+                <a:latin typeface="Calibri"/>
+              </a:rPr>
+              <a:t>vite-plugin-pwa (Workbox): install, offline, updates</a:t>
+            </a:r>
+          </a:p>
+        </p:txBody>
+      </p:sp>
+      <p:sp>
+        <p:nvSpPr>
+          <p:cNvPr id="23" name="Rounded Rectangle 22"/>
+          <p:cNvSpPr/>
+          <p:nvPr/>
+        </p:nvSpPr>
+        <p:spPr>
+          <a:xfrm>
+            <a:off x="6172200" y="3840480"/>
+            <a:ext cx="5257800" cy="2103120"/>
           </a:xfrm>
           <a:prstGeom prst="roundRect">
             <a:avLst>
@@ -9209,14 +9912,14 @@
       </p:sp>
       <p:sp>
         <p:nvSpPr>
-          <p:cNvPr id="6" name="TextBox 5"/>
-          <p:cNvSpPr txBox="1"/>
-          <p:nvPr/>
-        </p:nvSpPr>
-        <p:spPr>
-          <a:xfrm>
-            <a:off x="1005840" y="2468880"/>
-            <a:ext cx="2926080" cy="365760"/>
+          <p:cNvPr id="24" name="TextBox 23"/>
+          <p:cNvSpPr txBox="1"/>
+          <p:nvPr/>
+        </p:nvSpPr>
+        <p:spPr>
+          <a:xfrm>
+            <a:off x="6492240" y="4114800"/>
+            <a:ext cx="4572000" cy="365760"/>
           </a:xfrm>
           <a:prstGeom prst="rect">
             <a:avLst/>
@@ -9244,39 +9947,39 @@
                 </a:solidFill>
                 <a:latin typeface="Cambria"/>
               </a:rPr>
-              <a:t>Cost</a:t>
-            </a:r>
-          </a:p>
-        </p:txBody>
-      </p:sp>
-      <p:sp>
-        <p:nvSpPr>
-          <p:cNvPr id="7" name="TextBox 6"/>
-          <p:cNvSpPr txBox="1"/>
-          <p:nvPr/>
-        </p:nvSpPr>
-        <p:spPr>
-          <a:xfrm>
-            <a:off x="1005840" y="2926080"/>
-            <a:ext cx="3017520" cy="2560320"/>
-          </a:xfrm>
-          <a:prstGeom prst="rect">
-            <a:avLst/>
-          </a:prstGeom>
-          <a:noFill/>
-        </p:spPr>
-        <p:txBody>
-          <a:bodyPr wrap="square" lIns="0" rIns="0" tIns="0" bIns="0" anchor="t">
-            <a:spAutoFit/>
-          </a:bodyPr>
-          <a:lstStyle/>
-          <a:p>
-            <a:pPr algn="l">
-              <a:lnSpc>
-                <a:spcPct val="115000"/>
-              </a:lnSpc>
-              <a:spcAft>
-                <a:spcPts val="900"/>
+              <a:t>How it is verified</a:t>
+            </a:r>
+          </a:p>
+        </p:txBody>
+      </p:sp>
+      <p:sp>
+        <p:nvSpPr>
+          <p:cNvPr id="25" name="TextBox 24"/>
+          <p:cNvSpPr txBox="1"/>
+          <p:nvPr/>
+        </p:nvSpPr>
+        <p:spPr>
+          <a:xfrm>
+            <a:off x="6492240" y="4572000"/>
+            <a:ext cx="4663440" cy="1280160"/>
+          </a:xfrm>
+          <a:prstGeom prst="rect">
+            <a:avLst/>
+          </a:prstGeom>
+          <a:noFill/>
+        </p:spPr>
+        <p:txBody>
+          <a:bodyPr wrap="square" lIns="0" rIns="0" tIns="0" bIns="0" anchor="t">
+            <a:spAutoFit/>
+          </a:bodyPr>
+          <a:lstStyle/>
+          <a:p>
+            <a:pPr algn="l">
+              <a:lnSpc>
+                <a:spcPct val="115000"/>
+              </a:lnSpc>
+              <a:spcAft>
+                <a:spcPts val="600"/>
               </a:spcAft>
             </a:pPr>
             <a:r>
@@ -9286,16 +9989,16 @@
                 </a:solidFill>
                 <a:latin typeface="Calibri"/>
               </a:rPr>
-              <a:t>Free tiers cover normal learning use</a:t>
-            </a:r>
-          </a:p>
-          <a:p>
-            <a:pPr algn="l">
-              <a:lnSpc>
-                <a:spcPct val="115000"/>
-              </a:lnSpc>
-              <a:spcAft>
-                <a:spcPts val="900"/>
+              <a:t>npm run build type-checks the whole app</a:t>
+            </a:r>
+          </a:p>
+          <a:p>
+            <a:pPr algn="l">
+              <a:lnSpc>
+                <a:spcPct val="115000"/>
+              </a:lnSpc>
+              <a:spcAft>
+                <a:spcPts val="600"/>
               </a:spcAft>
             </a:pPr>
             <a:r>
@@ -9305,16 +10008,16 @@
                 </a:solidFill>
                 <a:latin typeface="Calibri"/>
               </a:rPr>
-              <a:t>Paid providers: a few cents per module</a:t>
-            </a:r>
-          </a:p>
-          <a:p>
-            <a:pPr algn="l">
-              <a:lnSpc>
-                <a:spcPct val="115000"/>
-              </a:lnSpc>
-              <a:spcAft>
-                <a:spcPts val="900"/>
+              <a:t>Production build checked in Chrome: offline, key encryption, backup</a:t>
+            </a:r>
+          </a:p>
+          <a:p>
+            <a:pPr algn="l">
+              <a:lnSpc>
+                <a:spcPct val="115000"/>
+              </a:lnSpc>
+              <a:spcAft>
+                <a:spcPts val="600"/>
               </a:spcAft>
             </a:pPr>
             <a:r>
@@ -9324,398 +10027,7 @@
                 </a:solidFill>
                 <a:latin typeface="Calibri"/>
               </a:rPr>
-              <a:t>Effort defaults to low to keep usage down</a:t>
-            </a:r>
-          </a:p>
-          <a:p>
-            <a:pPr algn="l">
-              <a:lnSpc>
-                <a:spcPct val="115000"/>
-              </a:lnSpc>
-              <a:spcAft>
-                <a:spcPts val="900"/>
-              </a:spcAft>
-            </a:pPr>
-            <a:r>
-              <a:rPr sz="1250" b="0">
-                <a:solidFill>
-                  <a:srgbClr val="475569"/>
-                </a:solidFill>
-                <a:latin typeface="Calibri"/>
-              </a:rPr>
-              <a:t>Hosting: none - it is a static site</a:t>
-            </a:r>
-          </a:p>
-        </p:txBody>
-      </p:sp>
-      <p:sp>
-        <p:nvSpPr>
-          <p:cNvPr id="8" name="Rounded Rectangle 7"/>
-          <p:cNvSpPr/>
-          <p:nvPr/>
-        </p:nvSpPr>
-        <p:spPr>
-          <a:xfrm>
-            <a:off x="4434840" y="2194560"/>
-            <a:ext cx="3474720" cy="3566160"/>
-          </a:xfrm>
-          <a:prstGeom prst="roundRect">
-            <a:avLst>
-              <a:gd name="adj" fmla="val 8000"/>
-            </a:avLst>
-          </a:prstGeom>
-          <a:solidFill>
-            <a:srgbClr val="F8FAFC"/>
-          </a:solidFill>
-          <a:ln w="12700">
-            <a:solidFill>
-              <a:srgbClr val="E2E8F0"/>
-            </a:solidFill>
-          </a:ln>
-          <a:effectLst/>
-        </p:spPr>
-        <p:style>
-          <a:lnRef idx="1">
-            <a:schemeClr val="accent1"/>
-          </a:lnRef>
-          <a:fillRef idx="3">
-            <a:schemeClr val="accent1"/>
-          </a:fillRef>
-          <a:effectRef idx="2">
-            <a:schemeClr val="accent1"/>
-          </a:effectRef>
-          <a:fontRef idx="minor">
-            <a:schemeClr val="lt1"/>
-          </a:fontRef>
-        </p:style>
-        <p:txBody>
-          <a:bodyPr rtlCol="0" anchor="ctr"/>
-          <a:lstStyle/>
-          <a:p/>
-        </p:txBody>
-      </p:sp>
-      <p:sp>
-        <p:nvSpPr>
-          <p:cNvPr id="9" name="TextBox 8"/>
-          <p:cNvSpPr txBox="1"/>
-          <p:nvPr/>
-        </p:nvSpPr>
-        <p:spPr>
-          <a:xfrm>
-            <a:off x="4709160" y="2468880"/>
-            <a:ext cx="2926080" cy="365760"/>
-          </a:xfrm>
-          <a:prstGeom prst="rect">
-            <a:avLst/>
-          </a:prstGeom>
-          <a:noFill/>
-        </p:spPr>
-        <p:txBody>
-          <a:bodyPr wrap="square" lIns="0" rIns="0" tIns="0" bIns="0" anchor="t">
-            <a:spAutoFit/>
-          </a:bodyPr>
-          <a:lstStyle/>
-          <a:p>
-            <a:pPr algn="l">
-              <a:lnSpc>
-                <a:spcPct val="115000"/>
-              </a:lnSpc>
-              <a:spcAft>
-                <a:spcPts val="600"/>
-              </a:spcAft>
-            </a:pPr>
-            <a:r>
-              <a:rPr sz="1600" b="1">
-                <a:solidFill>
-                  <a:srgbClr val="0F172A"/>
-                </a:solidFill>
-                <a:latin typeface="Cambria"/>
-              </a:rPr>
-              <a:t>Privacy</a:t>
-            </a:r>
-          </a:p>
-        </p:txBody>
-      </p:sp>
-      <p:sp>
-        <p:nvSpPr>
-          <p:cNvPr id="10" name="TextBox 9"/>
-          <p:cNvSpPr txBox="1"/>
-          <p:nvPr/>
-        </p:nvSpPr>
-        <p:spPr>
-          <a:xfrm>
-            <a:off x="4709160" y="2926080"/>
-            <a:ext cx="3017520" cy="2560320"/>
-          </a:xfrm>
-          <a:prstGeom prst="rect">
-            <a:avLst/>
-          </a:prstGeom>
-          <a:noFill/>
-        </p:spPr>
-        <p:txBody>
-          <a:bodyPr wrap="square" lIns="0" rIns="0" tIns="0" bIns="0" anchor="t">
-            <a:spAutoFit/>
-          </a:bodyPr>
-          <a:lstStyle/>
-          <a:p>
-            <a:pPr algn="l">
-              <a:lnSpc>
-                <a:spcPct val="115000"/>
-              </a:lnSpc>
-              <a:spcAft>
-                <a:spcPts val="900"/>
-              </a:spcAft>
-            </a:pPr>
-            <a:r>
-              <a:rPr sz="1250" b="0">
-                <a:solidFill>
-                  <a:srgbClr val="475569"/>
-                </a:solidFill>
-                <a:latin typeface="Calibri"/>
-              </a:rPr>
-              <a:t>Learner data stays in the browser</a:t>
-            </a:r>
-          </a:p>
-          <a:p>
-            <a:pPr algn="l">
-              <a:lnSpc>
-                <a:spcPct val="115000"/>
-              </a:lnSpc>
-              <a:spcAft>
-                <a:spcPts val="900"/>
-              </a:spcAft>
-            </a:pPr>
-            <a:r>
-              <a:rPr sz="1250" b="0">
-                <a:solidFill>
-                  <a:srgbClr val="475569"/>
-                </a:solidFill>
-                <a:latin typeface="Calibri"/>
-              </a:rPr>
-              <a:t>No SkillPath server, no account</a:t>
-            </a:r>
-          </a:p>
-          <a:p>
-            <a:pPr algn="l">
-              <a:lnSpc>
-                <a:spcPct val="115000"/>
-              </a:lnSpc>
-              <a:spcAft>
-                <a:spcPts val="900"/>
-              </a:spcAft>
-            </a:pPr>
-            <a:r>
-              <a:rPr sz="1250" b="0">
-                <a:solidFill>
-                  <a:srgbClr val="475569"/>
-                </a:solidFill>
-                <a:latin typeface="Calibri"/>
-              </a:rPr>
-              <a:t>Text goes only to the chosen provider</a:t>
-            </a:r>
-          </a:p>
-          <a:p>
-            <a:pPr algn="l">
-              <a:lnSpc>
-                <a:spcPct val="115000"/>
-              </a:lnSpc>
-              <a:spcAft>
-                <a:spcPts val="900"/>
-              </a:spcAft>
-            </a:pPr>
-            <a:r>
-              <a:rPr sz="1250" b="0">
-                <a:solidFill>
-                  <a:srgbClr val="475569"/>
-                </a:solidFill>
-                <a:latin typeface="Calibri"/>
-              </a:rPr>
-              <a:t>Free tiers may train on prompts - the app says so</a:t>
-            </a:r>
-          </a:p>
-        </p:txBody>
-      </p:sp>
-      <p:sp>
-        <p:nvSpPr>
-          <p:cNvPr id="11" name="Rounded Rectangle 10"/>
-          <p:cNvSpPr/>
-          <p:nvPr/>
-        </p:nvSpPr>
-        <p:spPr>
-          <a:xfrm>
-            <a:off x="8138160" y="2194560"/>
-            <a:ext cx="3291840" cy="3566160"/>
-          </a:xfrm>
-          <a:prstGeom prst="roundRect">
-            <a:avLst>
-              <a:gd name="adj" fmla="val 8000"/>
-            </a:avLst>
-          </a:prstGeom>
-          <a:solidFill>
-            <a:srgbClr val="1E1B4B"/>
-          </a:solidFill>
-          <a:ln>
-            <a:noFill/>
-          </a:ln>
-          <a:effectLst/>
-        </p:spPr>
-        <p:style>
-          <a:lnRef idx="1">
-            <a:schemeClr val="accent1"/>
-          </a:lnRef>
-          <a:fillRef idx="3">
-            <a:schemeClr val="accent1"/>
-          </a:fillRef>
-          <a:effectRef idx="2">
-            <a:schemeClr val="accent1"/>
-          </a:effectRef>
-          <a:fontRef idx="minor">
-            <a:schemeClr val="lt1"/>
-          </a:fontRef>
-        </p:style>
-        <p:txBody>
-          <a:bodyPr rtlCol="0" anchor="ctr"/>
-          <a:lstStyle/>
-          <a:p/>
-        </p:txBody>
-      </p:sp>
-      <p:sp>
-        <p:nvSpPr>
-          <p:cNvPr id="12" name="TextBox 11"/>
-          <p:cNvSpPr txBox="1"/>
-          <p:nvPr/>
-        </p:nvSpPr>
-        <p:spPr>
-          <a:xfrm>
-            <a:off x="8412480" y="2468880"/>
-            <a:ext cx="2743200" cy="365760"/>
-          </a:xfrm>
-          <a:prstGeom prst="rect">
-            <a:avLst/>
-          </a:prstGeom>
-          <a:noFill/>
-        </p:spPr>
-        <p:txBody>
-          <a:bodyPr wrap="square" lIns="0" rIns="0" tIns="0" bIns="0" anchor="t">
-            <a:spAutoFit/>
-          </a:bodyPr>
-          <a:lstStyle/>
-          <a:p>
-            <a:pPr algn="l">
-              <a:lnSpc>
-                <a:spcPct val="115000"/>
-              </a:lnSpc>
-              <a:spcAft>
-                <a:spcPts val="600"/>
-              </a:spcAft>
-            </a:pPr>
-            <a:r>
-              <a:rPr sz="1600" b="1">
-                <a:solidFill>
-                  <a:srgbClr val="FFFFFF"/>
-                </a:solidFill>
-                <a:latin typeface="Cambria"/>
-              </a:rPr>
-              <a:t>The caveat</a:t>
-            </a:r>
-          </a:p>
-        </p:txBody>
-      </p:sp>
-      <p:sp>
-        <p:nvSpPr>
-          <p:cNvPr id="13" name="TextBox 12"/>
-          <p:cNvSpPr txBox="1"/>
-          <p:nvPr/>
-        </p:nvSpPr>
-        <p:spPr>
-          <a:xfrm>
-            <a:off x="8412480" y="2926080"/>
-            <a:ext cx="2834640" cy="2560320"/>
-          </a:xfrm>
-          <a:prstGeom prst="rect">
-            <a:avLst/>
-          </a:prstGeom>
-          <a:noFill/>
-        </p:spPr>
-        <p:txBody>
-          <a:bodyPr wrap="square" lIns="0" rIns="0" tIns="0" bIns="0" anchor="t">
-            <a:spAutoFit/>
-          </a:bodyPr>
-          <a:lstStyle/>
-          <a:p>
-            <a:pPr algn="l">
-              <a:lnSpc>
-                <a:spcPct val="115000"/>
-              </a:lnSpc>
-              <a:spcAft>
-                <a:spcPts val="900"/>
-              </a:spcAft>
-            </a:pPr>
-            <a:r>
-              <a:rPr sz="1250" b="0">
-                <a:solidFill>
-                  <a:srgbClr val="C7D2FE"/>
-                </a:solidFill>
-                <a:latin typeface="Calibri"/>
-              </a:rPr>
-              <a:t>The API key sits in the browser.</a:t>
-            </a:r>
-          </a:p>
-          <a:p>
-            <a:pPr algn="l">
-              <a:lnSpc>
-                <a:spcPct val="115000"/>
-              </a:lnSpc>
-              <a:spcAft>
-                <a:spcPts val="900"/>
-              </a:spcAft>
-            </a:pPr>
-            <a:r>
-              <a:rPr sz="1250" b="0">
-                <a:solidFill>
-                  <a:srgbClr val="C7D2FE"/>
-                </a:solidFill>
-                <a:latin typeface="Calibri"/>
-              </a:rPr>
-              <a:t>Fine on your own machine.</a:t>
-            </a:r>
-          </a:p>
-          <a:p>
-            <a:pPr algn="l">
-              <a:lnSpc>
-                <a:spcPct val="115000"/>
-              </a:lnSpc>
-              <a:spcAft>
-                <a:spcPts val="900"/>
-              </a:spcAft>
-            </a:pPr>
-            <a:r>
-              <a:rPr sz="1250" b="0">
-                <a:solidFill>
-                  <a:srgbClr val="C7D2FE"/>
-                </a:solidFill>
-                <a:latin typeface="Calibri"/>
-              </a:rPr>
-              <a:t>Before sharing: move the calls behind a small serverless function.</a:t>
-            </a:r>
-          </a:p>
-          <a:p>
-            <a:pPr algn="l">
-              <a:lnSpc>
-                <a:spcPct val="115000"/>
-              </a:lnSpc>
-              <a:spcAft>
-                <a:spcPts val="900"/>
-              </a:spcAft>
-            </a:pPr>
-            <a:r>
-              <a:rPr sz="1250" b="0">
-                <a:solidFill>
-                  <a:srgbClr val="C7D2FE"/>
-                </a:solidFill>
-                <a:latin typeface="Calibri"/>
-              </a:rPr>
-              <a:t>That is a one-file change.</a:t>
+              <a:t>Manual smoke test for the six learner steps</a:t>
             </a:r>
           </a:p>
         </p:txBody>
@@ -9819,7 +10131,7 @@
                 </a:solidFill>
                 <a:latin typeface="Cambria"/>
               </a:rPr>
-              <a:t>Where it goes next</a:t>
+              <a:t>Cost, privacy and the honest caveat</a:t>
             </a:r>
           </a:p>
         </p:txBody>
@@ -9861,7 +10173,7 @@
                 </a:solidFill>
                 <a:latin typeface="Calibri"/>
               </a:rPr>
-              <a:t>Each step is a known, scoped change</a:t>
+              <a:t>What it costs to run, how data is protected, and the one caveat</a:t>
             </a:r>
           </a:p>
         </p:txBody>
@@ -9875,223 +10187,7 @@
         <p:spPr>
           <a:xfrm>
             <a:off x="731520" y="2194560"/>
-            <a:ext cx="10698480" cy="868680"/>
-          </a:xfrm>
-          <a:prstGeom prst="roundRect">
-            <a:avLst>
-              <a:gd name="adj" fmla="val 8000"/>
-            </a:avLst>
-          </a:prstGeom>
-          <a:solidFill>
-            <a:srgbClr val="FFFFFF"/>
-          </a:solidFill>
-          <a:ln w="12700">
-            <a:solidFill>
-              <a:srgbClr val="E2E8F0"/>
-            </a:solidFill>
-          </a:ln>
-          <a:effectLst/>
-        </p:spPr>
-        <p:style>
-          <a:lnRef idx="1">
-            <a:schemeClr val="accent1"/>
-          </a:lnRef>
-          <a:fillRef idx="3">
-            <a:schemeClr val="accent1"/>
-          </a:fillRef>
-          <a:effectRef idx="2">
-            <a:schemeClr val="accent1"/>
-          </a:effectRef>
-          <a:fontRef idx="minor">
-            <a:schemeClr val="lt1"/>
-          </a:fontRef>
-        </p:style>
-        <p:txBody>
-          <a:bodyPr rtlCol="0" anchor="ctr"/>
-          <a:lstStyle/>
-          <a:p/>
-        </p:txBody>
-      </p:sp>
-      <p:sp>
-        <p:nvSpPr>
-          <p:cNvPr id="6" name="Rounded Rectangle 5"/>
-          <p:cNvSpPr/>
-          <p:nvPr/>
-        </p:nvSpPr>
-        <p:spPr>
-          <a:xfrm>
-            <a:off x="1005840" y="2423160"/>
-            <a:ext cx="1005840" cy="411480"/>
-          </a:xfrm>
-          <a:prstGeom prst="roundRect">
-            <a:avLst>
-              <a:gd name="adj" fmla="val 30000"/>
-            </a:avLst>
-          </a:prstGeom>
-          <a:solidFill>
-            <a:srgbClr val="4F46E5"/>
-          </a:solidFill>
-          <a:ln>
-            <a:noFill/>
-          </a:ln>
-          <a:effectLst/>
-        </p:spPr>
-        <p:style>
-          <a:lnRef idx="1">
-            <a:schemeClr val="accent1"/>
-          </a:lnRef>
-          <a:fillRef idx="3">
-            <a:schemeClr val="accent1"/>
-          </a:fillRef>
-          <a:effectRef idx="2">
-            <a:schemeClr val="accent1"/>
-          </a:effectRef>
-          <a:fontRef idx="minor">
-            <a:schemeClr val="lt1"/>
-          </a:fontRef>
-        </p:style>
-        <p:txBody>
-          <a:bodyPr rtlCol="0" anchor="ctr"/>
-          <a:lstStyle/>
-          <a:p/>
-        </p:txBody>
-      </p:sp>
-      <p:sp>
-        <p:nvSpPr>
-          <p:cNvPr id="7" name="TextBox 6"/>
-          <p:cNvSpPr txBox="1"/>
-          <p:nvPr/>
-        </p:nvSpPr>
-        <p:spPr>
-          <a:xfrm>
-            <a:off x="1005840" y="2505456"/>
-            <a:ext cx="1005840" cy="274320"/>
-          </a:xfrm>
-          <a:prstGeom prst="rect">
-            <a:avLst/>
-          </a:prstGeom>
-          <a:noFill/>
-        </p:spPr>
-        <p:txBody>
-          <a:bodyPr wrap="square" lIns="0" rIns="0" tIns="0" bIns="0" anchor="t">
-            <a:spAutoFit/>
-          </a:bodyPr>
-          <a:lstStyle/>
-          <a:p>
-            <a:pPr algn="ctr">
-              <a:lnSpc>
-                <a:spcPct val="115000"/>
-              </a:lnSpc>
-              <a:spcAft>
-                <a:spcPts val="600"/>
-              </a:spcAft>
-            </a:pPr>
-            <a:r>
-              <a:rPr sz="1100" b="1">
-                <a:solidFill>
-                  <a:srgbClr val="FFFFFF"/>
-                </a:solidFill>
-                <a:latin typeface="Calibri"/>
-              </a:rPr>
-              <a:t>Next</a:t>
-            </a:r>
-          </a:p>
-        </p:txBody>
-      </p:sp>
-      <p:sp>
-        <p:nvSpPr>
-          <p:cNvPr id="8" name="TextBox 7"/>
-          <p:cNvSpPr txBox="1"/>
-          <p:nvPr/>
-        </p:nvSpPr>
-        <p:spPr>
-          <a:xfrm>
-            <a:off x="2240280" y="2377440"/>
-            <a:ext cx="3657600" cy="365760"/>
-          </a:xfrm>
-          <a:prstGeom prst="rect">
-            <a:avLst/>
-          </a:prstGeom>
-          <a:noFill/>
-        </p:spPr>
-        <p:txBody>
-          <a:bodyPr wrap="square" lIns="0" rIns="0" tIns="0" bIns="0" anchor="t">
-            <a:spAutoFit/>
-          </a:bodyPr>
-          <a:lstStyle/>
-          <a:p>
-            <a:pPr algn="l">
-              <a:lnSpc>
-                <a:spcPct val="115000"/>
-              </a:lnSpc>
-              <a:spcAft>
-                <a:spcPts val="600"/>
-              </a:spcAft>
-            </a:pPr>
-            <a:r>
-              <a:rPr sz="1500" b="1">
-                <a:solidFill>
-                  <a:srgbClr val="0F172A"/>
-                </a:solidFill>
-                <a:latin typeface="Cambria"/>
-              </a:rPr>
-              <a:t>Serverless key proxy</a:t>
-            </a:r>
-          </a:p>
-        </p:txBody>
-      </p:sp>
-      <p:sp>
-        <p:nvSpPr>
-          <p:cNvPr id="9" name="TextBox 8"/>
-          <p:cNvSpPr txBox="1"/>
-          <p:nvPr/>
-        </p:nvSpPr>
-        <p:spPr>
-          <a:xfrm>
-            <a:off x="2240280" y="2697480"/>
-            <a:ext cx="7315200" cy="274320"/>
-          </a:xfrm>
-          <a:prstGeom prst="rect">
-            <a:avLst/>
-          </a:prstGeom>
-          <a:noFill/>
-        </p:spPr>
-        <p:txBody>
-          <a:bodyPr wrap="square" lIns="0" rIns="0" tIns="0" bIns="0" anchor="t">
-            <a:spAutoFit/>
-          </a:bodyPr>
-          <a:lstStyle/>
-          <a:p>
-            <a:pPr algn="l">
-              <a:lnSpc>
-                <a:spcPct val="115000"/>
-              </a:lnSpc>
-              <a:spcAft>
-                <a:spcPts val="600"/>
-              </a:spcAft>
-            </a:pPr>
-            <a:r>
-              <a:rPr sz="1250" b="0">
-                <a:solidFill>
-                  <a:srgbClr val="475569"/>
-                </a:solidFill>
-                <a:latin typeface="Calibri"/>
-              </a:rPr>
-              <a:t>Share the app safely with a team</a:t>
-            </a:r>
-          </a:p>
-        </p:txBody>
-      </p:sp>
-      <p:sp>
-        <p:nvSpPr>
-          <p:cNvPr id="10" name="Rounded Rectangle 9"/>
-          <p:cNvSpPr/>
-          <p:nvPr/>
-        </p:nvSpPr>
-        <p:spPr>
-          <a:xfrm>
-            <a:off x="731520" y="3200400"/>
-            <a:ext cx="10698480" cy="868680"/>
+            <a:ext cx="3474720" cy="3566160"/>
           </a:xfrm>
           <a:prstGeom prst="roundRect">
             <a:avLst>
@@ -10130,400 +10226,155 @@
       </p:sp>
       <p:sp>
         <p:nvSpPr>
-          <p:cNvPr id="11" name="Rounded Rectangle 10"/>
+          <p:cNvPr id="6" name="TextBox 5"/>
+          <p:cNvSpPr txBox="1"/>
+          <p:nvPr/>
+        </p:nvSpPr>
+        <p:spPr>
+          <a:xfrm>
+            <a:off x="1005840" y="2468880"/>
+            <a:ext cx="2926080" cy="365760"/>
+          </a:xfrm>
+          <a:prstGeom prst="rect">
+            <a:avLst/>
+          </a:prstGeom>
+          <a:noFill/>
+        </p:spPr>
+        <p:txBody>
+          <a:bodyPr wrap="square" lIns="0" rIns="0" tIns="0" bIns="0" anchor="t">
+            <a:spAutoFit/>
+          </a:bodyPr>
+          <a:lstStyle/>
+          <a:p>
+            <a:pPr algn="l">
+              <a:lnSpc>
+                <a:spcPct val="115000"/>
+              </a:lnSpc>
+              <a:spcAft>
+                <a:spcPts val="600"/>
+              </a:spcAft>
+            </a:pPr>
+            <a:r>
+              <a:rPr sz="1600" b="1">
+                <a:solidFill>
+                  <a:srgbClr val="0F172A"/>
+                </a:solidFill>
+                <a:latin typeface="Cambria"/>
+              </a:rPr>
+              <a:t>Cost</a:t>
+            </a:r>
+          </a:p>
+        </p:txBody>
+      </p:sp>
+      <p:sp>
+        <p:nvSpPr>
+          <p:cNvPr id="7" name="TextBox 6"/>
+          <p:cNvSpPr txBox="1"/>
+          <p:nvPr/>
+        </p:nvSpPr>
+        <p:spPr>
+          <a:xfrm>
+            <a:off x="1005840" y="2926080"/>
+            <a:ext cx="3017520" cy="2560320"/>
+          </a:xfrm>
+          <a:prstGeom prst="rect">
+            <a:avLst/>
+          </a:prstGeom>
+          <a:noFill/>
+        </p:spPr>
+        <p:txBody>
+          <a:bodyPr wrap="square" lIns="0" rIns="0" tIns="0" bIns="0" anchor="t">
+            <a:spAutoFit/>
+          </a:bodyPr>
+          <a:lstStyle/>
+          <a:p>
+            <a:pPr algn="l">
+              <a:lnSpc>
+                <a:spcPct val="115000"/>
+              </a:lnSpc>
+              <a:spcAft>
+                <a:spcPts val="900"/>
+              </a:spcAft>
+            </a:pPr>
+            <a:r>
+              <a:rPr sz="1250" b="0">
+                <a:solidFill>
+                  <a:srgbClr val="475569"/>
+                </a:solidFill>
+                <a:latin typeface="Calibri"/>
+              </a:rPr>
+              <a:t>Free tiers cover normal learning use</a:t>
+            </a:r>
+          </a:p>
+          <a:p>
+            <a:pPr algn="l">
+              <a:lnSpc>
+                <a:spcPct val="115000"/>
+              </a:lnSpc>
+              <a:spcAft>
+                <a:spcPts val="900"/>
+              </a:spcAft>
+            </a:pPr>
+            <a:r>
+              <a:rPr sz="1250" b="0">
+                <a:solidFill>
+                  <a:srgbClr val="475569"/>
+                </a:solidFill>
+                <a:latin typeface="Calibri"/>
+              </a:rPr>
+              <a:t>Paid providers: a few cents per module</a:t>
+            </a:r>
+          </a:p>
+          <a:p>
+            <a:pPr algn="l">
+              <a:lnSpc>
+                <a:spcPct val="115000"/>
+              </a:lnSpc>
+              <a:spcAft>
+                <a:spcPts val="900"/>
+              </a:spcAft>
+            </a:pPr>
+            <a:r>
+              <a:rPr sz="1250" b="0">
+                <a:solidFill>
+                  <a:srgbClr val="475569"/>
+                </a:solidFill>
+                <a:latin typeface="Calibri"/>
+              </a:rPr>
+              <a:t>Effort defaults to low to keep usage down</a:t>
+            </a:r>
+          </a:p>
+          <a:p>
+            <a:pPr algn="l">
+              <a:lnSpc>
+                <a:spcPct val="115000"/>
+              </a:lnSpc>
+              <a:spcAft>
+                <a:spcPts val="900"/>
+              </a:spcAft>
+            </a:pPr>
+            <a:r>
+              <a:rPr sz="1250" b="0">
+                <a:solidFill>
+                  <a:srgbClr val="475569"/>
+                </a:solidFill>
+                <a:latin typeface="Calibri"/>
+              </a:rPr>
+              <a:t>Hosting: free - it is a static site</a:t>
+            </a:r>
+          </a:p>
+        </p:txBody>
+      </p:sp>
+      <p:sp>
+        <p:nvSpPr>
+          <p:cNvPr id="8" name="Rounded Rectangle 7"/>
           <p:cNvSpPr/>
           <p:nvPr/>
         </p:nvSpPr>
         <p:spPr>
           <a:xfrm>
-            <a:off x="1005840" y="3429000"/>
-            <a:ext cx="1005840" cy="411480"/>
-          </a:xfrm>
-          <a:prstGeom prst="roundRect">
-            <a:avLst>
-              <a:gd name="adj" fmla="val 30000"/>
-            </a:avLst>
-          </a:prstGeom>
-          <a:solidFill>
-            <a:srgbClr val="CBD5E1"/>
-          </a:solidFill>
-          <a:ln>
-            <a:noFill/>
-          </a:ln>
-          <a:effectLst/>
-        </p:spPr>
-        <p:style>
-          <a:lnRef idx="1">
-            <a:schemeClr val="accent1"/>
-          </a:lnRef>
-          <a:fillRef idx="3">
-            <a:schemeClr val="accent1"/>
-          </a:fillRef>
-          <a:effectRef idx="2">
-            <a:schemeClr val="accent1"/>
-          </a:effectRef>
-          <a:fontRef idx="minor">
-            <a:schemeClr val="lt1"/>
-          </a:fontRef>
-        </p:style>
-        <p:txBody>
-          <a:bodyPr rtlCol="0" anchor="ctr"/>
-          <a:lstStyle/>
-          <a:p/>
-        </p:txBody>
-      </p:sp>
-      <p:sp>
-        <p:nvSpPr>
-          <p:cNvPr id="12" name="TextBox 11"/>
-          <p:cNvSpPr txBox="1"/>
-          <p:nvPr/>
-        </p:nvSpPr>
-        <p:spPr>
-          <a:xfrm>
-            <a:off x="1005840" y="3511296"/>
-            <a:ext cx="1005840" cy="274320"/>
-          </a:xfrm>
-          <a:prstGeom prst="rect">
-            <a:avLst/>
-          </a:prstGeom>
-          <a:noFill/>
-        </p:spPr>
-        <p:txBody>
-          <a:bodyPr wrap="square" lIns="0" rIns="0" tIns="0" bIns="0" anchor="t">
-            <a:spAutoFit/>
-          </a:bodyPr>
-          <a:lstStyle/>
-          <a:p>
-            <a:pPr algn="ctr">
-              <a:lnSpc>
-                <a:spcPct val="115000"/>
-              </a:lnSpc>
-              <a:spcAft>
-                <a:spcPts val="600"/>
-              </a:spcAft>
-            </a:pPr>
-            <a:r>
-              <a:rPr sz="1100" b="1">
-                <a:solidFill>
-                  <a:srgbClr val="1E1B4B"/>
-                </a:solidFill>
-                <a:latin typeface="Calibri"/>
-              </a:rPr>
-              <a:t>Then</a:t>
-            </a:r>
-          </a:p>
-        </p:txBody>
-      </p:sp>
-      <p:sp>
-        <p:nvSpPr>
-          <p:cNvPr id="13" name="TextBox 12"/>
-          <p:cNvSpPr txBox="1"/>
-          <p:nvPr/>
-        </p:nvSpPr>
-        <p:spPr>
-          <a:xfrm>
-            <a:off x="2240280" y="3383280"/>
-            <a:ext cx="3657600" cy="365760"/>
-          </a:xfrm>
-          <a:prstGeom prst="rect">
-            <a:avLst/>
-          </a:prstGeom>
-          <a:noFill/>
-        </p:spPr>
-        <p:txBody>
-          <a:bodyPr wrap="square" lIns="0" rIns="0" tIns="0" bIns="0" anchor="t">
-            <a:spAutoFit/>
-          </a:bodyPr>
-          <a:lstStyle/>
-          <a:p>
-            <a:pPr algn="l">
-              <a:lnSpc>
-                <a:spcPct val="115000"/>
-              </a:lnSpc>
-              <a:spcAft>
-                <a:spcPts val="600"/>
-              </a:spcAft>
-            </a:pPr>
-            <a:r>
-              <a:rPr sz="1500" b="1">
-                <a:solidFill>
-                  <a:srgbClr val="0F172A"/>
-                </a:solidFill>
-                <a:latin typeface="Cambria"/>
-              </a:rPr>
-              <a:t>Accounts and sync</a:t>
-            </a:r>
-          </a:p>
-        </p:txBody>
-      </p:sp>
-      <p:sp>
-        <p:nvSpPr>
-          <p:cNvPr id="14" name="TextBox 13"/>
-          <p:cNvSpPr txBox="1"/>
-          <p:nvPr/>
-        </p:nvSpPr>
-        <p:spPr>
-          <a:xfrm>
-            <a:off x="2240280" y="3703320"/>
-            <a:ext cx="7315200" cy="274320"/>
-          </a:xfrm>
-          <a:prstGeom prst="rect">
-            <a:avLst/>
-          </a:prstGeom>
-          <a:noFill/>
-        </p:spPr>
-        <p:txBody>
-          <a:bodyPr wrap="square" lIns="0" rIns="0" tIns="0" bIns="0" anchor="t">
-            <a:spAutoFit/>
-          </a:bodyPr>
-          <a:lstStyle/>
-          <a:p>
-            <a:pPr algn="l">
-              <a:lnSpc>
-                <a:spcPct val="115000"/>
-              </a:lnSpc>
-              <a:spcAft>
-                <a:spcPts val="600"/>
-              </a:spcAft>
-            </a:pPr>
-            <a:r>
-              <a:rPr sz="1250" b="0">
-                <a:solidFill>
-                  <a:srgbClr val="475569"/>
-                </a:solidFill>
-                <a:latin typeface="Calibri"/>
-              </a:rPr>
-              <a:t>Progress across devices; replace storage.ts</a:t>
-            </a:r>
-          </a:p>
-        </p:txBody>
-      </p:sp>
-      <p:sp>
-        <p:nvSpPr>
-          <p:cNvPr id="15" name="Rounded Rectangle 14"/>
-          <p:cNvSpPr/>
-          <p:nvPr/>
-        </p:nvSpPr>
-        <p:spPr>
-          <a:xfrm>
-            <a:off x="731520" y="4206240"/>
-            <a:ext cx="10698480" cy="868680"/>
-          </a:xfrm>
-          <a:prstGeom prst="roundRect">
-            <a:avLst>
-              <a:gd name="adj" fmla="val 8000"/>
-            </a:avLst>
-          </a:prstGeom>
-          <a:solidFill>
-            <a:srgbClr val="FFFFFF"/>
-          </a:solidFill>
-          <a:ln w="12700">
-            <a:solidFill>
-              <a:srgbClr val="E2E8F0"/>
-            </a:solidFill>
-          </a:ln>
-          <a:effectLst/>
-        </p:spPr>
-        <p:style>
-          <a:lnRef idx="1">
-            <a:schemeClr val="accent1"/>
-          </a:lnRef>
-          <a:fillRef idx="3">
-            <a:schemeClr val="accent1"/>
-          </a:fillRef>
-          <a:effectRef idx="2">
-            <a:schemeClr val="accent1"/>
-          </a:effectRef>
-          <a:fontRef idx="minor">
-            <a:schemeClr val="lt1"/>
-          </a:fontRef>
-        </p:style>
-        <p:txBody>
-          <a:bodyPr rtlCol="0" anchor="ctr"/>
-          <a:lstStyle/>
-          <a:p/>
-        </p:txBody>
-      </p:sp>
-      <p:sp>
-        <p:nvSpPr>
-          <p:cNvPr id="16" name="Rounded Rectangle 15"/>
-          <p:cNvSpPr/>
-          <p:nvPr/>
-        </p:nvSpPr>
-        <p:spPr>
-          <a:xfrm>
-            <a:off x="1005840" y="4434840"/>
-            <a:ext cx="1005840" cy="411480"/>
-          </a:xfrm>
-          <a:prstGeom prst="roundRect">
-            <a:avLst>
-              <a:gd name="adj" fmla="val 30000"/>
-            </a:avLst>
-          </a:prstGeom>
-          <a:solidFill>
-            <a:srgbClr val="CBD5E1"/>
-          </a:solidFill>
-          <a:ln>
-            <a:noFill/>
-          </a:ln>
-          <a:effectLst/>
-        </p:spPr>
-        <p:style>
-          <a:lnRef idx="1">
-            <a:schemeClr val="accent1"/>
-          </a:lnRef>
-          <a:fillRef idx="3">
-            <a:schemeClr val="accent1"/>
-          </a:fillRef>
-          <a:effectRef idx="2">
-            <a:schemeClr val="accent1"/>
-          </a:effectRef>
-          <a:fontRef idx="minor">
-            <a:schemeClr val="lt1"/>
-          </a:fontRef>
-        </p:style>
-        <p:txBody>
-          <a:bodyPr rtlCol="0" anchor="ctr"/>
-          <a:lstStyle/>
-          <a:p/>
-        </p:txBody>
-      </p:sp>
-      <p:sp>
-        <p:nvSpPr>
-          <p:cNvPr id="17" name="TextBox 16"/>
-          <p:cNvSpPr txBox="1"/>
-          <p:nvPr/>
-        </p:nvSpPr>
-        <p:spPr>
-          <a:xfrm>
-            <a:off x="1005840" y="4517136"/>
-            <a:ext cx="1005840" cy="274320"/>
-          </a:xfrm>
-          <a:prstGeom prst="rect">
-            <a:avLst/>
-          </a:prstGeom>
-          <a:noFill/>
-        </p:spPr>
-        <p:txBody>
-          <a:bodyPr wrap="square" lIns="0" rIns="0" tIns="0" bIns="0" anchor="t">
-            <a:spAutoFit/>
-          </a:bodyPr>
-          <a:lstStyle/>
-          <a:p>
-            <a:pPr algn="ctr">
-              <a:lnSpc>
-                <a:spcPct val="115000"/>
-              </a:lnSpc>
-              <a:spcAft>
-                <a:spcPts val="600"/>
-              </a:spcAft>
-            </a:pPr>
-            <a:r>
-              <a:rPr sz="1100" b="1">
-                <a:solidFill>
-                  <a:srgbClr val="1E1B4B"/>
-                </a:solidFill>
-                <a:latin typeface="Calibri"/>
-              </a:rPr>
-              <a:t>Then</a:t>
-            </a:r>
-          </a:p>
-        </p:txBody>
-      </p:sp>
-      <p:sp>
-        <p:nvSpPr>
-          <p:cNvPr id="18" name="TextBox 17"/>
-          <p:cNvSpPr txBox="1"/>
-          <p:nvPr/>
-        </p:nvSpPr>
-        <p:spPr>
-          <a:xfrm>
-            <a:off x="2240280" y="4389120"/>
-            <a:ext cx="3657600" cy="365760"/>
-          </a:xfrm>
-          <a:prstGeom prst="rect">
-            <a:avLst/>
-          </a:prstGeom>
-          <a:noFill/>
-        </p:spPr>
-        <p:txBody>
-          <a:bodyPr wrap="square" lIns="0" rIns="0" tIns="0" bIns="0" anchor="t">
-            <a:spAutoFit/>
-          </a:bodyPr>
-          <a:lstStyle/>
-          <a:p>
-            <a:pPr algn="l">
-              <a:lnSpc>
-                <a:spcPct val="115000"/>
-              </a:lnSpc>
-              <a:spcAft>
-                <a:spcPts val="600"/>
-              </a:spcAft>
-            </a:pPr>
-            <a:r>
-              <a:rPr sz="1500" b="1">
-                <a:solidFill>
-                  <a:srgbClr val="0F172A"/>
-                </a:solidFill>
-                <a:latin typeface="Cambria"/>
-              </a:rPr>
-              <a:t>Manager / trainer view</a:t>
-            </a:r>
-          </a:p>
-        </p:txBody>
-      </p:sp>
-      <p:sp>
-        <p:nvSpPr>
-          <p:cNvPr id="19" name="TextBox 18"/>
-          <p:cNvSpPr txBox="1"/>
-          <p:nvPr/>
-        </p:nvSpPr>
-        <p:spPr>
-          <a:xfrm>
-            <a:off x="2240280" y="4709159"/>
-            <a:ext cx="7315200" cy="274320"/>
-          </a:xfrm>
-          <a:prstGeom prst="rect">
-            <a:avLst/>
-          </a:prstGeom>
-          <a:noFill/>
-        </p:spPr>
-        <p:txBody>
-          <a:bodyPr wrap="square" lIns="0" rIns="0" tIns="0" bIns="0" anchor="t">
-            <a:spAutoFit/>
-          </a:bodyPr>
-          <a:lstStyle/>
-          <a:p>
-            <a:pPr algn="l">
-              <a:lnSpc>
-                <a:spcPct val="115000"/>
-              </a:lnSpc>
-              <a:spcAft>
-                <a:spcPts val="600"/>
-              </a:spcAft>
-            </a:pPr>
-            <a:r>
-              <a:rPr sz="1250" b="0">
-                <a:solidFill>
-                  <a:srgbClr val="475569"/>
-                </a:solidFill>
-                <a:latin typeface="Calibri"/>
-              </a:rPr>
-              <a:t>Team skill profiles and gaps in one place</a:t>
-            </a:r>
-          </a:p>
-        </p:txBody>
-      </p:sp>
-      <p:sp>
-        <p:nvSpPr>
-          <p:cNvPr id="20" name="Rounded Rectangle 19"/>
-          <p:cNvSpPr/>
-          <p:nvPr/>
-        </p:nvSpPr>
-        <p:spPr>
-          <a:xfrm>
-            <a:off x="731520" y="5212080"/>
-            <a:ext cx="10698480" cy="868680"/>
+            <a:off x="4434840" y="2194560"/>
+            <a:ext cx="3474720" cy="3566160"/>
           </a:xfrm>
           <a:prstGeom prst="roundRect">
             <a:avLst>
@@ -10562,22 +10413,182 @@
       </p:sp>
       <p:sp>
         <p:nvSpPr>
-          <p:cNvPr id="21" name="Rounded Rectangle 20"/>
+          <p:cNvPr id="9" name="TextBox 8"/>
+          <p:cNvSpPr txBox="1"/>
+          <p:nvPr/>
+        </p:nvSpPr>
+        <p:spPr>
+          <a:xfrm>
+            <a:off x="4709160" y="2468880"/>
+            <a:ext cx="2926080" cy="365760"/>
+          </a:xfrm>
+          <a:prstGeom prst="rect">
+            <a:avLst/>
+          </a:prstGeom>
+          <a:noFill/>
+        </p:spPr>
+        <p:txBody>
+          <a:bodyPr wrap="square" lIns="0" rIns="0" tIns="0" bIns="0" anchor="t">
+            <a:spAutoFit/>
+          </a:bodyPr>
+          <a:lstStyle/>
+          <a:p>
+            <a:pPr algn="l">
+              <a:lnSpc>
+                <a:spcPct val="115000"/>
+              </a:lnSpc>
+              <a:spcAft>
+                <a:spcPts val="600"/>
+              </a:spcAft>
+            </a:pPr>
+            <a:r>
+              <a:rPr sz="1600" b="1">
+                <a:solidFill>
+                  <a:srgbClr val="0F172A"/>
+                </a:solidFill>
+                <a:latin typeface="Cambria"/>
+              </a:rPr>
+              <a:t>Privacy</a:t>
+            </a:r>
+          </a:p>
+        </p:txBody>
+      </p:sp>
+      <p:sp>
+        <p:nvSpPr>
+          <p:cNvPr id="10" name="TextBox 9"/>
+          <p:cNvSpPr txBox="1"/>
+          <p:nvPr/>
+        </p:nvSpPr>
+        <p:spPr>
+          <a:xfrm>
+            <a:off x="4709160" y="2926080"/>
+            <a:ext cx="3017520" cy="2560320"/>
+          </a:xfrm>
+          <a:prstGeom prst="rect">
+            <a:avLst/>
+          </a:prstGeom>
+          <a:noFill/>
+        </p:spPr>
+        <p:txBody>
+          <a:bodyPr wrap="square" lIns="0" rIns="0" tIns="0" bIns="0" anchor="t">
+            <a:spAutoFit/>
+          </a:bodyPr>
+          <a:lstStyle/>
+          <a:p>
+            <a:pPr algn="l">
+              <a:lnSpc>
+                <a:spcPct val="115000"/>
+              </a:lnSpc>
+              <a:spcAft>
+                <a:spcPts val="900"/>
+              </a:spcAft>
+            </a:pPr>
+            <a:r>
+              <a:rPr sz="1250" b="0">
+                <a:solidFill>
+                  <a:srgbClr val="475569"/>
+                </a:solidFill>
+                <a:latin typeface="Calibri"/>
+              </a:rPr>
+              <a:t>Learner data stays on the device</a:t>
+            </a:r>
+          </a:p>
+          <a:p>
+            <a:pPr algn="l">
+              <a:lnSpc>
+                <a:spcPct val="115000"/>
+              </a:lnSpc>
+              <a:spcAft>
+                <a:spcPts val="900"/>
+              </a:spcAft>
+            </a:pPr>
+            <a:r>
+              <a:rPr sz="1250" b="0">
+                <a:solidFill>
+                  <a:srgbClr val="475569"/>
+                </a:solidFill>
+                <a:latin typeface="Calibri"/>
+              </a:rPr>
+              <a:t>No SkillPath server, no account</a:t>
+            </a:r>
+          </a:p>
+          <a:p>
+            <a:pPr algn="l">
+              <a:lnSpc>
+                <a:spcPct val="115000"/>
+              </a:lnSpc>
+              <a:spcAft>
+                <a:spcPts val="900"/>
+              </a:spcAft>
+            </a:pPr>
+            <a:r>
+              <a:rPr sz="1250" b="0">
+                <a:solidFill>
+                  <a:srgbClr val="475569"/>
+                </a:solidFill>
+                <a:latin typeface="Calibri"/>
+              </a:rPr>
+              <a:t>Text goes only to the chosen provider</a:t>
+            </a:r>
+          </a:p>
+          <a:p>
+            <a:pPr algn="l">
+              <a:lnSpc>
+                <a:spcPct val="115000"/>
+              </a:lnSpc>
+              <a:spcAft>
+                <a:spcPts val="900"/>
+              </a:spcAft>
+            </a:pPr>
+            <a:r>
+              <a:rPr sz="1250" b="0">
+                <a:solidFill>
+                  <a:srgbClr val="475569"/>
+                </a:solidFill>
+                <a:latin typeface="Calibri"/>
+              </a:rPr>
+              <a:t>Backups are a file the learner keeps</a:t>
+            </a:r>
+          </a:p>
+          <a:p>
+            <a:pPr algn="l">
+              <a:lnSpc>
+                <a:spcPct val="115000"/>
+              </a:lnSpc>
+              <a:spcAft>
+                <a:spcPts val="900"/>
+              </a:spcAft>
+            </a:pPr>
+            <a:r>
+              <a:rPr sz="1250" b="0">
+                <a:solidFill>
+                  <a:srgbClr val="475569"/>
+                </a:solidFill>
+                <a:latin typeface="Calibri"/>
+              </a:rPr>
+              <a:t>Free tiers may train on prompts - the app says so</a:t>
+            </a:r>
+          </a:p>
+        </p:txBody>
+      </p:sp>
+      <p:sp>
+        <p:nvSpPr>
+          <p:cNvPr id="11" name="Rounded Rectangle 10"/>
           <p:cNvSpPr/>
           <p:nvPr/>
         </p:nvSpPr>
         <p:spPr>
           <a:xfrm>
-            <a:off x="1005840" y="5440680"/>
-            <a:ext cx="1005840" cy="411480"/>
+            <a:off x="8138160" y="2194560"/>
+            <a:ext cx="3291840" cy="3566160"/>
           </a:xfrm>
           <a:prstGeom prst="roundRect">
             <a:avLst>
-              <a:gd name="adj" fmla="val 30000"/>
+              <a:gd name="adj" fmla="val 8000"/>
             </a:avLst>
           </a:prstGeom>
           <a:solidFill>
-            <a:srgbClr val="CBD5E1"/>
+            <a:srgbClr val="1E1B4B"/>
           </a:solidFill>
           <a:ln>
             <a:noFill/>
@@ -10606,126 +10617,141 @@
       </p:sp>
       <p:sp>
         <p:nvSpPr>
-          <p:cNvPr id="22" name="TextBox 21"/>
-          <p:cNvSpPr txBox="1"/>
-          <p:nvPr/>
-        </p:nvSpPr>
-        <p:spPr>
-          <a:xfrm>
-            <a:off x="1005840" y="5522976"/>
-            <a:ext cx="1005840" cy="274320"/>
-          </a:xfrm>
-          <a:prstGeom prst="rect">
-            <a:avLst/>
-          </a:prstGeom>
-          <a:noFill/>
-        </p:spPr>
-        <p:txBody>
-          <a:bodyPr wrap="square" lIns="0" rIns="0" tIns="0" bIns="0" anchor="t">
-            <a:spAutoFit/>
-          </a:bodyPr>
-          <a:lstStyle/>
-          <a:p>
-            <a:pPr algn="ctr">
-              <a:lnSpc>
-                <a:spcPct val="115000"/>
-              </a:lnSpc>
-              <a:spcAft>
-                <a:spcPts val="600"/>
-              </a:spcAft>
-            </a:pPr>
-            <a:r>
-              <a:rPr sz="1100" b="1">
-                <a:solidFill>
-                  <a:srgbClr val="1E1B4B"/>
+          <p:cNvPr id="12" name="TextBox 11"/>
+          <p:cNvSpPr txBox="1"/>
+          <p:nvPr/>
+        </p:nvSpPr>
+        <p:spPr>
+          <a:xfrm>
+            <a:off x="8412480" y="2468880"/>
+            <a:ext cx="2743200" cy="365760"/>
+          </a:xfrm>
+          <a:prstGeom prst="rect">
+            <a:avLst/>
+          </a:prstGeom>
+          <a:noFill/>
+        </p:spPr>
+        <p:txBody>
+          <a:bodyPr wrap="square" lIns="0" rIns="0" tIns="0" bIns="0" anchor="t">
+            <a:spAutoFit/>
+          </a:bodyPr>
+          <a:lstStyle/>
+          <a:p>
+            <a:pPr algn="l">
+              <a:lnSpc>
+                <a:spcPct val="115000"/>
+              </a:lnSpc>
+              <a:spcAft>
+                <a:spcPts val="600"/>
+              </a:spcAft>
+            </a:pPr>
+            <a:r>
+              <a:rPr sz="1600" b="1">
+                <a:solidFill>
+                  <a:srgbClr val="FFFFFF"/>
+                </a:solidFill>
+                <a:latin typeface="Cambria"/>
+              </a:rPr>
+              <a:t>The caveat</a:t>
+            </a:r>
+          </a:p>
+        </p:txBody>
+      </p:sp>
+      <p:sp>
+        <p:nvSpPr>
+          <p:cNvPr id="13" name="TextBox 12"/>
+          <p:cNvSpPr txBox="1"/>
+          <p:nvPr/>
+        </p:nvSpPr>
+        <p:spPr>
+          <a:xfrm>
+            <a:off x="8412480" y="2926080"/>
+            <a:ext cx="2834640" cy="2560320"/>
+          </a:xfrm>
+          <a:prstGeom prst="rect">
+            <a:avLst/>
+          </a:prstGeom>
+          <a:noFill/>
+        </p:spPr>
+        <p:txBody>
+          <a:bodyPr wrap="square" lIns="0" rIns="0" tIns="0" bIns="0" anchor="t">
+            <a:spAutoFit/>
+          </a:bodyPr>
+          <a:lstStyle/>
+          <a:p>
+            <a:pPr algn="l">
+              <a:lnSpc>
+                <a:spcPct val="115000"/>
+              </a:lnSpc>
+              <a:spcAft>
+                <a:spcPts val="900"/>
+              </a:spcAft>
+            </a:pPr>
+            <a:r>
+              <a:rPr sz="1250" b="0">
+                <a:solidFill>
+                  <a:srgbClr val="C7D2FE"/>
                 </a:solidFill>
                 <a:latin typeface="Calibri"/>
               </a:rPr>
-              <a:t>Later</a:t>
-            </a:r>
-          </a:p>
-        </p:txBody>
-      </p:sp>
-      <p:sp>
-        <p:nvSpPr>
-          <p:cNvPr id="23" name="TextBox 22"/>
-          <p:cNvSpPr txBox="1"/>
-          <p:nvPr/>
-        </p:nvSpPr>
-        <p:spPr>
-          <a:xfrm>
-            <a:off x="2240280" y="5394960"/>
-            <a:ext cx="3657600" cy="365760"/>
-          </a:xfrm>
-          <a:prstGeom prst="rect">
-            <a:avLst/>
-          </a:prstGeom>
-          <a:noFill/>
-        </p:spPr>
-        <p:txBody>
-          <a:bodyPr wrap="square" lIns="0" rIns="0" tIns="0" bIns="0" anchor="t">
-            <a:spAutoFit/>
-          </a:bodyPr>
-          <a:lstStyle/>
-          <a:p>
-            <a:pPr algn="l">
-              <a:lnSpc>
-                <a:spcPct val="115000"/>
-              </a:lnSpc>
-              <a:spcAft>
-                <a:spcPts val="600"/>
-              </a:spcAft>
-            </a:pPr>
-            <a:r>
-              <a:rPr sz="1500" b="1">
-                <a:solidFill>
-                  <a:srgbClr val="0F172A"/>
-                </a:solidFill>
-                <a:latin typeface="Cambria"/>
-              </a:rPr>
-              <a:t>Content hooks</a:t>
-            </a:r>
-          </a:p>
-        </p:txBody>
-      </p:sp>
-      <p:sp>
-        <p:nvSpPr>
-          <p:cNvPr id="24" name="TextBox 23"/>
-          <p:cNvSpPr txBox="1"/>
-          <p:nvPr/>
-        </p:nvSpPr>
-        <p:spPr>
-          <a:xfrm>
-            <a:off x="2240280" y="5715000"/>
-            <a:ext cx="7315200" cy="274320"/>
-          </a:xfrm>
-          <a:prstGeom prst="rect">
-            <a:avLst/>
-          </a:prstGeom>
-          <a:noFill/>
-        </p:spPr>
-        <p:txBody>
-          <a:bodyPr wrap="square" lIns="0" rIns="0" tIns="0" bIns="0" anchor="t">
-            <a:spAutoFit/>
-          </a:bodyPr>
-          <a:lstStyle/>
-          <a:p>
-            <a:pPr algn="l">
-              <a:lnSpc>
-                <a:spcPct val="115000"/>
-              </a:lnSpc>
-              <a:spcAft>
-                <a:spcPts val="600"/>
+              <a:t>Each learner brings their own API key - Gemini's is free.</a:t>
+            </a:r>
+          </a:p>
+          <a:p>
+            <a:pPr algn="l">
+              <a:lnSpc>
+                <a:spcPct val="115000"/>
+              </a:lnSpc>
+              <a:spcAft>
+                <a:spcPts val="900"/>
               </a:spcAft>
             </a:pPr>
             <a:r>
               <a:rPr sz="1250" b="0">
                 <a:solidFill>
-                  <a:srgbClr val="475569"/>
+                  <a:srgbClr val="C7D2FE"/>
                 </a:solidFill>
                 <a:latin typeface="Calibri"/>
               </a:rPr>
-              <a:t>Plug in internal wikis and course catalogues</a:t>
+              <a:t>It is encrypted on their device and never ships in the app.</a:t>
+            </a:r>
+          </a:p>
+          <a:p>
+            <a:pPr algn="l">
+              <a:lnSpc>
+                <a:spcPct val="115000"/>
+              </a:lnSpc>
+              <a:spcAft>
+                <a:spcPts val="900"/>
+              </a:spcAft>
+            </a:pPr>
+            <a:r>
+              <a:rPr sz="1250" b="0">
+                <a:solidFill>
+                  <a:srgbClr val="C7D2FE"/>
+                </a:solidFill>
+                <a:latin typeface="Calibri"/>
+              </a:rPr>
+              <a:t>To let people learn without a key: a small serverless proxy.</a:t>
+            </a:r>
+          </a:p>
+          <a:p>
+            <a:pPr algn="l">
+              <a:lnSpc>
+                <a:spcPct val="115000"/>
+              </a:lnSpc>
+              <a:spcAft>
+                <a:spcPts val="900"/>
+              </a:spcAft>
+            </a:pPr>
+            <a:r>
+              <a:rPr sz="1250" b="0">
+                <a:solidFill>
+                  <a:srgbClr val="C7D2FE"/>
+                </a:solidFill>
+                <a:latin typeface="Calibri"/>
+              </a:rPr>
+              <a:t>That is a one-file change.</a:t>
             </a:r>
           </a:p>
         </p:txBody>
@@ -10763,6 +10789,1016 @@
             <a:avLst/>
           </a:prstGeom>
           <a:solidFill>
+            <a:srgbClr val="FFFFFF"/>
+          </a:solidFill>
+          <a:ln>
+            <a:noFill/>
+          </a:ln>
+          <a:effectLst/>
+        </p:spPr>
+        <p:style>
+          <a:lnRef idx="1">
+            <a:schemeClr val="accent1"/>
+          </a:lnRef>
+          <a:fillRef idx="3">
+            <a:schemeClr val="accent1"/>
+          </a:fillRef>
+          <a:effectRef idx="2">
+            <a:schemeClr val="accent1"/>
+          </a:effectRef>
+          <a:fontRef idx="minor">
+            <a:schemeClr val="lt1"/>
+          </a:fontRef>
+        </p:style>
+        <p:txBody>
+          <a:bodyPr rtlCol="0" anchor="ctr"/>
+          <a:lstStyle/>
+          <a:p>
+            <a:pPr algn="ctr"/>
+          </a:p>
+        </p:txBody>
+      </p:sp>
+      <p:sp>
+        <p:nvSpPr>
+          <p:cNvPr id="3" name="TextBox 2"/>
+          <p:cNvSpPr txBox="1"/>
+          <p:nvPr/>
+        </p:nvSpPr>
+        <p:spPr>
+          <a:xfrm>
+            <a:off x="731520" y="502920"/>
+            <a:ext cx="10789920" cy="822960"/>
+          </a:xfrm>
+          <a:prstGeom prst="rect">
+            <a:avLst/>
+          </a:prstGeom>
+          <a:noFill/>
+        </p:spPr>
+        <p:txBody>
+          <a:bodyPr wrap="square" lIns="0" rIns="0" tIns="0" bIns="0" anchor="t">
+            <a:spAutoFit/>
+          </a:bodyPr>
+          <a:lstStyle/>
+          <a:p>
+            <a:pPr algn="l">
+              <a:lnSpc>
+                <a:spcPct val="115000"/>
+              </a:lnSpc>
+              <a:spcAft>
+                <a:spcPts val="600"/>
+              </a:spcAft>
+            </a:pPr>
+            <a:r>
+              <a:rPr sz="3400" b="1">
+                <a:solidFill>
+                  <a:srgbClr val="0F172A"/>
+                </a:solidFill>
+                <a:latin typeface="Cambria"/>
+              </a:rPr>
+              <a:t>Where it goes next</a:t>
+            </a:r>
+          </a:p>
+        </p:txBody>
+      </p:sp>
+      <p:sp>
+        <p:nvSpPr>
+          <p:cNvPr id="4" name="TextBox 3"/>
+          <p:cNvSpPr txBox="1"/>
+          <p:nvPr/>
+        </p:nvSpPr>
+        <p:spPr>
+          <a:xfrm>
+            <a:off x="731520" y="1325880"/>
+            <a:ext cx="10789920" cy="457200"/>
+          </a:xfrm>
+          <a:prstGeom prst="rect">
+            <a:avLst/>
+          </a:prstGeom>
+          <a:noFill/>
+        </p:spPr>
+        <p:txBody>
+          <a:bodyPr wrap="square" lIns="0" rIns="0" tIns="0" bIns="0" anchor="t">
+            <a:spAutoFit/>
+          </a:bodyPr>
+          <a:lstStyle/>
+          <a:p>
+            <a:pPr algn="l">
+              <a:lnSpc>
+                <a:spcPct val="115000"/>
+              </a:lnSpc>
+              <a:spcAft>
+                <a:spcPts val="600"/>
+              </a:spcAft>
+            </a:pPr>
+            <a:r>
+              <a:rPr sz="1500" b="0">
+                <a:solidFill>
+                  <a:srgbClr val="475569"/>
+                </a:solidFill>
+                <a:latin typeface="Calibri"/>
+              </a:rPr>
+              <a:t>Each step is a known, scoped change</a:t>
+            </a:r>
+          </a:p>
+        </p:txBody>
+      </p:sp>
+      <p:sp>
+        <p:nvSpPr>
+          <p:cNvPr id="5" name="Rounded Rectangle 4"/>
+          <p:cNvSpPr/>
+          <p:nvPr/>
+        </p:nvSpPr>
+        <p:spPr>
+          <a:xfrm>
+            <a:off x="731520" y="2194560"/>
+            <a:ext cx="10698480" cy="868680"/>
+          </a:xfrm>
+          <a:prstGeom prst="roundRect">
+            <a:avLst>
+              <a:gd name="adj" fmla="val 8000"/>
+            </a:avLst>
+          </a:prstGeom>
+          <a:solidFill>
+            <a:srgbClr val="FFFFFF"/>
+          </a:solidFill>
+          <a:ln w="12700">
+            <a:solidFill>
+              <a:srgbClr val="E2E8F0"/>
+            </a:solidFill>
+          </a:ln>
+          <a:effectLst/>
+        </p:spPr>
+        <p:style>
+          <a:lnRef idx="1">
+            <a:schemeClr val="accent1"/>
+          </a:lnRef>
+          <a:fillRef idx="3">
+            <a:schemeClr val="accent1"/>
+          </a:fillRef>
+          <a:effectRef idx="2">
+            <a:schemeClr val="accent1"/>
+          </a:effectRef>
+          <a:fontRef idx="minor">
+            <a:schemeClr val="lt1"/>
+          </a:fontRef>
+        </p:style>
+        <p:txBody>
+          <a:bodyPr rtlCol="0" anchor="ctr"/>
+          <a:lstStyle/>
+          <a:p/>
+        </p:txBody>
+      </p:sp>
+      <p:sp>
+        <p:nvSpPr>
+          <p:cNvPr id="6" name="Rounded Rectangle 5"/>
+          <p:cNvSpPr/>
+          <p:nvPr/>
+        </p:nvSpPr>
+        <p:spPr>
+          <a:xfrm>
+            <a:off x="1005840" y="2423160"/>
+            <a:ext cx="1005840" cy="411480"/>
+          </a:xfrm>
+          <a:prstGeom prst="roundRect">
+            <a:avLst>
+              <a:gd name="adj" fmla="val 30000"/>
+            </a:avLst>
+          </a:prstGeom>
+          <a:solidFill>
+            <a:srgbClr val="4F46E5"/>
+          </a:solidFill>
+          <a:ln>
+            <a:noFill/>
+          </a:ln>
+          <a:effectLst/>
+        </p:spPr>
+        <p:style>
+          <a:lnRef idx="1">
+            <a:schemeClr val="accent1"/>
+          </a:lnRef>
+          <a:fillRef idx="3">
+            <a:schemeClr val="accent1"/>
+          </a:fillRef>
+          <a:effectRef idx="2">
+            <a:schemeClr val="accent1"/>
+          </a:effectRef>
+          <a:fontRef idx="minor">
+            <a:schemeClr val="lt1"/>
+          </a:fontRef>
+        </p:style>
+        <p:txBody>
+          <a:bodyPr rtlCol="0" anchor="ctr"/>
+          <a:lstStyle/>
+          <a:p/>
+        </p:txBody>
+      </p:sp>
+      <p:sp>
+        <p:nvSpPr>
+          <p:cNvPr id="7" name="TextBox 6"/>
+          <p:cNvSpPr txBox="1"/>
+          <p:nvPr/>
+        </p:nvSpPr>
+        <p:spPr>
+          <a:xfrm>
+            <a:off x="1005840" y="2505456"/>
+            <a:ext cx="1005840" cy="274320"/>
+          </a:xfrm>
+          <a:prstGeom prst="rect">
+            <a:avLst/>
+          </a:prstGeom>
+          <a:noFill/>
+        </p:spPr>
+        <p:txBody>
+          <a:bodyPr wrap="square" lIns="0" rIns="0" tIns="0" bIns="0" anchor="t">
+            <a:spAutoFit/>
+          </a:bodyPr>
+          <a:lstStyle/>
+          <a:p>
+            <a:pPr algn="ctr">
+              <a:lnSpc>
+                <a:spcPct val="115000"/>
+              </a:lnSpc>
+              <a:spcAft>
+                <a:spcPts val="600"/>
+              </a:spcAft>
+            </a:pPr>
+            <a:r>
+              <a:rPr sz="1100" b="1">
+                <a:solidFill>
+                  <a:srgbClr val="FFFFFF"/>
+                </a:solidFill>
+                <a:latin typeface="Calibri"/>
+              </a:rPr>
+              <a:t>Done</a:t>
+            </a:r>
+          </a:p>
+        </p:txBody>
+      </p:sp>
+      <p:sp>
+        <p:nvSpPr>
+          <p:cNvPr id="8" name="TextBox 7"/>
+          <p:cNvSpPr txBox="1"/>
+          <p:nvPr/>
+        </p:nvSpPr>
+        <p:spPr>
+          <a:xfrm>
+            <a:off x="2240280" y="2377440"/>
+            <a:ext cx="3657600" cy="365760"/>
+          </a:xfrm>
+          <a:prstGeom prst="rect">
+            <a:avLst/>
+          </a:prstGeom>
+          <a:noFill/>
+        </p:spPr>
+        <p:txBody>
+          <a:bodyPr wrap="square" lIns="0" rIns="0" tIns="0" bIns="0" anchor="t">
+            <a:spAutoFit/>
+          </a:bodyPr>
+          <a:lstStyle/>
+          <a:p>
+            <a:pPr algn="l">
+              <a:lnSpc>
+                <a:spcPct val="115000"/>
+              </a:lnSpc>
+              <a:spcAft>
+                <a:spcPts val="600"/>
+              </a:spcAft>
+            </a:pPr>
+            <a:r>
+              <a:rPr sz="1500" b="1">
+                <a:solidFill>
+                  <a:srgbClr val="0F172A"/>
+                </a:solidFill>
+                <a:latin typeface="Cambria"/>
+              </a:rPr>
+              <a:t>Installable app, encrypted keys</a:t>
+            </a:r>
+          </a:p>
+        </p:txBody>
+      </p:sp>
+      <p:sp>
+        <p:nvSpPr>
+          <p:cNvPr id="9" name="TextBox 8"/>
+          <p:cNvSpPr txBox="1"/>
+          <p:nvPr/>
+        </p:nvSpPr>
+        <p:spPr>
+          <a:xfrm>
+            <a:off x="2240280" y="2697480"/>
+            <a:ext cx="7315200" cy="274320"/>
+          </a:xfrm>
+          <a:prstGeom prst="rect">
+            <a:avLst/>
+          </a:prstGeom>
+          <a:noFill/>
+        </p:spPr>
+        <p:txBody>
+          <a:bodyPr wrap="square" lIns="0" rIns="0" tIns="0" bIns="0" anchor="t">
+            <a:spAutoFit/>
+          </a:bodyPr>
+          <a:lstStyle/>
+          <a:p>
+            <a:pPr algn="l">
+              <a:lnSpc>
+                <a:spcPct val="115000"/>
+              </a:lnSpc>
+              <a:spcAft>
+                <a:spcPts val="600"/>
+              </a:spcAft>
+            </a:pPr>
+            <a:r>
+              <a:rPr sz="1250" b="0">
+                <a:solidFill>
+                  <a:srgbClr val="475569"/>
+                </a:solidFill>
+                <a:latin typeface="Calibri"/>
+              </a:rPr>
+              <a:t>Offline use, backup and restore, Gemini by default</a:t>
+            </a:r>
+          </a:p>
+        </p:txBody>
+      </p:sp>
+      <p:sp>
+        <p:nvSpPr>
+          <p:cNvPr id="10" name="Rounded Rectangle 9"/>
+          <p:cNvSpPr/>
+          <p:nvPr/>
+        </p:nvSpPr>
+        <p:spPr>
+          <a:xfrm>
+            <a:off x="731520" y="3200400"/>
+            <a:ext cx="10698480" cy="868680"/>
+          </a:xfrm>
+          <a:prstGeom prst="roundRect">
+            <a:avLst>
+              <a:gd name="adj" fmla="val 8000"/>
+            </a:avLst>
+          </a:prstGeom>
+          <a:solidFill>
+            <a:srgbClr val="F8FAFC"/>
+          </a:solidFill>
+          <a:ln w="12700">
+            <a:solidFill>
+              <a:srgbClr val="E2E8F0"/>
+            </a:solidFill>
+          </a:ln>
+          <a:effectLst/>
+        </p:spPr>
+        <p:style>
+          <a:lnRef idx="1">
+            <a:schemeClr val="accent1"/>
+          </a:lnRef>
+          <a:fillRef idx="3">
+            <a:schemeClr val="accent1"/>
+          </a:fillRef>
+          <a:effectRef idx="2">
+            <a:schemeClr val="accent1"/>
+          </a:effectRef>
+          <a:fontRef idx="minor">
+            <a:schemeClr val="lt1"/>
+          </a:fontRef>
+        </p:style>
+        <p:txBody>
+          <a:bodyPr rtlCol="0" anchor="ctr"/>
+          <a:lstStyle/>
+          <a:p/>
+        </p:txBody>
+      </p:sp>
+      <p:sp>
+        <p:nvSpPr>
+          <p:cNvPr id="11" name="Rounded Rectangle 10"/>
+          <p:cNvSpPr/>
+          <p:nvPr/>
+        </p:nvSpPr>
+        <p:spPr>
+          <a:xfrm>
+            <a:off x="1005840" y="3429000"/>
+            <a:ext cx="1005840" cy="411480"/>
+          </a:xfrm>
+          <a:prstGeom prst="roundRect">
+            <a:avLst>
+              <a:gd name="adj" fmla="val 30000"/>
+            </a:avLst>
+          </a:prstGeom>
+          <a:solidFill>
+            <a:srgbClr val="CBD5E1"/>
+          </a:solidFill>
+          <a:ln>
+            <a:noFill/>
+          </a:ln>
+          <a:effectLst/>
+        </p:spPr>
+        <p:style>
+          <a:lnRef idx="1">
+            <a:schemeClr val="accent1"/>
+          </a:lnRef>
+          <a:fillRef idx="3">
+            <a:schemeClr val="accent1"/>
+          </a:fillRef>
+          <a:effectRef idx="2">
+            <a:schemeClr val="accent1"/>
+          </a:effectRef>
+          <a:fontRef idx="minor">
+            <a:schemeClr val="lt1"/>
+          </a:fontRef>
+        </p:style>
+        <p:txBody>
+          <a:bodyPr rtlCol="0" anchor="ctr"/>
+          <a:lstStyle/>
+          <a:p/>
+        </p:txBody>
+      </p:sp>
+      <p:sp>
+        <p:nvSpPr>
+          <p:cNvPr id="12" name="TextBox 11"/>
+          <p:cNvSpPr txBox="1"/>
+          <p:nvPr/>
+        </p:nvSpPr>
+        <p:spPr>
+          <a:xfrm>
+            <a:off x="1005840" y="3511296"/>
+            <a:ext cx="1005840" cy="274320"/>
+          </a:xfrm>
+          <a:prstGeom prst="rect">
+            <a:avLst/>
+          </a:prstGeom>
+          <a:noFill/>
+        </p:spPr>
+        <p:txBody>
+          <a:bodyPr wrap="square" lIns="0" rIns="0" tIns="0" bIns="0" anchor="t">
+            <a:spAutoFit/>
+          </a:bodyPr>
+          <a:lstStyle/>
+          <a:p>
+            <a:pPr algn="ctr">
+              <a:lnSpc>
+                <a:spcPct val="115000"/>
+              </a:lnSpc>
+              <a:spcAft>
+                <a:spcPts val="600"/>
+              </a:spcAft>
+            </a:pPr>
+            <a:r>
+              <a:rPr sz="1100" b="1">
+                <a:solidFill>
+                  <a:srgbClr val="1E1B4B"/>
+                </a:solidFill>
+                <a:latin typeface="Calibri"/>
+              </a:rPr>
+              <a:t>Next</a:t>
+            </a:r>
+          </a:p>
+        </p:txBody>
+      </p:sp>
+      <p:sp>
+        <p:nvSpPr>
+          <p:cNvPr id="13" name="TextBox 12"/>
+          <p:cNvSpPr txBox="1"/>
+          <p:nvPr/>
+        </p:nvSpPr>
+        <p:spPr>
+          <a:xfrm>
+            <a:off x="2240280" y="3383280"/>
+            <a:ext cx="3657600" cy="365760"/>
+          </a:xfrm>
+          <a:prstGeom prst="rect">
+            <a:avLst/>
+          </a:prstGeom>
+          <a:noFill/>
+        </p:spPr>
+        <p:txBody>
+          <a:bodyPr wrap="square" lIns="0" rIns="0" tIns="0" bIns="0" anchor="t">
+            <a:spAutoFit/>
+          </a:bodyPr>
+          <a:lstStyle/>
+          <a:p>
+            <a:pPr algn="l">
+              <a:lnSpc>
+                <a:spcPct val="115000"/>
+              </a:lnSpc>
+              <a:spcAft>
+                <a:spcPts val="600"/>
+              </a:spcAft>
+            </a:pPr>
+            <a:r>
+              <a:rPr sz="1500" b="1">
+                <a:solidFill>
+                  <a:srgbClr val="0F172A"/>
+                </a:solidFill>
+                <a:latin typeface="Cambria"/>
+              </a:rPr>
+              <a:t>Publish it</a:t>
+            </a:r>
+          </a:p>
+        </p:txBody>
+      </p:sp>
+      <p:sp>
+        <p:nvSpPr>
+          <p:cNvPr id="14" name="TextBox 13"/>
+          <p:cNvSpPr txBox="1"/>
+          <p:nvPr/>
+        </p:nvSpPr>
+        <p:spPr>
+          <a:xfrm>
+            <a:off x="2240280" y="3703320"/>
+            <a:ext cx="7315200" cy="274320"/>
+          </a:xfrm>
+          <a:prstGeom prst="rect">
+            <a:avLst/>
+          </a:prstGeom>
+          <a:noFill/>
+        </p:spPr>
+        <p:txBody>
+          <a:bodyPr wrap="square" lIns="0" rIns="0" tIns="0" bIns="0" anchor="t">
+            <a:spAutoFit/>
+          </a:bodyPr>
+          <a:lstStyle/>
+          <a:p>
+            <a:pPr algn="l">
+              <a:lnSpc>
+                <a:spcPct val="115000"/>
+              </a:lnSpc>
+              <a:spcAft>
+                <a:spcPts val="600"/>
+              </a:spcAft>
+            </a:pPr>
+            <a:r>
+              <a:rPr sz="1250" b="0">
+                <a:solidFill>
+                  <a:srgbClr val="475569"/>
+                </a:solidFill>
+                <a:latin typeface="Calibri"/>
+              </a:rPr>
+              <a:t>Host on Vercel; Android app via PWABuilder</a:t>
+            </a:r>
+          </a:p>
+        </p:txBody>
+      </p:sp>
+      <p:sp>
+        <p:nvSpPr>
+          <p:cNvPr id="15" name="Rounded Rectangle 14"/>
+          <p:cNvSpPr/>
+          <p:nvPr/>
+        </p:nvSpPr>
+        <p:spPr>
+          <a:xfrm>
+            <a:off x="731520" y="4206240"/>
+            <a:ext cx="10698480" cy="868680"/>
+          </a:xfrm>
+          <a:prstGeom prst="roundRect">
+            <a:avLst>
+              <a:gd name="adj" fmla="val 8000"/>
+            </a:avLst>
+          </a:prstGeom>
+          <a:solidFill>
+            <a:srgbClr val="FFFFFF"/>
+          </a:solidFill>
+          <a:ln w="12700">
+            <a:solidFill>
+              <a:srgbClr val="E2E8F0"/>
+            </a:solidFill>
+          </a:ln>
+          <a:effectLst/>
+        </p:spPr>
+        <p:style>
+          <a:lnRef idx="1">
+            <a:schemeClr val="accent1"/>
+          </a:lnRef>
+          <a:fillRef idx="3">
+            <a:schemeClr val="accent1"/>
+          </a:fillRef>
+          <a:effectRef idx="2">
+            <a:schemeClr val="accent1"/>
+          </a:effectRef>
+          <a:fontRef idx="minor">
+            <a:schemeClr val="lt1"/>
+          </a:fontRef>
+        </p:style>
+        <p:txBody>
+          <a:bodyPr rtlCol="0" anchor="ctr"/>
+          <a:lstStyle/>
+          <a:p/>
+        </p:txBody>
+      </p:sp>
+      <p:sp>
+        <p:nvSpPr>
+          <p:cNvPr id="16" name="Rounded Rectangle 15"/>
+          <p:cNvSpPr/>
+          <p:nvPr/>
+        </p:nvSpPr>
+        <p:spPr>
+          <a:xfrm>
+            <a:off x="1005840" y="4434840"/>
+            <a:ext cx="1005840" cy="411480"/>
+          </a:xfrm>
+          <a:prstGeom prst="roundRect">
+            <a:avLst>
+              <a:gd name="adj" fmla="val 30000"/>
+            </a:avLst>
+          </a:prstGeom>
+          <a:solidFill>
+            <a:srgbClr val="CBD5E1"/>
+          </a:solidFill>
+          <a:ln>
+            <a:noFill/>
+          </a:ln>
+          <a:effectLst/>
+        </p:spPr>
+        <p:style>
+          <a:lnRef idx="1">
+            <a:schemeClr val="accent1"/>
+          </a:lnRef>
+          <a:fillRef idx="3">
+            <a:schemeClr val="accent1"/>
+          </a:fillRef>
+          <a:effectRef idx="2">
+            <a:schemeClr val="accent1"/>
+          </a:effectRef>
+          <a:fontRef idx="minor">
+            <a:schemeClr val="lt1"/>
+          </a:fontRef>
+        </p:style>
+        <p:txBody>
+          <a:bodyPr rtlCol="0" anchor="ctr"/>
+          <a:lstStyle/>
+          <a:p/>
+        </p:txBody>
+      </p:sp>
+      <p:sp>
+        <p:nvSpPr>
+          <p:cNvPr id="17" name="TextBox 16"/>
+          <p:cNvSpPr txBox="1"/>
+          <p:nvPr/>
+        </p:nvSpPr>
+        <p:spPr>
+          <a:xfrm>
+            <a:off x="1005840" y="4517136"/>
+            <a:ext cx="1005840" cy="274320"/>
+          </a:xfrm>
+          <a:prstGeom prst="rect">
+            <a:avLst/>
+          </a:prstGeom>
+          <a:noFill/>
+        </p:spPr>
+        <p:txBody>
+          <a:bodyPr wrap="square" lIns="0" rIns="0" tIns="0" bIns="0" anchor="t">
+            <a:spAutoFit/>
+          </a:bodyPr>
+          <a:lstStyle/>
+          <a:p>
+            <a:pPr algn="ctr">
+              <a:lnSpc>
+                <a:spcPct val="115000"/>
+              </a:lnSpc>
+              <a:spcAft>
+                <a:spcPts val="600"/>
+              </a:spcAft>
+            </a:pPr>
+            <a:r>
+              <a:rPr sz="1100" b="1">
+                <a:solidFill>
+                  <a:srgbClr val="1E1B4B"/>
+                </a:solidFill>
+                <a:latin typeface="Calibri"/>
+              </a:rPr>
+              <a:t>Then</a:t>
+            </a:r>
+          </a:p>
+        </p:txBody>
+      </p:sp>
+      <p:sp>
+        <p:nvSpPr>
+          <p:cNvPr id="18" name="TextBox 17"/>
+          <p:cNvSpPr txBox="1"/>
+          <p:nvPr/>
+        </p:nvSpPr>
+        <p:spPr>
+          <a:xfrm>
+            <a:off x="2240280" y="4389120"/>
+            <a:ext cx="3657600" cy="365760"/>
+          </a:xfrm>
+          <a:prstGeom prst="rect">
+            <a:avLst/>
+          </a:prstGeom>
+          <a:noFill/>
+        </p:spPr>
+        <p:txBody>
+          <a:bodyPr wrap="square" lIns="0" rIns="0" tIns="0" bIns="0" anchor="t">
+            <a:spAutoFit/>
+          </a:bodyPr>
+          <a:lstStyle/>
+          <a:p>
+            <a:pPr algn="l">
+              <a:lnSpc>
+                <a:spcPct val="115000"/>
+              </a:lnSpc>
+              <a:spcAft>
+                <a:spcPts val="600"/>
+              </a:spcAft>
+            </a:pPr>
+            <a:r>
+              <a:rPr sz="1500" b="1">
+                <a:solidFill>
+                  <a:srgbClr val="0F172A"/>
+                </a:solidFill>
+                <a:latin typeface="Cambria"/>
+              </a:rPr>
+              <a:t>Serverless key proxy</a:t>
+            </a:r>
+          </a:p>
+        </p:txBody>
+      </p:sp>
+      <p:sp>
+        <p:nvSpPr>
+          <p:cNvPr id="19" name="TextBox 18"/>
+          <p:cNvSpPr txBox="1"/>
+          <p:nvPr/>
+        </p:nvSpPr>
+        <p:spPr>
+          <a:xfrm>
+            <a:off x="2240280" y="4709159"/>
+            <a:ext cx="7315200" cy="274320"/>
+          </a:xfrm>
+          <a:prstGeom prst="rect">
+            <a:avLst/>
+          </a:prstGeom>
+          <a:noFill/>
+        </p:spPr>
+        <p:txBody>
+          <a:bodyPr wrap="square" lIns="0" rIns="0" tIns="0" bIns="0" anchor="t">
+            <a:spAutoFit/>
+          </a:bodyPr>
+          <a:lstStyle/>
+          <a:p>
+            <a:pPr algn="l">
+              <a:lnSpc>
+                <a:spcPct val="115000"/>
+              </a:lnSpc>
+              <a:spcAft>
+                <a:spcPts val="600"/>
+              </a:spcAft>
+            </a:pPr>
+            <a:r>
+              <a:rPr sz="1250" b="0">
+                <a:solidFill>
+                  <a:srgbClr val="475569"/>
+                </a:solidFill>
+                <a:latin typeface="Calibri"/>
+              </a:rPr>
+              <a:t>Let people learn without their own key</a:t>
+            </a:r>
+          </a:p>
+        </p:txBody>
+      </p:sp>
+      <p:sp>
+        <p:nvSpPr>
+          <p:cNvPr id="20" name="Rounded Rectangle 19"/>
+          <p:cNvSpPr/>
+          <p:nvPr/>
+        </p:nvSpPr>
+        <p:spPr>
+          <a:xfrm>
+            <a:off x="731520" y="5212080"/>
+            <a:ext cx="10698480" cy="868680"/>
+          </a:xfrm>
+          <a:prstGeom prst="roundRect">
+            <a:avLst>
+              <a:gd name="adj" fmla="val 8000"/>
+            </a:avLst>
+          </a:prstGeom>
+          <a:solidFill>
+            <a:srgbClr val="F8FAFC"/>
+          </a:solidFill>
+          <a:ln w="12700">
+            <a:solidFill>
+              <a:srgbClr val="E2E8F0"/>
+            </a:solidFill>
+          </a:ln>
+          <a:effectLst/>
+        </p:spPr>
+        <p:style>
+          <a:lnRef idx="1">
+            <a:schemeClr val="accent1"/>
+          </a:lnRef>
+          <a:fillRef idx="3">
+            <a:schemeClr val="accent1"/>
+          </a:fillRef>
+          <a:effectRef idx="2">
+            <a:schemeClr val="accent1"/>
+          </a:effectRef>
+          <a:fontRef idx="minor">
+            <a:schemeClr val="lt1"/>
+          </a:fontRef>
+        </p:style>
+        <p:txBody>
+          <a:bodyPr rtlCol="0" anchor="ctr"/>
+          <a:lstStyle/>
+          <a:p/>
+        </p:txBody>
+      </p:sp>
+      <p:sp>
+        <p:nvSpPr>
+          <p:cNvPr id="21" name="Rounded Rectangle 20"/>
+          <p:cNvSpPr/>
+          <p:nvPr/>
+        </p:nvSpPr>
+        <p:spPr>
+          <a:xfrm>
+            <a:off x="1005840" y="5440680"/>
+            <a:ext cx="1005840" cy="411480"/>
+          </a:xfrm>
+          <a:prstGeom prst="roundRect">
+            <a:avLst>
+              <a:gd name="adj" fmla="val 30000"/>
+            </a:avLst>
+          </a:prstGeom>
+          <a:solidFill>
+            <a:srgbClr val="CBD5E1"/>
+          </a:solidFill>
+          <a:ln>
+            <a:noFill/>
+          </a:ln>
+          <a:effectLst/>
+        </p:spPr>
+        <p:style>
+          <a:lnRef idx="1">
+            <a:schemeClr val="accent1"/>
+          </a:lnRef>
+          <a:fillRef idx="3">
+            <a:schemeClr val="accent1"/>
+          </a:fillRef>
+          <a:effectRef idx="2">
+            <a:schemeClr val="accent1"/>
+          </a:effectRef>
+          <a:fontRef idx="minor">
+            <a:schemeClr val="lt1"/>
+          </a:fontRef>
+        </p:style>
+        <p:txBody>
+          <a:bodyPr rtlCol="0" anchor="ctr"/>
+          <a:lstStyle/>
+          <a:p/>
+        </p:txBody>
+      </p:sp>
+      <p:sp>
+        <p:nvSpPr>
+          <p:cNvPr id="22" name="TextBox 21"/>
+          <p:cNvSpPr txBox="1"/>
+          <p:nvPr/>
+        </p:nvSpPr>
+        <p:spPr>
+          <a:xfrm>
+            <a:off x="1005840" y="5522976"/>
+            <a:ext cx="1005840" cy="274320"/>
+          </a:xfrm>
+          <a:prstGeom prst="rect">
+            <a:avLst/>
+          </a:prstGeom>
+          <a:noFill/>
+        </p:spPr>
+        <p:txBody>
+          <a:bodyPr wrap="square" lIns="0" rIns="0" tIns="0" bIns="0" anchor="t">
+            <a:spAutoFit/>
+          </a:bodyPr>
+          <a:lstStyle/>
+          <a:p>
+            <a:pPr algn="ctr">
+              <a:lnSpc>
+                <a:spcPct val="115000"/>
+              </a:lnSpc>
+              <a:spcAft>
+                <a:spcPts val="600"/>
+              </a:spcAft>
+            </a:pPr>
+            <a:r>
+              <a:rPr sz="1100" b="1">
+                <a:solidFill>
+                  <a:srgbClr val="1E1B4B"/>
+                </a:solidFill>
+                <a:latin typeface="Calibri"/>
+              </a:rPr>
+              <a:t>Later</a:t>
+            </a:r>
+          </a:p>
+        </p:txBody>
+      </p:sp>
+      <p:sp>
+        <p:nvSpPr>
+          <p:cNvPr id="23" name="TextBox 22"/>
+          <p:cNvSpPr txBox="1"/>
+          <p:nvPr/>
+        </p:nvSpPr>
+        <p:spPr>
+          <a:xfrm>
+            <a:off x="2240280" y="5394960"/>
+            <a:ext cx="3657600" cy="365760"/>
+          </a:xfrm>
+          <a:prstGeom prst="rect">
+            <a:avLst/>
+          </a:prstGeom>
+          <a:noFill/>
+        </p:spPr>
+        <p:txBody>
+          <a:bodyPr wrap="square" lIns="0" rIns="0" tIns="0" bIns="0" anchor="t">
+            <a:spAutoFit/>
+          </a:bodyPr>
+          <a:lstStyle/>
+          <a:p>
+            <a:pPr algn="l">
+              <a:lnSpc>
+                <a:spcPct val="115000"/>
+              </a:lnSpc>
+              <a:spcAft>
+                <a:spcPts val="600"/>
+              </a:spcAft>
+            </a:pPr>
+            <a:r>
+              <a:rPr sz="1500" b="1">
+                <a:solidFill>
+                  <a:srgbClr val="0F172A"/>
+                </a:solidFill>
+                <a:latin typeface="Cambria"/>
+              </a:rPr>
+              <a:t>Accounts, sync and trainer view</a:t>
+            </a:r>
+          </a:p>
+        </p:txBody>
+      </p:sp>
+      <p:sp>
+        <p:nvSpPr>
+          <p:cNvPr id="24" name="TextBox 23"/>
+          <p:cNvSpPr txBox="1"/>
+          <p:nvPr/>
+        </p:nvSpPr>
+        <p:spPr>
+          <a:xfrm>
+            <a:off x="2240280" y="5715000"/>
+            <a:ext cx="7315200" cy="274320"/>
+          </a:xfrm>
+          <a:prstGeom prst="rect">
+            <a:avLst/>
+          </a:prstGeom>
+          <a:noFill/>
+        </p:spPr>
+        <p:txBody>
+          <a:bodyPr wrap="square" lIns="0" rIns="0" tIns="0" bIns="0" anchor="t">
+            <a:spAutoFit/>
+          </a:bodyPr>
+          <a:lstStyle/>
+          <a:p>
+            <a:pPr algn="l">
+              <a:lnSpc>
+                <a:spcPct val="115000"/>
+              </a:lnSpc>
+              <a:spcAft>
+                <a:spcPts val="600"/>
+              </a:spcAft>
+            </a:pPr>
+            <a:r>
+              <a:rPr sz="1250" b="0">
+                <a:solidFill>
+                  <a:srgbClr val="475569"/>
+                </a:solidFill>
+                <a:latin typeface="Calibri"/>
+              </a:rPr>
+              <a:t>Progress across devices; team skill profiles in one place</a:t>
+            </a:r>
+          </a:p>
+        </p:txBody>
+      </p:sp>
+    </p:spTree>
+  </p:cSld>
+  <p:clrMapOvr>
+    <a:masterClrMapping/>
+  </p:clrMapOvr>
+</p:sld>
+</file>
+
+<file path=ppt/slides/slide17.xml><?xml version="1.0" encoding="utf-8"?>
+<p:sld xmlns:a="http://schemas.openxmlformats.org/drawingml/2006/main" xmlns:p="http://schemas.openxmlformats.org/presentationml/2006/main" xmlns:r="http://schemas.openxmlformats.org/officeDocument/2006/relationships">
+  <p:cSld>
+    <p:spTree>
+      <p:nvGrpSpPr>
+        <p:cNvPr id="1" name=""/>
+        <p:cNvGrpSpPr/>
+        <p:nvPr/>
+      </p:nvGrpSpPr>
+      <p:grpSpPr/>
+      <p:sp>
+        <p:nvSpPr>
+          <p:cNvPr id="2" name="Rectangle 1"/>
+          <p:cNvSpPr/>
+          <p:nvPr/>
+        </p:nvSpPr>
+        <p:spPr>
+          <a:xfrm>
+            <a:off x="0" y="0"/>
+            <a:ext cx="12191695" cy="6858000"/>
+          </a:xfrm>
+          <a:prstGeom prst="rect">
+            <a:avLst/>
+          </a:prstGeom>
+          <a:solidFill>
             <a:srgbClr val="1E1B4B"/>
           </a:solidFill>
           <a:ln>
@@ -11127,7 +12163,7 @@
                 </a:solidFill>
                 <a:latin typeface="Calibri"/>
               </a:rPr>
-              <a:t>docs/USER_GUIDE.md  ·  docs/DEVELOPER_GUIDE.md</a:t>
+              <a:t>docs/USER_GUIDE.docx  ·  docs/DEVELOPER_GUIDE.docx</a:t>
             </a:r>
           </a:p>
         </p:txBody>
@@ -11256,6 +12292,48 @@
                 <a:latin typeface="Calibri"/>
               </a:rPr>
               <a:t>One entry adds an AI provider</a:t>
+            </a:r>
+          </a:p>
+        </p:txBody>
+      </p:sp>
+      <p:sp>
+        <p:nvSpPr>
+          <p:cNvPr id="14" name="Credit"/>
+          <p:cNvSpPr txBox="1"/>
+          <p:nvPr/>
+        </p:nvSpPr>
+        <p:spPr>
+          <a:xfrm>
+            <a:off x="731520" y="6172200"/>
+            <a:ext cx="10789920" cy="365760"/>
+          </a:xfrm>
+          <a:prstGeom prst="rect">
+            <a:avLst/>
+          </a:prstGeom>
+          <a:noFill/>
+        </p:spPr>
+        <p:txBody>
+          <a:bodyPr wrap="square" lIns="0" rIns="0" tIns="0" bIns="0" anchor="t">
+            <a:spAutoFit/>
+          </a:bodyPr>
+          <a:lstStyle/>
+          <a:p>
+            <a:pPr algn="l">
+              <a:lnSpc>
+                <a:spcPct val="115000"/>
+              </a:lnSpc>
+              <a:spcAft>
+                <a:spcPts val="600"/>
+              </a:spcAft>
+            </a:pPr>
+            <a:r>
+              <a:rPr sz="1150" b="0">
+                <a:solidFill>
+                  <a:srgbClr val="C7D2FE"/>
+                </a:solidFill>
+                <a:latin typeface="Calibri"/>
+              </a:rPr>
+              <a:t>Designed &amp; developed by Harbinger  ·  © 2026 Harbinger. All rights reserved.</a:t>
             </a:r>
           </a:p>
         </p:txBody>
@@ -18650,7 +19728,7 @@
                 </a:solidFill>
                 <a:latin typeface="Calibri"/>
               </a:rPr>
-              <a:t>The default provider, and the features the app is built around</a:t>
+              <a:t>The deepest integration, and the features the app is built around</a:t>
             </a:r>
           </a:p>
         </p:txBody>

--- a/docs/SkillPath-Presentation.pptx
+++ b/docs/SkillPath-Presentation.pptx
@@ -518,7 +518,7 @@
           <a:lstStyle/>
           <a:p>
             <a:r>
-              <a:t>Opening: SkillPath is an AI learning coach. Most training starts by guessing what you know. This starts by measuring it, then teaches only the gaps. There is no backend to host: it runs in the browser and installs on a phone or laptop like an app. It works with whichever AI provider you already pay for - or Google Gemini's free tier, which is the default.</a:t>
+              <a:t>Opening: SkillPath is an AI learning coach. Most training starts by guessing what you know. This starts by measuring it, then teaches only the gaps. It runs entirely in a browser tab, with no backend to host, and works with whichever AI provider you already pay for - or Google Gemini's free tier, which is the default.</a:t>
             </a:r>
           </a:p>
         </p:txBody>
@@ -728,7 +728,7 @@
           <a:lstStyle/>
           <a:p>
             <a:r>
-              <a:t>Deliberately boring architecture: a static site, a service worker for offline use, and the provider's API. It deploys anywhere, costs nothing to host, and has two clearly marked seams for the next stage - storage, and an optional key proxy.</a:t>
+              <a:t>Deliberately boring architecture: a static site plus the provider's API. It deploys anywhere, costs nothing to host, and has two clearly marked seams for the next stage - storage, and an optional key proxy.</a:t>
             </a:r>
           </a:p>
         </p:txBody>
@@ -938,7 +938,7 @@
           <a:lstStyle/>
           <a:p>
             <a:r>
-              <a:t>Close the technical story with direction. The installable, encrypted version is done. Publishing is next and small: static hosting on Vercel, and PWABuilder turns the same site into an Android package. The key proxy only matters if we want people to learn without a key of their own.</a:t>
+              <a:t>Close the technical story with direction. Encrypted keys and backups are done. Publishing is next and small: static hosting on Vercel. The key proxy only matters if we want people to learn without a key of their own.</a:t>
             </a:r>
           </a:p>
         </p:txBody>
@@ -1078,7 +1078,7 @@
           <a:lstStyle/>
           <a:p>
             <a:r>
-              <a:t>This is what turned a personal tool into something we can hand out. SkillPath is now a Progressive Web App: people install it from the browser, it opens offline, and it updates itself. Each learner uses their own key - Gemini's is free - and it is encrypted on their device with a key the app can use but never read out. Backups are a single file, so nothing is lost when someone changes phone.</a:t>
+              <a:t>This is what makes it safe to hand out. Each learner uses their own key - Gemini's is free - and it is encrypted on their device with a key the app can use but never read out. Nothing secret is ever built into the app. Backups are a single file, so nothing is lost when someone changes computer.</a:t>
             </a:r>
           </a:p>
         </p:txBody>
@@ -5067,7 +5067,7 @@
                 </a:solidFill>
                 <a:latin typeface="Calibri"/>
               </a:rPr>
-              <a:t>Installs as an app</a:t>
+              <a:t>Runs in a browser tab</a:t>
             </a:r>
           </a:p>
         </p:txBody>
@@ -7131,7 +7131,7 @@
                 </a:solidFill>
                 <a:latin typeface="Calibri"/>
               </a:rPr>
-              <a:t>No backend, no database, no account - and it installs as an app</a:t>
+              <a:t>No backend, no database, no account</a:t>
             </a:r>
           </a:p>
         </p:txBody>
@@ -8076,7 +8076,7 @@
                 </a:solidFill>
                 <a:latin typeface="Cambria"/>
               </a:rPr>
-              <a:t>Private, installable, offline</a:t>
+              <a:t>Private by design</a:t>
             </a:r>
           </a:p>
         </p:txBody>
@@ -8118,7 +8118,7 @@
                 </a:solidFill>
                 <a:latin typeface="Calibri"/>
               </a:rPr>
-              <a:t>One codebase for the web, Android and iPhone - no app store needed</a:t>
+              <a:t>Your data and your API key stay on your device</a:t>
             </a:r>
           </a:p>
         </p:txBody>
@@ -8204,7 +8204,7 @@
                 </a:solidFill>
                 <a:latin typeface="Cambria"/>
               </a:rPr>
-              <a:t>Installs like an app</a:t>
+              <a:t>Your key, encrypted</a:t>
             </a:r>
           </a:p>
         </p:txBody>
@@ -8246,7 +8246,7 @@
                 </a:solidFill>
                 <a:latin typeface="Calibri"/>
               </a:rPr>
-              <a:t>Install app in Chrome or Edge, Add to Home Screen on iPhone - own icon and window.</a:t>
+              <a:t>AES-GCM with a non-extractable device key; decrypted only in memory.</a:t>
             </a:r>
           </a:p>
         </p:txBody>
@@ -8332,7 +8332,7 @@
                 </a:solidFill>
                 <a:latin typeface="Cambria"/>
               </a:rPr>
-              <a:t>Works offline</a:t>
+              <a:t>No keys in the build</a:t>
             </a:r>
           </a:p>
         </p:txBody>
@@ -8374,7 +8374,7 @@
                 </a:solidFill>
                 <a:latin typeface="Calibri"/>
               </a:rPr>
-              <a:t>A service worker caches the app, so saved tracks open with no connection.</a:t>
+              <a:t>.env keys are for local development only - a deployed app never contains one.</a:t>
             </a:r>
           </a:p>
         </p:txBody>
@@ -8460,7 +8460,7 @@
                 </a:solidFill>
                 <a:latin typeface="Cambria"/>
               </a:rPr>
-              <a:t>Your key, encrypted</a:t>
+              <a:t>Back up and restore</a:t>
             </a:r>
           </a:p>
         </p:txBody>
@@ -8502,7 +8502,7 @@
                 </a:solidFill>
                 <a:latin typeface="Calibri"/>
               </a:rPr>
-              <a:t>AES-GCM with a non-extractable device key; decrypted only in memory.</a:t>
+              <a:t>Every track in one JSON file, checked on restore. API keys are never included.</a:t>
             </a:r>
           </a:p>
         </p:txBody>
@@ -8588,7 +8588,7 @@
                 </a:solidFill>
                 <a:latin typeface="Cambria"/>
               </a:rPr>
-              <a:t>No keys in the build</a:t>
+              <a:t>Gemini by default</a:t>
             </a:r>
           </a:p>
         </p:txBody>
@@ -8630,7 +8630,7 @@
                 </a:solidFill>
                 <a:latin typeface="Calibri"/>
               </a:rPr>
-              <a:t>.env keys are for local development only - a deployed app never contains one.</a:t>
+              <a:t>A free key in a minute, no credit card. Switch to another provider any time.</a:t>
             </a:r>
           </a:p>
         </p:txBody>
@@ -8716,7 +8716,7 @@
                 </a:solidFill>
                 <a:latin typeface="Cambria"/>
               </a:rPr>
-              <a:t>Back up and restore</a:t>
+              <a:t>Help built in</a:t>
             </a:r>
           </a:p>
         </p:txBody>
@@ -8758,7 +8758,7 @@
                 </a:solidFill>
                 <a:latin typeface="Calibri"/>
               </a:rPr>
-              <a:t>Every track in one JSON file, checked on restore. API keys are never included.</a:t>
+              <a:t>How to use, About, and Disclaimer &amp; privacy, one tap away in the menu.</a:t>
             </a:r>
           </a:p>
         </p:txBody>
@@ -8844,7 +8844,7 @@
                 </a:solidFill>
                 <a:latin typeface="Cambria"/>
               </a:rPr>
-              <a:t>Updates itself</a:t>
+              <a:t>No account, no server</a:t>
             </a:r>
           </a:p>
         </p:txBody>
@@ -8886,7 +8886,7 @@
                 </a:solidFill>
                 <a:latin typeface="Calibri"/>
               </a:rPr>
-              <a:t>A new deploy shows "New version ready - Reload" - nobody is stuck on an old copy.</a:t>
+              <a:t>Tracks stay in this browser; text goes only to the chosen AI provider.</a:t>
             </a:r>
           </a:p>
         </p:txBody>
@@ -9118,7 +9118,7 @@
                 </a:solidFill>
                 <a:latin typeface="Cambria"/>
               </a:rPr>
-              <a:t>~5,400</a:t>
+              <a:t>~5,200</a:t>
             </a:r>
           </a:p>
         </p:txBody>
@@ -9246,7 +9246,7 @@
                 </a:solidFill>
                 <a:latin typeface="Cambria"/>
               </a:rPr>
-              <a:t>48</a:t>
+              <a:t>45</a:t>
             </a:r>
           </a:p>
         </p:txBody>
@@ -9843,25 +9843,6 @@
               <a:t>IndexedDB via idb; Web Crypto for the API key</a:t>
             </a:r>
           </a:p>
-          <a:p>
-            <a:pPr algn="l">
-              <a:lnSpc>
-                <a:spcPct val="115000"/>
-              </a:lnSpc>
-              <a:spcAft>
-                <a:spcPts val="600"/>
-              </a:spcAft>
-            </a:pPr>
-            <a:r>
-              <a:rPr sz="1250" b="0">
-                <a:solidFill>
-                  <a:srgbClr val="475569"/>
-                </a:solidFill>
-                <a:latin typeface="Calibri"/>
-              </a:rPr>
-              <a:t>vite-plugin-pwa (Workbox): install, offline, updates</a:t>
-            </a:r>
-          </a:p>
         </p:txBody>
       </p:sp>
       <p:sp>
@@ -10008,7 +9989,7 @@
                 </a:solidFill>
                 <a:latin typeface="Calibri"/>
               </a:rPr>
-              <a:t>Production build checked in Chrome: offline, key encryption, backup</a:t>
+              <a:t>Production build checked in Chrome: key encryption, backup</a:t>
             </a:r>
           </a:p>
           <a:p>
@@ -11071,7 +11052,7 @@
                 </a:solidFill>
                 <a:latin typeface="Cambria"/>
               </a:rPr>
-              <a:t>Installable app, encrypted keys</a:t>
+              <a:t>Encrypted keys, backup and restore</a:t>
             </a:r>
           </a:p>
         </p:txBody>
@@ -11113,7 +11094,7 @@
                 </a:solidFill>
                 <a:latin typeface="Calibri"/>
               </a:rPr>
-              <a:t>Offline use, backup and restore, Gemini by default</a:t>
+              <a:t>Gemini by default, help built into the menu</a:t>
             </a:r>
           </a:p>
         </p:txBody>
@@ -11329,7 +11310,7 @@
                 </a:solidFill>
                 <a:latin typeface="Calibri"/>
               </a:rPr>
-              <a:t>Host on Vercel; Android app via PWABuilder</a:t>
+              <a:t>Host on Vercel - a free static site</a:t>
             </a:r>
           </a:p>
         </p:txBody>

--- a/docs/SkillPath-Presentation.pptx
+++ b/docs/SkillPath-Presentation.pptx
@@ -8630,7 +8630,7 @@
                 </a:solidFill>
                 <a:latin typeface="Calibri"/>
               </a:rPr>
-              <a:t>.env keys are for local development only - a deployed app never contains one.</a:t>
+              <a:t>Keys live only in Settings, encrypted on the device - never in the code or a file.</a:t>
             </a:r>
           </a:p>
         </p:txBody>

--- a/docs/SkillPath-Presentation.pptx
+++ b/docs/SkillPath-Presentation.pptx
@@ -8374,7 +8374,7 @@
                 </a:solidFill>
                 <a:latin typeface="Calibri"/>
               </a:rPr>
-              <a:t>.env keys are for local development only - a deployed app never contains one.</a:t>
+              <a:t>Keys live only in Settings, encrypted on the device - never in the code or a file.</a:t>
             </a:r>
           </a:p>
         </p:txBody>
